--- a/StockMaster_Final_Review_Presentation.pptx
+++ b/StockMaster_Final_Review_Presentation.pptx
@@ -25,6 +25,7 @@
     <p:sldId id="273" r:id="rId24"/>
     <p:sldId id="274" r:id="rId25"/>
     <p:sldId id="275" r:id="rId26"/>
+    <p:sldId id="276" r:id="rId27"/>
   </p:sldIdLst>
   <p:sldSz cx="12191695" cy="6858000" type="screen4x3"/>
   <p:notesSz cx="6858000" cy="9144000"/>
@@ -3486,6 +3487,709 @@
 </file>
 
 <file path=ppt/slides/slide10.xml><?xml version="1.0" encoding="utf-8"?>
+<p:sld xmlns:a="http://schemas.openxmlformats.org/drawingml/2006/main" xmlns:p="http://schemas.openxmlformats.org/presentationml/2006/main" xmlns:r="http://schemas.openxmlformats.org/officeDocument/2006/relationships">
+  <p:cSld>
+    <p:spTree>
+      <p:nvGrpSpPr>
+        <p:cNvPr id="1" name=""/>
+        <p:cNvGrpSpPr/>
+        <p:nvPr/>
+      </p:nvGrpSpPr>
+      <p:grpSpPr/>
+      <p:sp>
+        <p:nvSpPr>
+          <p:cNvPr id="2" name="Rectangle 1"/>
+          <p:cNvSpPr/>
+          <p:nvPr/>
+        </p:nvSpPr>
+        <p:spPr>
+          <a:xfrm>
+            <a:off x="0" y="0"/>
+            <a:ext cx="12191695" cy="6858000"/>
+          </a:xfrm>
+          <a:prstGeom prst="rect">
+            <a:avLst/>
+          </a:prstGeom>
+          <a:solidFill>
+            <a:srgbClr val="0A0F1D"/>
+          </a:solidFill>
+          <a:ln>
+            <a:noFill/>
+          </a:ln>
+        </p:spPr>
+        <p:style>
+          <a:lnRef idx="1">
+            <a:schemeClr val="accent1"/>
+          </a:lnRef>
+          <a:fillRef idx="3">
+            <a:schemeClr val="accent1"/>
+          </a:fillRef>
+          <a:effectRef idx="2">
+            <a:schemeClr val="accent1"/>
+          </a:effectRef>
+          <a:fontRef idx="minor">
+            <a:schemeClr val="lt1"/>
+          </a:fontRef>
+        </p:style>
+        <p:txBody>
+          <a:bodyPr rtlCol="0" anchor="ctr"/>
+          <a:lstStyle/>
+          <a:p>
+            <a:pPr algn="ctr"/>
+          </a:p>
+        </p:txBody>
+      </p:sp>
+      <p:sp>
+        <p:nvSpPr>
+          <p:cNvPr id="3" name="TextBox 2"/>
+          <p:cNvSpPr txBox="1"/>
+          <p:nvPr/>
+        </p:nvSpPr>
+        <p:spPr>
+          <a:xfrm>
+            <a:off x="731520" y="320040"/>
+            <a:ext cx="9144000" cy="320040"/>
+          </a:xfrm>
+          <a:prstGeom prst="rect">
+            <a:avLst/>
+          </a:prstGeom>
+          <a:noFill/>
+        </p:spPr>
+        <p:txBody>
+          <a:bodyPr wrap="square">
+            <a:spAutoFit/>
+          </a:bodyPr>
+          <a:lstStyle/>
+          <a:p>
+            <a:pPr>
+              <a:defRPr sz="1000" b="1">
+                <a:solidFill>
+                  <a:srgbClr val="06B6D4"/>
+                </a:solidFill>
+                <a:latin typeface="Arial"/>
+              </a:defRPr>
+            </a:pPr>
+            <a:r>
+              <a:t>STOCK MASTER | DBMS SEMESTER PROJECT</a:t>
+            </a:r>
+          </a:p>
+        </p:txBody>
+      </p:sp>
+      <p:sp>
+        <p:nvSpPr>
+          <p:cNvPr id="4" name="TextBox 3"/>
+          <p:cNvSpPr txBox="1"/>
+          <p:nvPr/>
+        </p:nvSpPr>
+        <p:spPr>
+          <a:xfrm>
+            <a:off x="10241280" y="320040"/>
+            <a:ext cx="1188720" cy="320040"/>
+          </a:xfrm>
+          <a:prstGeom prst="rect">
+            <a:avLst/>
+          </a:prstGeom>
+          <a:noFill/>
+        </p:spPr>
+        <p:txBody>
+          <a:bodyPr wrap="none">
+            <a:spAutoFit/>
+          </a:bodyPr>
+          <a:lstStyle/>
+          <a:p>
+            <a:pPr algn="r">
+              <a:defRPr sz="1000" b="1">
+                <a:solidFill>
+                  <a:srgbClr val="6E82A0"/>
+                </a:solidFill>
+                <a:latin typeface="Arial"/>
+              </a:defRPr>
+            </a:pPr>
+            <a:r>
+              <a:t>07 / 18</a:t>
+            </a:r>
+          </a:p>
+        </p:txBody>
+      </p:sp>
+      <p:sp>
+        <p:nvSpPr>
+          <p:cNvPr id="5" name="TextBox 4"/>
+          <p:cNvSpPr txBox="1"/>
+          <p:nvPr/>
+        </p:nvSpPr>
+        <p:spPr>
+          <a:xfrm>
+            <a:off x="731520" y="594360"/>
+            <a:ext cx="10515600" cy="548640"/>
+          </a:xfrm>
+          <a:prstGeom prst="rect">
+            <a:avLst/>
+          </a:prstGeom>
+          <a:noFill/>
+        </p:spPr>
+        <p:txBody>
+          <a:bodyPr wrap="square">
+            <a:spAutoFit/>
+          </a:bodyPr>
+          <a:lstStyle/>
+          <a:p>
+            <a:pPr>
+              <a:defRPr sz="2100" b="1">
+                <a:solidFill>
+                  <a:srgbClr val="F8FAFC"/>
+                </a:solidFill>
+                <a:latin typeface="Arial"/>
+              </a:defRPr>
+            </a:pPr>
+            <a:r>
+              <a:t>Database Normalization Analysis (Part 1: Core Master Entities)</a:t>
+            </a:r>
+          </a:p>
+        </p:txBody>
+      </p:sp>
+      <p:sp>
+        <p:nvSpPr>
+          <p:cNvPr id="6" name="TextBox 5"/>
+          <p:cNvSpPr txBox="1"/>
+          <p:nvPr/>
+        </p:nvSpPr>
+        <p:spPr>
+          <a:xfrm>
+            <a:off x="731520" y="1115568"/>
+            <a:ext cx="10515600" cy="320040"/>
+          </a:xfrm>
+          <a:prstGeom prst="rect">
+            <a:avLst/>
+          </a:prstGeom>
+          <a:noFill/>
+        </p:spPr>
+        <p:txBody>
+          <a:bodyPr wrap="square">
+            <a:spAutoFit/>
+          </a:bodyPr>
+          <a:lstStyle/>
+          <a:p>
+            <a:pPr>
+              <a:defRPr sz="1100">
+                <a:solidFill>
+                  <a:srgbClr val="A0AFC8"/>
+                </a:solidFill>
+                <a:latin typeface="Calibri"/>
+              </a:defRPr>
+            </a:pPr>
+            <a:r>
+              <a:t>Functional dependencies, candidate keys, and BCNF verification for master entities</a:t>
+            </a:r>
+          </a:p>
+        </p:txBody>
+      </p:sp>
+      <p:graphicFrame>
+        <p:nvGraphicFramePr>
+          <p:cNvPr id="7" name="Table 6"/>
+          <p:cNvGraphicFramePr>
+            <a:graphicFrameLocks noGrp="1"/>
+          </p:cNvGraphicFramePr>
+          <p:nvPr/>
+        </p:nvGraphicFramePr>
+        <p:xfrm>
+          <a:off x="731520" y="1645920"/>
+          <a:ext cx="10728655" cy="4480560"/>
+        </p:xfrm>
+        <a:graphic>
+          <a:graphicData uri="http://schemas.openxmlformats.org/drawingml/2006/table">
+            <a:tbl>
+              <a:tblPr firstRow="1" bandRow="1">
+                <a:tableStyleId>{5C22544A-7EE6-4342-B048-85BDC9FD1C3A}</a:tableStyleId>
+              </a:tblPr>
+              <a:tblGrid>
+                <a:gridCol w="1645920"/>
+                <a:gridCol w="2011680"/>
+                <a:gridCol w="1463040"/>
+                <a:gridCol w="5608015"/>
+              </a:tblGrid>
+              <a:tr h="896112">
+                <a:tc>
+                  <a:txBody>
+                    <a:bodyPr/>
+                    <a:lstStyle/>
+                    <a:p>
+                      <a:pPr>
+                        <a:defRPr sz="1100" b="1">
+                          <a:solidFill>
+                            <a:srgbClr val="F8FAFC"/>
+                          </a:solidFill>
+                        </a:defRPr>
+                      </a:pPr>
+                      <a:r>
+                        <a:t>Table</a:t>
+                      </a:r>
+                    </a:p>
+                  </a:txBody>
+                  <a:tcPr>
+                    <a:solidFill>
+                      <a:srgbClr val="1A366E"/>
+                    </a:solidFill>
+                  </a:tcPr>
+                </a:tc>
+                <a:tc>
+                  <a:txBody>
+                    <a:bodyPr/>
+                    <a:lstStyle/>
+                    <a:p>
+                      <a:pPr>
+                        <a:defRPr sz="1100" b="1">
+                          <a:solidFill>
+                            <a:srgbClr val="F8FAFC"/>
+                          </a:solidFill>
+                        </a:defRPr>
+                      </a:pPr>
+                      <a:r>
+                        <a:t>Candidate Keys</a:t>
+                      </a:r>
+                    </a:p>
+                  </a:txBody>
+                  <a:tcPr>
+                    <a:solidFill>
+                      <a:srgbClr val="1A366E"/>
+                    </a:solidFill>
+                  </a:tcPr>
+                </a:tc>
+                <a:tc>
+                  <a:txBody>
+                    <a:bodyPr/>
+                    <a:lstStyle/>
+                    <a:p>
+                      <a:pPr>
+                        <a:defRPr sz="1100" b="1">
+                          <a:solidFill>
+                            <a:srgbClr val="F8FAFC"/>
+                          </a:solidFill>
+                        </a:defRPr>
+                      </a:pPr>
+                      <a:r>
+                        <a:t>Normal Form</a:t>
+                      </a:r>
+                    </a:p>
+                  </a:txBody>
+                  <a:tcPr>
+                    <a:solidFill>
+                      <a:srgbClr val="1A366E"/>
+                    </a:solidFill>
+                  </a:tcPr>
+                </a:tc>
+                <a:tc>
+                  <a:txBody>
+                    <a:bodyPr/>
+                    <a:lstStyle/>
+                    <a:p>
+                      <a:pPr>
+                        <a:defRPr sz="1100" b="1">
+                          <a:solidFill>
+                            <a:srgbClr val="F8FAFC"/>
+                          </a:solidFill>
+                        </a:defRPr>
+                      </a:pPr>
+                      <a:r>
+                        <a:t>Representative Functional Dependency / Proof</a:t>
+                      </a:r>
+                    </a:p>
+                  </a:txBody>
+                  <a:tcPr>
+                    <a:solidFill>
+                      <a:srgbClr val="1A366E"/>
+                    </a:solidFill>
+                  </a:tcPr>
+                </a:tc>
+              </a:tr>
+              <a:tr h="896112">
+                <a:tc>
+                  <a:txBody>
+                    <a:bodyPr/>
+                    <a:lstStyle/>
+                    <a:p>
+                      <a:pPr>
+                        <a:defRPr sz="1000" b="1">
+                          <a:solidFill>
+                            <a:srgbClr val="06B6D4"/>
+                          </a:solidFill>
+                        </a:defRPr>
+                      </a:pPr>
+                      <a:r>
+                        <a:t>users</a:t>
+                      </a:r>
+                    </a:p>
+                  </a:txBody>
+                  <a:tcPr>
+                    <a:solidFill>
+                      <a:srgbClr val="141C30"/>
+                    </a:solidFill>
+                  </a:tcPr>
+                </a:tc>
+                <a:tc>
+                  <a:txBody>
+                    <a:bodyPr/>
+                    <a:lstStyle/>
+                    <a:p>
+                      <a:pPr>
+                        <a:defRPr sz="1000">
+                          <a:solidFill>
+                            <a:srgbClr val="F8FAFC"/>
+                          </a:solidFill>
+                        </a:defRPr>
+                      </a:pPr>
+                      <a:r>
+                        <a:t>UserID; Email</a:t>
+                      </a:r>
+                    </a:p>
+                  </a:txBody>
+                  <a:tcPr>
+                    <a:solidFill>
+                      <a:srgbClr val="141C30"/>
+                    </a:solidFill>
+                  </a:tcPr>
+                </a:tc>
+                <a:tc>
+                  <a:txBody>
+                    <a:bodyPr/>
+                    <a:lstStyle/>
+                    <a:p>
+                      <a:pPr>
+                        <a:defRPr sz="1000" b="1">
+                          <a:solidFill>
+                            <a:srgbClr val="10B981"/>
+                          </a:solidFill>
+                        </a:defRPr>
+                      </a:pPr>
+                      <a:r>
+                        <a:t>BCNF</a:t>
+                      </a:r>
+                    </a:p>
+                  </a:txBody>
+                  <a:tcPr>
+                    <a:solidFill>
+                      <a:srgbClr val="141C30"/>
+                    </a:solidFill>
+                  </a:tcPr>
+                </a:tc>
+                <a:tc>
+                  <a:txBody>
+                    <a:bodyPr/>
+                    <a:lstStyle/>
+                    <a:p>
+                      <a:pPr>
+                        <a:defRPr sz="1000">
+                          <a:solidFill>
+                            <a:srgbClr val="A0AFC8"/>
+                          </a:solidFill>
+                        </a:defRPr>
+                      </a:pPr>
+                      <a:r>
+                        <a:t>UserID → Name, Email, Password, Role; Email → UserID, Name, Password, Role. Both determinants are superkeys. No non-key attributes determine other attributes.</a:t>
+                      </a:r>
+                    </a:p>
+                  </a:txBody>
+                  <a:tcPr>
+                    <a:solidFill>
+                      <a:srgbClr val="141C30"/>
+                    </a:solidFill>
+                  </a:tcPr>
+                </a:tc>
+              </a:tr>
+              <a:tr h="896112">
+                <a:tc>
+                  <a:txBody>
+                    <a:bodyPr/>
+                    <a:lstStyle/>
+                    <a:p>
+                      <a:pPr>
+                        <a:defRPr sz="1000" b="1">
+                          <a:solidFill>
+                            <a:srgbClr val="06B6D4"/>
+                          </a:solidFill>
+                        </a:defRPr>
+                      </a:pPr>
+                      <a:r>
+                        <a:t>suppliers</a:t>
+                      </a:r>
+                    </a:p>
+                  </a:txBody>
+                  <a:tcPr>
+                    <a:solidFill>
+                      <a:srgbClr val="0F1626"/>
+                    </a:solidFill>
+                  </a:tcPr>
+                </a:tc>
+                <a:tc>
+                  <a:txBody>
+                    <a:bodyPr/>
+                    <a:lstStyle/>
+                    <a:p>
+                      <a:pPr>
+                        <a:defRPr sz="1000">
+                          <a:solidFill>
+                            <a:srgbClr val="F8FAFC"/>
+                          </a:solidFill>
+                        </a:defRPr>
+                      </a:pPr>
+                      <a:r>
+                        <a:t>SupplierID; Email</a:t>
+                      </a:r>
+                    </a:p>
+                  </a:txBody>
+                  <a:tcPr>
+                    <a:solidFill>
+                      <a:srgbClr val="0F1626"/>
+                    </a:solidFill>
+                  </a:tcPr>
+                </a:tc>
+                <a:tc>
+                  <a:txBody>
+                    <a:bodyPr/>
+                    <a:lstStyle/>
+                    <a:p>
+                      <a:pPr>
+                        <a:defRPr sz="1000" b="1">
+                          <a:solidFill>
+                            <a:srgbClr val="10B981"/>
+                          </a:solidFill>
+                        </a:defRPr>
+                      </a:pPr>
+                      <a:r>
+                        <a:t>BCNF</a:t>
+                      </a:r>
+                    </a:p>
+                  </a:txBody>
+                  <a:tcPr>
+                    <a:solidFill>
+                      <a:srgbClr val="0F1626"/>
+                    </a:solidFill>
+                  </a:tcPr>
+                </a:tc>
+                <a:tc>
+                  <a:txBody>
+                    <a:bodyPr/>
+                    <a:lstStyle/>
+                    <a:p>
+                      <a:pPr>
+                        <a:defRPr sz="1000">
+                          <a:solidFill>
+                            <a:srgbClr val="A0AFC8"/>
+                          </a:solidFill>
+                        </a:defRPr>
+                      </a:pPr>
+                      <a:r>
+                        <a:t>SupplierID → SupplierName, Phone, Email, Address; Email → SupplierID. All attributes are fully functionally dependent on candidate keys. No partial or transitive dependencies.</a:t>
+                      </a:r>
+                    </a:p>
+                  </a:txBody>
+                  <a:tcPr>
+                    <a:solidFill>
+                      <a:srgbClr val="0F1626"/>
+                    </a:solidFill>
+                  </a:tcPr>
+                </a:tc>
+              </a:tr>
+              <a:tr h="896112">
+                <a:tc>
+                  <a:txBody>
+                    <a:bodyPr/>
+                    <a:lstStyle/>
+                    <a:p>
+                      <a:pPr>
+                        <a:defRPr sz="1000" b="1">
+                          <a:solidFill>
+                            <a:srgbClr val="06B6D4"/>
+                          </a:solidFill>
+                        </a:defRPr>
+                      </a:pPr>
+                      <a:r>
+                        <a:t>products</a:t>
+                      </a:r>
+                    </a:p>
+                  </a:txBody>
+                  <a:tcPr>
+                    <a:solidFill>
+                      <a:srgbClr val="141C30"/>
+                    </a:solidFill>
+                  </a:tcPr>
+                </a:tc>
+                <a:tc>
+                  <a:txBody>
+                    <a:bodyPr/>
+                    <a:lstStyle/>
+                    <a:p>
+                      <a:pPr>
+                        <a:defRPr sz="1000">
+                          <a:solidFill>
+                            <a:srgbClr val="F8FAFC"/>
+                          </a:solidFill>
+                        </a:defRPr>
+                      </a:pPr>
+                      <a:r>
+                        <a:t>ProductID</a:t>
+                      </a:r>
+                    </a:p>
+                  </a:txBody>
+                  <a:tcPr>
+                    <a:solidFill>
+                      <a:srgbClr val="141C30"/>
+                    </a:solidFill>
+                  </a:tcPr>
+                </a:tc>
+                <a:tc>
+                  <a:txBody>
+                    <a:bodyPr/>
+                    <a:lstStyle/>
+                    <a:p>
+                      <a:pPr>
+                        <a:defRPr sz="1000" b="1">
+                          <a:solidFill>
+                            <a:srgbClr val="10B981"/>
+                          </a:solidFill>
+                        </a:defRPr>
+                      </a:pPr>
+                      <a:r>
+                        <a:t>BCNF</a:t>
+                      </a:r>
+                    </a:p>
+                  </a:txBody>
+                  <a:tcPr>
+                    <a:solidFill>
+                      <a:srgbClr val="141C30"/>
+                    </a:solidFill>
+                  </a:tcPr>
+                </a:tc>
+                <a:tc>
+                  <a:txBody>
+                    <a:bodyPr/>
+                    <a:lstStyle/>
+                    <a:p>
+                      <a:pPr>
+                        <a:defRPr sz="1000">
+                          <a:solidFill>
+                            <a:srgbClr val="A0AFC8"/>
+                          </a:solidFill>
+                        </a:defRPr>
+                      </a:pPr>
+                      <a:r>
+                        <a:t>ProductID → ProductName, Description, Category, UnitPrice, SupplierID. Supplier attributes are factored into suppliers table, preventing transitive dependency (ProductID ↛ SupplierName).</a:t>
+                      </a:r>
+                    </a:p>
+                  </a:txBody>
+                  <a:tcPr>
+                    <a:solidFill>
+                      <a:srgbClr val="141C30"/>
+                    </a:solidFill>
+                  </a:tcPr>
+                </a:tc>
+              </a:tr>
+              <a:tr h="896112">
+                <a:tc>
+                  <a:txBody>
+                    <a:bodyPr/>
+                    <a:lstStyle/>
+                    <a:p>
+                      <a:pPr>
+                        <a:defRPr sz="1000" b="1">
+                          <a:solidFill>
+                            <a:srgbClr val="06B6D4"/>
+                          </a:solidFill>
+                        </a:defRPr>
+                      </a:pPr>
+                      <a:r>
+                        <a:t>warehouses</a:t>
+                      </a:r>
+                    </a:p>
+                  </a:txBody>
+                  <a:tcPr>
+                    <a:solidFill>
+                      <a:srgbClr val="0F1626"/>
+                    </a:solidFill>
+                  </a:tcPr>
+                </a:tc>
+                <a:tc>
+                  <a:txBody>
+                    <a:bodyPr/>
+                    <a:lstStyle/>
+                    <a:p>
+                      <a:pPr>
+                        <a:defRPr sz="1000">
+                          <a:solidFill>
+                            <a:srgbClr val="F8FAFC"/>
+                          </a:solidFill>
+                        </a:defRPr>
+                      </a:pPr>
+                      <a:r>
+                        <a:t>WarehouseID</a:t>
+                      </a:r>
+                    </a:p>
+                  </a:txBody>
+                  <a:tcPr>
+                    <a:solidFill>
+                      <a:srgbClr val="0F1626"/>
+                    </a:solidFill>
+                  </a:tcPr>
+                </a:tc>
+                <a:tc>
+                  <a:txBody>
+                    <a:bodyPr/>
+                    <a:lstStyle/>
+                    <a:p>
+                      <a:pPr>
+                        <a:defRPr sz="1000" b="1">
+                          <a:solidFill>
+                            <a:srgbClr val="10B981"/>
+                          </a:solidFill>
+                        </a:defRPr>
+                      </a:pPr>
+                      <a:r>
+                        <a:t>BCNF</a:t>
+                      </a:r>
+                    </a:p>
+                  </a:txBody>
+                  <a:tcPr>
+                    <a:solidFill>
+                      <a:srgbClr val="0F1626"/>
+                    </a:solidFill>
+                  </a:tcPr>
+                </a:tc>
+                <a:tc>
+                  <a:txBody>
+                    <a:bodyPr/>
+                    <a:lstStyle/>
+                    <a:p>
+                      <a:pPr>
+                        <a:defRPr sz="1000">
+                          <a:solidFill>
+                            <a:srgbClr val="A0AFC8"/>
+                          </a:solidFill>
+                        </a:defRPr>
+                      </a:pPr>
+                      <a:r>
+                        <a:t>WarehouseID → WarehouseName, Location, Capacity. The determinant WarehouseID is a primary key. All non-key attributes are atomic and independently scalable.</a:t>
+                      </a:r>
+                    </a:p>
+                  </a:txBody>
+                  <a:tcPr>
+                    <a:solidFill>
+                      <a:srgbClr val="0F1626"/>
+                    </a:solidFill>
+                  </a:tcPr>
+                </a:tc>
+              </a:tr>
+            </a:tbl>
+          </a:graphicData>
+        </a:graphic>
+      </p:graphicFrame>
+    </p:spTree>
+  </p:cSld>
+  <p:clrMapOvr>
+    <a:masterClrMapping/>
+  </p:clrMapOvr>
+</p:sld>
+</file>
+
+<file path=ppt/slides/slide11.xml><?xml version="1.0" encoding="utf-8"?>
 <p:sld xmlns:a="http://schemas.openxmlformats.org/drawingml/2006/main" xmlns:p="http://schemas.openxmlformats.org/presentationml/2006/main" xmlns:r="http://schemas.openxmlformats.org/officeDocument/2006/relationships">
   <p:cSld>
     <p:spTree>
@@ -4188,7 +4892,7 @@
 </p:sld>
 </file>
 
-<file path=ppt/slides/slide11.xml><?xml version="1.0" encoding="utf-8"?>
+<file path=ppt/slides/slide12.xml><?xml version="1.0" encoding="utf-8"?>
 <p:sld xmlns:a="http://schemas.openxmlformats.org/drawingml/2006/main" xmlns:p="http://schemas.openxmlformats.org/presentationml/2006/main" xmlns:r="http://schemas.openxmlformats.org/officeDocument/2006/relationships">
   <p:cSld>
     <p:spTree>
@@ -4892,793 +5596,6 @@
 </p:sld>
 </file>
 
-<file path=ppt/slides/slide12.xml><?xml version="1.0" encoding="utf-8"?>
-<p:sld xmlns:a="http://schemas.openxmlformats.org/drawingml/2006/main" xmlns:p="http://schemas.openxmlformats.org/presentationml/2006/main" xmlns:r="http://schemas.openxmlformats.org/officeDocument/2006/relationships">
-  <p:cSld>
-    <p:spTree>
-      <p:nvGrpSpPr>
-        <p:cNvPr id="1" name=""/>
-        <p:cNvGrpSpPr/>
-        <p:nvPr/>
-      </p:nvGrpSpPr>
-      <p:grpSpPr/>
-      <p:sp>
-        <p:nvSpPr>
-          <p:cNvPr id="2" name="Rectangle 1"/>
-          <p:cNvSpPr/>
-          <p:nvPr/>
-        </p:nvSpPr>
-        <p:spPr>
-          <a:xfrm>
-            <a:off x="0" y="0"/>
-            <a:ext cx="12191695" cy="6858000"/>
-          </a:xfrm>
-          <a:prstGeom prst="rect">
-            <a:avLst/>
-          </a:prstGeom>
-          <a:solidFill>
-            <a:srgbClr val="0A0F1D"/>
-          </a:solidFill>
-          <a:ln>
-            <a:noFill/>
-          </a:ln>
-        </p:spPr>
-        <p:style>
-          <a:lnRef idx="1">
-            <a:schemeClr val="accent1"/>
-          </a:lnRef>
-          <a:fillRef idx="3">
-            <a:schemeClr val="accent1"/>
-          </a:fillRef>
-          <a:effectRef idx="2">
-            <a:schemeClr val="accent1"/>
-          </a:effectRef>
-          <a:fontRef idx="minor">
-            <a:schemeClr val="lt1"/>
-          </a:fontRef>
-        </p:style>
-        <p:txBody>
-          <a:bodyPr rtlCol="0" anchor="ctr"/>
-          <a:lstStyle/>
-          <a:p>
-            <a:pPr algn="ctr"/>
-          </a:p>
-        </p:txBody>
-      </p:sp>
-      <p:sp>
-        <p:nvSpPr>
-          <p:cNvPr id="3" name="TextBox 2"/>
-          <p:cNvSpPr txBox="1"/>
-          <p:nvPr/>
-        </p:nvSpPr>
-        <p:spPr>
-          <a:xfrm>
-            <a:off x="731520" y="320040"/>
-            <a:ext cx="9144000" cy="320040"/>
-          </a:xfrm>
-          <a:prstGeom prst="rect">
-            <a:avLst/>
-          </a:prstGeom>
-          <a:noFill/>
-        </p:spPr>
-        <p:txBody>
-          <a:bodyPr wrap="square">
-            <a:spAutoFit/>
-          </a:bodyPr>
-          <a:lstStyle/>
-          <a:p>
-            <a:pPr>
-              <a:defRPr sz="1000" b="1">
-                <a:solidFill>
-                  <a:srgbClr val="06B6D4"/>
-                </a:solidFill>
-                <a:latin typeface="Arial"/>
-              </a:defRPr>
-            </a:pPr>
-            <a:r>
-              <a:t>STOCK MASTER | DBMS SEMESTER PROJECT</a:t>
-            </a:r>
-          </a:p>
-        </p:txBody>
-      </p:sp>
-      <p:sp>
-        <p:nvSpPr>
-          <p:cNvPr id="4" name="TextBox 3"/>
-          <p:cNvSpPr txBox="1"/>
-          <p:nvPr/>
-        </p:nvSpPr>
-        <p:spPr>
-          <a:xfrm>
-            <a:off x="10241280" y="320040"/>
-            <a:ext cx="1188720" cy="320040"/>
-          </a:xfrm>
-          <a:prstGeom prst="rect">
-            <a:avLst/>
-          </a:prstGeom>
-          <a:noFill/>
-        </p:spPr>
-        <p:txBody>
-          <a:bodyPr wrap="none">
-            <a:spAutoFit/>
-          </a:bodyPr>
-          <a:lstStyle/>
-          <a:p>
-            <a:pPr algn="r">
-              <a:defRPr sz="1000" b="1">
-                <a:solidFill>
-                  <a:srgbClr val="6E82A0"/>
-                </a:solidFill>
-                <a:latin typeface="Arial"/>
-              </a:defRPr>
-            </a:pPr>
-            <a:r>
-              <a:t>10 / 18</a:t>
-            </a:r>
-          </a:p>
-        </p:txBody>
-      </p:sp>
-      <p:sp>
-        <p:nvSpPr>
-          <p:cNvPr id="5" name="TextBox 4"/>
-          <p:cNvSpPr txBox="1"/>
-          <p:nvPr/>
-        </p:nvSpPr>
-        <p:spPr>
-          <a:xfrm>
-            <a:off x="731520" y="594360"/>
-            <a:ext cx="10515600" cy="548640"/>
-          </a:xfrm>
-          <a:prstGeom prst="rect">
-            <a:avLst/>
-          </a:prstGeom>
-          <a:noFill/>
-        </p:spPr>
-        <p:txBody>
-          <a:bodyPr wrap="square">
-            <a:spAutoFit/>
-          </a:bodyPr>
-          <a:lstStyle/>
-          <a:p>
-            <a:pPr>
-              <a:defRPr sz="2100" b="1">
-                <a:solidFill>
-                  <a:srgbClr val="F8FAFC"/>
-                </a:solidFill>
-                <a:latin typeface="Arial"/>
-              </a:defRPr>
-            </a:pPr>
-            <a:r>
-              <a:t>Functional Architecture &amp; Core Modules</a:t>
-            </a:r>
-          </a:p>
-        </p:txBody>
-      </p:sp>
-      <p:sp>
-        <p:nvSpPr>
-          <p:cNvPr id="6" name="TextBox 5"/>
-          <p:cNvSpPr txBox="1"/>
-          <p:nvPr/>
-        </p:nvSpPr>
-        <p:spPr>
-          <a:xfrm>
-            <a:off x="731520" y="1115568"/>
-            <a:ext cx="10515600" cy="320040"/>
-          </a:xfrm>
-          <a:prstGeom prst="rect">
-            <a:avLst/>
-          </a:prstGeom>
-          <a:noFill/>
-        </p:spPr>
-        <p:txBody>
-          <a:bodyPr wrap="square">
-            <a:spAutoFit/>
-          </a:bodyPr>
-          <a:lstStyle/>
-          <a:p>
-            <a:pPr>
-              <a:defRPr sz="1100">
-                <a:solidFill>
-                  <a:srgbClr val="A0AFC8"/>
-                </a:solidFill>
-                <a:latin typeface="Calibri"/>
-              </a:defRPr>
-            </a:pPr>
-            <a:r>
-              <a:t>Modular breakdown of StockMaster subsystems and capability boundaries</a:t>
-            </a:r>
-          </a:p>
-        </p:txBody>
-      </p:sp>
-      <p:sp>
-        <p:nvSpPr>
-          <p:cNvPr id="7" name="Rounded Rectangle 6"/>
-          <p:cNvSpPr/>
-          <p:nvPr/>
-        </p:nvSpPr>
-        <p:spPr>
-          <a:xfrm>
-            <a:off x="731520" y="1645920"/>
-            <a:ext cx="3413455" cy="2194560"/>
-          </a:xfrm>
-          <a:prstGeom prst="roundRect">
-            <a:avLst/>
-          </a:prstGeom>
-          <a:solidFill>
-            <a:srgbClr val="141C30"/>
-          </a:solidFill>
-          <a:ln w="12700">
-            <a:solidFill>
-              <a:srgbClr val="2D3C5A"/>
-            </a:solidFill>
-          </a:ln>
-        </p:spPr>
-        <p:style>
-          <a:lnRef idx="1">
-            <a:schemeClr val="accent1"/>
-          </a:lnRef>
-          <a:fillRef idx="3">
-            <a:schemeClr val="accent1"/>
-          </a:fillRef>
-          <a:effectRef idx="2">
-            <a:schemeClr val="accent1"/>
-          </a:effectRef>
-          <a:fontRef idx="minor">
-            <a:schemeClr val="lt1"/>
-          </a:fontRef>
-        </p:style>
-        <p:txBody>
-          <a:bodyPr rtlCol="0" anchor="ctr"/>
-          <a:lstStyle/>
-          <a:p>
-            <a:pPr algn="ctr"/>
-          </a:p>
-        </p:txBody>
-      </p:sp>
-      <p:sp>
-        <p:nvSpPr>
-          <p:cNvPr id="8" name="TextBox 7"/>
-          <p:cNvSpPr txBox="1"/>
-          <p:nvPr/>
-        </p:nvSpPr>
-        <p:spPr>
-          <a:xfrm>
-            <a:off x="914400" y="1828800"/>
-            <a:ext cx="3047695" cy="1828800"/>
-          </a:xfrm>
-          <a:prstGeom prst="rect">
-            <a:avLst/>
-          </a:prstGeom>
-          <a:noFill/>
-        </p:spPr>
-        <p:txBody>
-          <a:bodyPr wrap="square">
-            <a:spAutoFit/>
-          </a:bodyPr>
-          <a:lstStyle/>
-          <a:p>
-            <a:pPr>
-              <a:defRPr sz="1300" b="1">
-                <a:solidFill>
-                  <a:srgbClr val="06B6D4"/>
-                </a:solidFill>
-                <a:latin typeface="Arial"/>
-              </a:defRPr>
-            </a:pPr>
-            <a:r>
-              <a:t>01 — USER &amp; RBAC</a:t>
-            </a:r>
-          </a:p>
-          <a:p>
-            <a:pPr>
-              <a:spcBef>
-                <a:spcPts val="800"/>
-              </a:spcBef>
-              <a:defRPr sz="1100">
-                <a:solidFill>
-                  <a:srgbClr val="A0AFC8"/>
-                </a:solidFill>
-                <a:latin typeface="Calibri"/>
-              </a:defRPr>
-            </a:pPr>
-            <a:r>
-              <a:t>Session authentication, role policies, permission masking (Admin vs Staff)</a:t>
-            </a:r>
-          </a:p>
-        </p:txBody>
-      </p:sp>
-      <p:sp>
-        <p:nvSpPr>
-          <p:cNvPr id="9" name="Rounded Rectangle 8"/>
-          <p:cNvSpPr/>
-          <p:nvPr/>
-        </p:nvSpPr>
-        <p:spPr>
-          <a:xfrm>
-            <a:off x="4389120" y="1645920"/>
-            <a:ext cx="3413455" cy="2194560"/>
-          </a:xfrm>
-          <a:prstGeom prst="roundRect">
-            <a:avLst/>
-          </a:prstGeom>
-          <a:solidFill>
-            <a:srgbClr val="141C30"/>
-          </a:solidFill>
-          <a:ln w="12700">
-            <a:solidFill>
-              <a:srgbClr val="2D3C5A"/>
-            </a:solidFill>
-          </a:ln>
-        </p:spPr>
-        <p:style>
-          <a:lnRef idx="1">
-            <a:schemeClr val="accent1"/>
-          </a:lnRef>
-          <a:fillRef idx="3">
-            <a:schemeClr val="accent1"/>
-          </a:fillRef>
-          <a:effectRef idx="2">
-            <a:schemeClr val="accent1"/>
-          </a:effectRef>
-          <a:fontRef idx="minor">
-            <a:schemeClr val="lt1"/>
-          </a:fontRef>
-        </p:style>
-        <p:txBody>
-          <a:bodyPr rtlCol="0" anchor="ctr"/>
-          <a:lstStyle/>
-          <a:p>
-            <a:pPr algn="ctr"/>
-          </a:p>
-        </p:txBody>
-      </p:sp>
-      <p:sp>
-        <p:nvSpPr>
-          <p:cNvPr id="10" name="TextBox 9"/>
-          <p:cNvSpPr txBox="1"/>
-          <p:nvPr/>
-        </p:nvSpPr>
-        <p:spPr>
-          <a:xfrm>
-            <a:off x="4572000" y="1828800"/>
-            <a:ext cx="3047695" cy="1828800"/>
-          </a:xfrm>
-          <a:prstGeom prst="rect">
-            <a:avLst/>
-          </a:prstGeom>
-          <a:noFill/>
-        </p:spPr>
-        <p:txBody>
-          <a:bodyPr wrap="square">
-            <a:spAutoFit/>
-          </a:bodyPr>
-          <a:lstStyle/>
-          <a:p>
-            <a:pPr>
-              <a:defRPr sz="1300" b="1">
-                <a:solidFill>
-                  <a:srgbClr val="10B981"/>
-                </a:solidFill>
-                <a:latin typeface="Arial"/>
-              </a:defRPr>
-            </a:pPr>
-            <a:r>
-              <a:t>02 — CATALOG &amp; SUPPLIERS</a:t>
-            </a:r>
-          </a:p>
-          <a:p>
-            <a:pPr>
-              <a:spcBef>
-                <a:spcPts val="800"/>
-              </a:spcBef>
-              <a:defRPr sz="1100">
-                <a:solidFill>
-                  <a:srgbClr val="A0AFC8"/>
-                </a:solidFill>
-                <a:latin typeface="Calibri"/>
-              </a:defRPr>
-            </a:pPr>
-            <a:r>
-              <a:t>Master SKU definitions, supplier directories, address registries, unit pricing</a:t>
-            </a:r>
-          </a:p>
-        </p:txBody>
-      </p:sp>
-      <p:sp>
-        <p:nvSpPr>
-          <p:cNvPr id="11" name="Rounded Rectangle 10"/>
-          <p:cNvSpPr/>
-          <p:nvPr/>
-        </p:nvSpPr>
-        <p:spPr>
-          <a:xfrm>
-            <a:off x="8046720" y="1645920"/>
-            <a:ext cx="3413455" cy="2194560"/>
-          </a:xfrm>
-          <a:prstGeom prst="roundRect">
-            <a:avLst/>
-          </a:prstGeom>
-          <a:solidFill>
-            <a:srgbClr val="141C30"/>
-          </a:solidFill>
-          <a:ln w="12700">
-            <a:solidFill>
-              <a:srgbClr val="2D3C5A"/>
-            </a:solidFill>
-          </a:ln>
-        </p:spPr>
-        <p:style>
-          <a:lnRef idx="1">
-            <a:schemeClr val="accent1"/>
-          </a:lnRef>
-          <a:fillRef idx="3">
-            <a:schemeClr val="accent1"/>
-          </a:fillRef>
-          <a:effectRef idx="2">
-            <a:schemeClr val="accent1"/>
-          </a:effectRef>
-          <a:fontRef idx="minor">
-            <a:schemeClr val="lt1"/>
-          </a:fontRef>
-        </p:style>
-        <p:txBody>
-          <a:bodyPr rtlCol="0" anchor="ctr"/>
-          <a:lstStyle/>
-          <a:p>
-            <a:pPr algn="ctr"/>
-          </a:p>
-        </p:txBody>
-      </p:sp>
-      <p:sp>
-        <p:nvSpPr>
-          <p:cNvPr id="12" name="TextBox 11"/>
-          <p:cNvSpPr txBox="1"/>
-          <p:nvPr/>
-        </p:nvSpPr>
-        <p:spPr>
-          <a:xfrm>
-            <a:off x="8229600" y="1828800"/>
-            <a:ext cx="3047695" cy="1828800"/>
-          </a:xfrm>
-          <a:prstGeom prst="rect">
-            <a:avLst/>
-          </a:prstGeom>
-          <a:noFill/>
-        </p:spPr>
-        <p:txBody>
-          <a:bodyPr wrap="square">
-            <a:spAutoFit/>
-          </a:bodyPr>
-          <a:lstStyle/>
-          <a:p>
-            <a:pPr>
-              <a:defRPr sz="1300" b="1">
-                <a:solidFill>
-                  <a:srgbClr val="F59E0B"/>
-                </a:solidFill>
-                <a:latin typeface="Arial"/>
-              </a:defRPr>
-            </a:pPr>
-            <a:r>
-              <a:t>03 — MULTI-DEPOT INVENTORY</a:t>
-            </a:r>
-          </a:p>
-          <a:p>
-            <a:pPr>
-              <a:spcBef>
-                <a:spcPts val="800"/>
-              </a:spcBef>
-              <a:defRPr sz="1100">
-                <a:solidFill>
-                  <a:srgbClr val="A0AFC8"/>
-                </a:solidFill>
-                <a:latin typeface="Calibri"/>
-              </a:defRPr>
-            </a:pPr>
-            <a:r>
-              <a:t>Many-to-Many stock allocation, real-time quantity monitoring, capacity limits</a:t>
-            </a:r>
-          </a:p>
-        </p:txBody>
-      </p:sp>
-      <p:sp>
-        <p:nvSpPr>
-          <p:cNvPr id="13" name="Rounded Rectangle 12"/>
-          <p:cNvSpPr/>
-          <p:nvPr/>
-        </p:nvSpPr>
-        <p:spPr>
-          <a:xfrm>
-            <a:off x="731520" y="4160520"/>
-            <a:ext cx="3413455" cy="2194560"/>
-          </a:xfrm>
-          <a:prstGeom prst="roundRect">
-            <a:avLst/>
-          </a:prstGeom>
-          <a:solidFill>
-            <a:srgbClr val="141C30"/>
-          </a:solidFill>
-          <a:ln w="12700">
-            <a:solidFill>
-              <a:srgbClr val="2D3C5A"/>
-            </a:solidFill>
-          </a:ln>
-        </p:spPr>
-        <p:style>
-          <a:lnRef idx="1">
-            <a:schemeClr val="accent1"/>
-          </a:lnRef>
-          <a:fillRef idx="3">
-            <a:schemeClr val="accent1"/>
-          </a:fillRef>
-          <a:effectRef idx="2">
-            <a:schemeClr val="accent1"/>
-          </a:effectRef>
-          <a:fontRef idx="minor">
-            <a:schemeClr val="lt1"/>
-          </a:fontRef>
-        </p:style>
-        <p:txBody>
-          <a:bodyPr rtlCol="0" anchor="ctr"/>
-          <a:lstStyle/>
-          <a:p>
-            <a:pPr algn="ctr"/>
-          </a:p>
-        </p:txBody>
-      </p:sp>
-      <p:sp>
-        <p:nvSpPr>
-          <p:cNvPr id="14" name="TextBox 13"/>
-          <p:cNvSpPr txBox="1"/>
-          <p:nvPr/>
-        </p:nvSpPr>
-        <p:spPr>
-          <a:xfrm>
-            <a:off x="914400" y="4343400"/>
-            <a:ext cx="3047695" cy="1828800"/>
-          </a:xfrm>
-          <a:prstGeom prst="rect">
-            <a:avLst/>
-          </a:prstGeom>
-          <a:noFill/>
-        </p:spPr>
-        <p:txBody>
-          <a:bodyPr wrap="square">
-            <a:spAutoFit/>
-          </a:bodyPr>
-          <a:lstStyle/>
-          <a:p>
-            <a:pPr>
-              <a:defRPr sz="1300" b="1">
-                <a:solidFill>
-                  <a:srgbClr val="F43F5E"/>
-                </a:solidFill>
-                <a:latin typeface="Arial"/>
-              </a:defRPr>
-            </a:pPr>
-            <a:r>
-              <a:t>04 — ORDER &amp; DISPATCH</a:t>
-            </a:r>
-          </a:p>
-          <a:p>
-            <a:pPr>
-              <a:spcBef>
-                <a:spcPts val="800"/>
-              </a:spcBef>
-              <a:defRPr sz="1100">
-                <a:solidFill>
-                  <a:srgbClr val="A0AFC8"/>
-                </a:solidFill>
-                <a:latin typeface="Calibri"/>
-              </a:defRPr>
-            </a:pPr>
-            <a:r>
-              <a:t>Procurement POs, sales dispatch SOs, automated stock adjustment triggers</a:t>
-            </a:r>
-          </a:p>
-        </p:txBody>
-      </p:sp>
-      <p:sp>
-        <p:nvSpPr>
-          <p:cNvPr id="15" name="Rounded Rectangle 14"/>
-          <p:cNvSpPr/>
-          <p:nvPr/>
-        </p:nvSpPr>
-        <p:spPr>
-          <a:xfrm>
-            <a:off x="4389120" y="4160520"/>
-            <a:ext cx="3413455" cy="2194560"/>
-          </a:xfrm>
-          <a:prstGeom prst="roundRect">
-            <a:avLst/>
-          </a:prstGeom>
-          <a:solidFill>
-            <a:srgbClr val="141C30"/>
-          </a:solidFill>
-          <a:ln w="12700">
-            <a:solidFill>
-              <a:srgbClr val="2D3C5A"/>
-            </a:solidFill>
-          </a:ln>
-        </p:spPr>
-        <p:style>
-          <a:lnRef idx="1">
-            <a:schemeClr val="accent1"/>
-          </a:lnRef>
-          <a:fillRef idx="3">
-            <a:schemeClr val="accent1"/>
-          </a:fillRef>
-          <a:effectRef idx="2">
-            <a:schemeClr val="accent1"/>
-          </a:effectRef>
-          <a:fontRef idx="minor">
-            <a:schemeClr val="lt1"/>
-          </a:fontRef>
-        </p:style>
-        <p:txBody>
-          <a:bodyPr rtlCol="0" anchor="ctr"/>
-          <a:lstStyle/>
-          <a:p>
-            <a:pPr algn="ctr"/>
-          </a:p>
-        </p:txBody>
-      </p:sp>
-      <p:sp>
-        <p:nvSpPr>
-          <p:cNvPr id="16" name="TextBox 15"/>
-          <p:cNvSpPr txBox="1"/>
-          <p:nvPr/>
-        </p:nvSpPr>
-        <p:spPr>
-          <a:xfrm>
-            <a:off x="4572000" y="4343400"/>
-            <a:ext cx="3047695" cy="1828800"/>
-          </a:xfrm>
-          <a:prstGeom prst="rect">
-            <a:avLst/>
-          </a:prstGeom>
-          <a:noFill/>
-        </p:spPr>
-        <p:txBody>
-          <a:bodyPr wrap="square">
-            <a:spAutoFit/>
-          </a:bodyPr>
-          <a:lstStyle/>
-          <a:p>
-            <a:pPr>
-              <a:defRPr sz="1300" b="1">
-                <a:solidFill>
-                  <a:srgbClr val="1A366E"/>
-                </a:solidFill>
-                <a:latin typeface="Arial"/>
-              </a:defRPr>
-            </a:pPr>
-            <a:r>
-              <a:t>05 — LOGISTICS &amp; BILLING</a:t>
-            </a:r>
-          </a:p>
-          <a:p>
-            <a:pPr>
-              <a:spcBef>
-                <a:spcPts val="800"/>
-              </a:spcBef>
-              <a:defRPr sz="1100">
-                <a:solidFill>
-                  <a:srgbClr val="A0AFC8"/>
-                </a:solidFill>
-                <a:latin typeface="Calibri"/>
-              </a:defRPr>
-            </a:pPr>
-            <a:r>
-              <a:t>Carrier shipment tracking, delivery status, 1:1 invoice generation, ledgers</a:t>
-            </a:r>
-          </a:p>
-        </p:txBody>
-      </p:sp>
-      <p:sp>
-        <p:nvSpPr>
-          <p:cNvPr id="17" name="Rounded Rectangle 16"/>
-          <p:cNvSpPr/>
-          <p:nvPr/>
-        </p:nvSpPr>
-        <p:spPr>
-          <a:xfrm>
-            <a:off x="8046720" y="4160520"/>
-            <a:ext cx="3413455" cy="2194560"/>
-          </a:xfrm>
-          <a:prstGeom prst="roundRect">
-            <a:avLst/>
-          </a:prstGeom>
-          <a:solidFill>
-            <a:srgbClr val="141C30"/>
-          </a:solidFill>
-          <a:ln w="12700">
-            <a:solidFill>
-              <a:srgbClr val="2D3C5A"/>
-            </a:solidFill>
-          </a:ln>
-        </p:spPr>
-        <p:style>
-          <a:lnRef idx="1">
-            <a:schemeClr val="accent1"/>
-          </a:lnRef>
-          <a:fillRef idx="3">
-            <a:schemeClr val="accent1"/>
-          </a:fillRef>
-          <a:effectRef idx="2">
-            <a:schemeClr val="accent1"/>
-          </a:effectRef>
-          <a:fontRef idx="minor">
-            <a:schemeClr val="lt1"/>
-          </a:fontRef>
-        </p:style>
-        <p:txBody>
-          <a:bodyPr rtlCol="0" anchor="ctr"/>
-          <a:lstStyle/>
-          <a:p>
-            <a:pPr algn="ctr"/>
-          </a:p>
-        </p:txBody>
-      </p:sp>
-      <p:sp>
-        <p:nvSpPr>
-          <p:cNvPr id="18" name="TextBox 17"/>
-          <p:cNvSpPr txBox="1"/>
-          <p:nvPr/>
-        </p:nvSpPr>
-        <p:spPr>
-          <a:xfrm>
-            <a:off x="8229600" y="4343400"/>
-            <a:ext cx="3047695" cy="1828800"/>
-          </a:xfrm>
-          <a:prstGeom prst="rect">
-            <a:avLst/>
-          </a:prstGeom>
-          <a:noFill/>
-        </p:spPr>
-        <p:txBody>
-          <a:bodyPr wrap="square">
-            <a:spAutoFit/>
-          </a:bodyPr>
-          <a:lstStyle/>
-          <a:p>
-            <a:pPr>
-              <a:defRPr sz="1300" b="1">
-                <a:solidFill>
-                  <a:srgbClr val="06B6D4"/>
-                </a:solidFill>
-                <a:latin typeface="Arial"/>
-              </a:defRPr>
-            </a:pPr>
-            <a:r>
-              <a:t>06 — DEMAND FORECASTING</a:t>
-            </a:r>
-          </a:p>
-          <a:p>
-            <a:pPr>
-              <a:spcBef>
-                <a:spcPts val="800"/>
-              </a:spcBef>
-              <a:defRPr sz="1100">
-                <a:solidFill>
-                  <a:srgbClr val="A0AFC8"/>
-                </a:solidFill>
-                <a:latin typeface="Calibri"/>
-              </a:defRPr>
-            </a:pPr>
-            <a:r>
-              <a:t>Sales run-rate velocity modeling, stockout days calculation, auto-PO drafting</a:t>
-            </a:r>
-          </a:p>
-        </p:txBody>
-      </p:sp>
-    </p:spTree>
-  </p:cSld>
-  <p:clrMapOvr>
-    <a:masterClrMapping/>
-  </p:clrMapOvr>
-</p:sld>
-</file>
-
 <file path=ppt/slides/slide13.xml><?xml version="1.0" encoding="utf-8"?>
 <p:sld xmlns:a="http://schemas.openxmlformats.org/drawingml/2006/main" xmlns:p="http://schemas.openxmlformats.org/presentationml/2006/main" xmlns:r="http://schemas.openxmlformats.org/officeDocument/2006/relationships">
   <p:cSld>
@@ -5799,7 +5716,7 @@
               </a:defRPr>
             </a:pPr>
             <a:r>
-              <a:t>11 / 18</a:t>
+              <a:t>10 / 18</a:t>
             </a:r>
           </a:p>
         </p:txBody>
@@ -5835,7 +5752,7 @@
               </a:defRPr>
             </a:pPr>
             <a:r>
-              <a:t>Module Interactions &amp; Transaction Lifecycle</a:t>
+              <a:t>Functional Architecture &amp; Core Modules</a:t>
             </a:r>
           </a:p>
         </p:txBody>
@@ -5871,7 +5788,7 @@
               </a:defRPr>
             </a:pPr>
             <a:r>
-              <a:t>End-to-end execution flow from procurement to fulfillment and predictive reordering</a:t>
+              <a:t>Modular breakdown of StockMaster subsystems and capability boundaries</a:t>
             </a:r>
           </a:p>
         </p:txBody>
@@ -5884,8 +5801,8 @@
         </p:nvSpPr>
         <p:spPr>
           <a:xfrm>
-            <a:off x="731520" y="1508760"/>
-            <a:ext cx="10728655" cy="731520"/>
+            <a:off x="731520" y="1645920"/>
+            <a:ext cx="3413455" cy="2194560"/>
           </a:xfrm>
           <a:prstGeom prst="roundRect">
             <a:avLst/>
@@ -5929,8 +5846,8 @@
         </p:nvSpPr>
         <p:spPr>
           <a:xfrm>
-            <a:off x="914400" y="1581912"/>
-            <a:ext cx="10362895" cy="594360"/>
+            <a:off x="914400" y="1828800"/>
+            <a:ext cx="3047695" cy="1828800"/>
           </a:xfrm>
           <a:prstGeom prst="rect">
             <a:avLst/>
@@ -5944,7 +5861,7 @@
           <a:lstStyle/>
           <a:p>
             <a:pPr>
-              <a:defRPr sz="1150" b="1">
+              <a:defRPr sz="1300" b="1">
                 <a:solidFill>
                   <a:srgbClr val="06B6D4"/>
                 </a:solidFill>
@@ -5952,23 +5869,23 @@
               </a:defRPr>
             </a:pPr>
             <a:r>
-              <a:t>1. User Auth &amp; Role Authorization</a:t>
+              <a:t>01 — USER &amp; RBAC</a:t>
             </a:r>
           </a:p>
           <a:p>
             <a:pPr>
               <a:spcBef>
-                <a:spcPts val="200"/>
+                <a:spcPts val="800"/>
               </a:spcBef>
-              <a:defRPr sz="1000">
-                <a:solidFill>
-                  <a:srgbClr val="F8FAFC"/>
+              <a:defRPr sz="1100">
+                <a:solidFill>
+                  <a:srgbClr val="A0AFC8"/>
                 </a:solidFill>
                 <a:latin typeface="Calibri"/>
               </a:defRPr>
             </a:pPr>
             <a:r>
-              <a:t>User logs in; Flask session establishes identity. UI applies RBAC, restricting financial ledgers and SKU alterations for Warehouse Staff.</a:t>
+              <a:t>Session authentication, role policies, permission masking (Admin vs Staff)</a:t>
             </a:r>
           </a:p>
         </p:txBody>
@@ -5981,8 +5898,8 @@
         </p:nvSpPr>
         <p:spPr>
           <a:xfrm>
-            <a:off x="731520" y="2331720"/>
-            <a:ext cx="10728655" cy="731520"/>
+            <a:off x="4389120" y="1645920"/>
+            <a:ext cx="3413455" cy="2194560"/>
           </a:xfrm>
           <a:prstGeom prst="roundRect">
             <a:avLst/>
@@ -6026,8 +5943,8 @@
         </p:nvSpPr>
         <p:spPr>
           <a:xfrm>
-            <a:off x="914400" y="2404872"/>
-            <a:ext cx="10362895" cy="594360"/>
+            <a:off x="4572000" y="1828800"/>
+            <a:ext cx="3047695" cy="1828800"/>
           </a:xfrm>
           <a:prstGeom prst="rect">
             <a:avLst/>
@@ -6041,7 +5958,7 @@
           <a:lstStyle/>
           <a:p>
             <a:pPr>
-              <a:defRPr sz="1150" b="1">
+              <a:defRPr sz="1300" b="1">
                 <a:solidFill>
                   <a:srgbClr val="10B981"/>
                 </a:solidFill>
@@ -6049,23 +5966,23 @@
               </a:defRPr>
             </a:pPr>
             <a:r>
-              <a:t>2. Supply Procurement (PO)</a:t>
+              <a:t>02 — CATALOG &amp; SUPPLIERS</a:t>
             </a:r>
           </a:p>
           <a:p>
             <a:pPr>
               <a:spcBef>
-                <a:spcPts val="200"/>
+                <a:spcPts val="800"/>
               </a:spcBef>
-              <a:defRPr sz="1000">
-                <a:solidFill>
-                  <a:srgbClr val="F8FAFC"/>
+              <a:defRPr sz="1100">
+                <a:solidFill>
+                  <a:srgbClr val="A0AFC8"/>
                 </a:solidFill>
                 <a:latin typeface="Calibri"/>
               </a:defRPr>
             </a:pPr>
             <a:r>
-              <a:t>Admin/Staff selects supplier, product, destination depot, and quantity. System creates purchase_orders and purchase_order_items records in 'Pending' state.</a:t>
+              <a:t>Master SKU definitions, supplier directories, address registries, unit pricing</a:t>
             </a:r>
           </a:p>
         </p:txBody>
@@ -6078,8 +5995,8 @@
         </p:nvSpPr>
         <p:spPr>
           <a:xfrm>
-            <a:off x="731520" y="3154680"/>
-            <a:ext cx="10728655" cy="731520"/>
+            <a:off x="8046720" y="1645920"/>
+            <a:ext cx="3413455" cy="2194560"/>
           </a:xfrm>
           <a:prstGeom prst="roundRect">
             <a:avLst/>
@@ -6123,8 +6040,8 @@
         </p:nvSpPr>
         <p:spPr>
           <a:xfrm>
-            <a:off x="914400" y="3227832"/>
-            <a:ext cx="10362895" cy="594360"/>
+            <a:off x="8229600" y="1828800"/>
+            <a:ext cx="3047695" cy="1828800"/>
           </a:xfrm>
           <a:prstGeom prst="rect">
             <a:avLst/>
@@ -6138,31 +6055,31 @@
           <a:lstStyle/>
           <a:p>
             <a:pPr>
-              <a:defRPr sz="1150" b="1">
-                <a:solidFill>
-                  <a:srgbClr val="06B6D4"/>
+              <a:defRPr sz="1300" b="1">
+                <a:solidFill>
+                  <a:srgbClr val="F59E0B"/>
                 </a:solidFill>
                 <a:latin typeface="Arial"/>
               </a:defRPr>
             </a:pPr>
             <a:r>
-              <a:t>3. Warehouse Inbound Delivery &amp; Trigger</a:t>
+              <a:t>03 — MULTI-DEPOT INVENTORY</a:t>
             </a:r>
           </a:p>
           <a:p>
             <a:pPr>
               <a:spcBef>
-                <a:spcPts val="200"/>
+                <a:spcPts val="800"/>
               </a:spcBef>
-              <a:defRPr sz="1000">
-                <a:solidFill>
-                  <a:srgbClr val="F8FAFC"/>
+              <a:defRPr sz="1100">
+                <a:solidFill>
+                  <a:srgbClr val="A0AFC8"/>
                 </a:solidFill>
                 <a:latin typeface="Calibri"/>
               </a:defRPr>
             </a:pPr>
             <a:r>
-              <a:t>Warehouse marks PO 'Received'. The active trigger after_po_receive fires, automatically executing an atomic UPSERT replenishment into the inventory table.</a:t>
+              <a:t>Many-to-Many stock allocation, real-time quantity monitoring, capacity limits</a:t>
             </a:r>
           </a:p>
         </p:txBody>
@@ -6175,8 +6092,8 @@
         </p:nvSpPr>
         <p:spPr>
           <a:xfrm>
-            <a:off x="731520" y="3977640"/>
-            <a:ext cx="10728655" cy="731520"/>
+            <a:off x="731520" y="4160520"/>
+            <a:ext cx="3413455" cy="2194560"/>
           </a:xfrm>
           <a:prstGeom prst="roundRect">
             <a:avLst/>
@@ -6220,8 +6137,8 @@
         </p:nvSpPr>
         <p:spPr>
           <a:xfrm>
-            <a:off x="914400" y="4050792"/>
-            <a:ext cx="10362895" cy="594360"/>
+            <a:off x="914400" y="4343400"/>
+            <a:ext cx="3047695" cy="1828800"/>
           </a:xfrm>
           <a:prstGeom prst="rect">
             <a:avLst/>
@@ -6235,31 +6152,31 @@
           <a:lstStyle/>
           <a:p>
             <a:pPr>
-              <a:defRPr sz="1150" b="1">
-                <a:solidFill>
-                  <a:srgbClr val="10B981"/>
+              <a:defRPr sz="1300" b="1">
+                <a:solidFill>
+                  <a:srgbClr val="F43F5E"/>
                 </a:solidFill>
                 <a:latin typeface="Arial"/>
               </a:defRPr>
             </a:pPr>
             <a:r>
-              <a:t>4. Sales Order Dispatch &amp; Stock Deduction</a:t>
+              <a:t>04 — ORDER &amp; DISPATCH</a:t>
             </a:r>
           </a:p>
           <a:p>
             <a:pPr>
               <a:spcBef>
-                <a:spcPts val="200"/>
+                <a:spcPts val="800"/>
               </a:spcBef>
-              <a:defRPr sz="1000">
-                <a:solidFill>
-                  <a:srgbClr val="F8FAFC"/>
+              <a:defRPr sz="1100">
+                <a:solidFill>
+                  <a:srgbClr val="A0AFC8"/>
                 </a:solidFill>
                 <a:latin typeface="Calibri"/>
               </a:defRPr>
             </a:pPr>
             <a:r>
-              <a:t>Customer sale is registered. The active trigger after_so_item_insert fires, atomically decrementing inventory stock. CHECK constraint rolls back if stock &lt; 0.</a:t>
+              <a:t>Procurement POs, sales dispatch SOs, automated stock adjustment triggers</a:t>
             </a:r>
           </a:p>
         </p:txBody>
@@ -6272,8 +6189,8 @@
         </p:nvSpPr>
         <p:spPr>
           <a:xfrm>
-            <a:off x="731520" y="4800600"/>
-            <a:ext cx="10728655" cy="731520"/>
+            <a:off x="4389120" y="4160520"/>
+            <a:ext cx="3413455" cy="2194560"/>
           </a:xfrm>
           <a:prstGeom prst="roundRect">
             <a:avLst/>
@@ -6317,8 +6234,8 @@
         </p:nvSpPr>
         <p:spPr>
           <a:xfrm>
-            <a:off x="914400" y="4873752"/>
-            <a:ext cx="10362895" cy="594360"/>
+            <a:off x="4572000" y="4343400"/>
+            <a:ext cx="3047695" cy="1828800"/>
           </a:xfrm>
           <a:prstGeom prst="rect">
             <a:avLst/>
@@ -6332,31 +6249,31 @@
           <a:lstStyle/>
           <a:p>
             <a:pPr>
-              <a:defRPr sz="1150" b="1">
-                <a:solidFill>
-                  <a:srgbClr val="06B6D4"/>
+              <a:defRPr sz="1300" b="1">
+                <a:solidFill>
+                  <a:srgbClr val="1A366E"/>
                 </a:solidFill>
                 <a:latin typeface="Arial"/>
               </a:defRPr>
             </a:pPr>
             <a:r>
-              <a:t>5. Carrier Logistics &amp; Invoicing</a:t>
+              <a:t>05 — LOGISTICS &amp; BILLING</a:t>
             </a:r>
           </a:p>
           <a:p>
             <a:pPr>
               <a:spcBef>
-                <a:spcPts val="200"/>
+                <a:spcPts val="800"/>
               </a:spcBef>
-              <a:defRPr sz="1000">
-                <a:solidFill>
-                  <a:srgbClr val="F8FAFC"/>
+              <a:defRPr sz="1100">
+                <a:solidFill>
+                  <a:srgbClr val="A0AFC8"/>
                 </a:solidFill>
                 <a:latin typeface="Calibri"/>
               </a:defRPr>
             </a:pPr>
             <a:r>
-              <a:t>Sales dispatch automatically generates a 1:1 shipments record and a 1:1 billing ledger invoice. Shipment delivery milestone syncs invoice payment dates.</a:t>
+              <a:t>Carrier shipment tracking, delivery status, 1:1 invoice generation, ledgers</a:t>
             </a:r>
           </a:p>
         </p:txBody>
@@ -6369,8 +6286,8 @@
         </p:nvSpPr>
         <p:spPr>
           <a:xfrm>
-            <a:off x="731520" y="5623560"/>
-            <a:ext cx="10728655" cy="731520"/>
+            <a:off x="8046720" y="4160520"/>
+            <a:ext cx="3413455" cy="2194560"/>
           </a:xfrm>
           <a:prstGeom prst="roundRect">
             <a:avLst/>
@@ -6414,8 +6331,8 @@
         </p:nvSpPr>
         <p:spPr>
           <a:xfrm>
-            <a:off x="914400" y="5696712"/>
-            <a:ext cx="10362895" cy="594360"/>
+            <a:off x="8229600" y="4343400"/>
+            <a:ext cx="3047695" cy="1828800"/>
           </a:xfrm>
           <a:prstGeom prst="rect">
             <a:avLst/>
@@ -6429,31 +6346,31 @@
           <a:lstStyle/>
           <a:p>
             <a:pPr>
-              <a:defRPr sz="1150" b="1">
-                <a:solidFill>
-                  <a:srgbClr val="10B981"/>
+              <a:defRPr sz="1300" b="1">
+                <a:solidFill>
+                  <a:srgbClr val="06B6D4"/>
                 </a:solidFill>
                 <a:latin typeface="Arial"/>
               </a:defRPr>
             </a:pPr>
             <a:r>
-              <a:t>6. Predictive Forecasting &amp; Auto-PO</a:t>
+              <a:t>06 — DEMAND FORECASTING</a:t>
             </a:r>
           </a:p>
           <a:p>
             <a:pPr>
               <a:spcBef>
-                <a:spcPts val="200"/>
+                <a:spcPts val="800"/>
               </a:spcBef>
-              <a:defRPr sz="1000">
-                <a:solidFill>
-                  <a:srgbClr val="F8FAFC"/>
+              <a:defRPr sz="1100">
+                <a:solidFill>
+                  <a:srgbClr val="A0AFC8"/>
                 </a:solidFill>
                 <a:latin typeface="Calibri"/>
               </a:defRPr>
             </a:pPr>
             <a:r>
-              <a:t>Sales run-rate velocity engine recalculates days of remaining stock. Products approaching exhaustion generate automated 1-click restock PO drafts.</a:t>
+              <a:t>Sales run-rate velocity modeling, stockout days calculation, auto-PO drafting</a:t>
             </a:r>
           </a:p>
         </p:txBody>
@@ -6586,7 +6503,7 @@
               </a:defRPr>
             </a:pPr>
             <a:r>
-              <a:t>12 / 18</a:t>
+              <a:t>11 / 18</a:t>
             </a:r>
           </a:p>
         </p:txBody>
@@ -6622,7 +6539,7 @@
               </a:defRPr>
             </a:pPr>
             <a:r>
-              <a:t>Multi-Tier System Architecture</a:t>
+              <a:t>Module Interactions &amp; Transaction Lifecycle</a:t>
             </a:r>
           </a:p>
         </p:txBody>
@@ -6658,7 +6575,7 @@
               </a:defRPr>
             </a:pPr>
             <a:r>
-              <a:t>Decoupled presentation, application backend, analytics engine, and relational database layers</a:t>
+              <a:t>End-to-end execution flow from procurement to fulfillment and predictive reordering</a:t>
             </a:r>
           </a:p>
         </p:txBody>
@@ -6672,7 +6589,7 @@
         <p:spPr>
           <a:xfrm>
             <a:off x="731520" y="1508760"/>
-            <a:ext cx="2542032" cy="4846320"/>
+            <a:ext cx="10728655" cy="731520"/>
           </a:xfrm>
           <a:prstGeom prst="roundRect">
             <a:avLst/>
@@ -6716,8 +6633,8 @@
         </p:nvSpPr>
         <p:spPr>
           <a:xfrm>
-            <a:off x="868680" y="1645920"/>
-            <a:ext cx="2267712" cy="4572000"/>
+            <a:off x="914400" y="1581912"/>
+            <a:ext cx="10362895" cy="594360"/>
           </a:xfrm>
           <a:prstGeom prst="rect">
             <a:avLst/>
@@ -6731,7 +6648,7 @@
           <a:lstStyle/>
           <a:p>
             <a:pPr>
-              <a:defRPr sz="1200" b="1">
+              <a:defRPr sz="1150" b="1">
                 <a:solidFill>
                   <a:srgbClr val="06B6D4"/>
                 </a:solidFill>
@@ -6739,7 +6656,7 @@
               </a:defRPr>
             </a:pPr>
             <a:r>
-              <a:t>PRESENTATION LAYER</a:t>
+              <a:t>1. User Auth &amp; Role Authorization</a:t>
             </a:r>
           </a:p>
           <a:p>
@@ -6747,29 +6664,7 @@
               <a:spcBef>
                 <a:spcPts val="200"/>
               </a:spcBef>
-              <a:defRPr sz="950">
-                <a:solidFill>
-                  <a:srgbClr val="6E82A0"/>
-                </a:solidFill>
-              </a:defRPr>
-            </a:pPr>
-            <a:r>
-              <a:t>Modern Glassmorphic Web Client</a:t>
-            </a:r>
-          </a:p>
-          <a:p>
-            <a:pPr>
-              <a:spcAft>
-                <a:spcPts val="600"/>
-              </a:spcAft>
-            </a:pPr>
-          </a:p>
-          <a:p>
-            <a:pPr>
-              <a:spcBef>
-                <a:spcPts val="400"/>
-              </a:spcBef>
-              <a:defRPr sz="950">
+              <a:defRPr sz="1000">
                 <a:solidFill>
                   <a:srgbClr val="F8FAFC"/>
                 </a:solidFill>
@@ -6777,55 +6672,7 @@
               </a:defRPr>
             </a:pPr>
             <a:r>
-              <a:t>• HTML5 Semantic Layout &amp; Responsive Glassmorphic CSS3 System</a:t>
-            </a:r>
-          </a:p>
-          <a:p>
-            <a:pPr>
-              <a:spcBef>
-                <a:spcPts val="400"/>
-              </a:spcBef>
-              <a:defRPr sz="950">
-                <a:solidFill>
-                  <a:srgbClr val="F8FAFC"/>
-                </a:solidFill>
-                <a:latin typeface="Calibri"/>
-              </a:defRPr>
-            </a:pPr>
-            <a:r>
-              <a:t>• Vanilla ES6+ JavaScript Client with Hash-based Router</a:t>
-            </a:r>
-          </a:p>
-          <a:p>
-            <a:pPr>
-              <a:spcBef>
-                <a:spcPts val="400"/>
-              </a:spcBef>
-              <a:defRPr sz="950">
-                <a:solidFill>
-                  <a:srgbClr val="F8FAFC"/>
-                </a:solidFill>
-                <a:latin typeface="Calibri"/>
-              </a:defRPr>
-            </a:pPr>
-            <a:r>
-              <a:t>• Dynamic SVG Warehouse Capacity Occupancy Bar Generators</a:t>
-            </a:r>
-          </a:p>
-          <a:p>
-            <a:pPr>
-              <a:spcBef>
-                <a:spcPts val="400"/>
-              </a:spcBef>
-              <a:defRPr sz="950">
-                <a:solidFill>
-                  <a:srgbClr val="F8FAFC"/>
-                </a:solidFill>
-                <a:latin typeface="Calibri"/>
-              </a:defRPr>
-            </a:pPr>
-            <a:r>
-              <a:t>• Lucide Vector Iconography &amp; Interactive Modal Dialogues</a:t>
+              <a:t>User logs in; Flask session establishes identity. UI applies RBAC, restricting financial ledgers and SKU alterations for Warehouse Staff.</a:t>
             </a:r>
           </a:p>
         </p:txBody>
@@ -6838,8 +6685,8 @@
         </p:nvSpPr>
         <p:spPr>
           <a:xfrm>
-            <a:off x="3474720" y="1508760"/>
-            <a:ext cx="2542032" cy="4846320"/>
+            <a:off x="731520" y="2331720"/>
+            <a:ext cx="10728655" cy="731520"/>
           </a:xfrm>
           <a:prstGeom prst="roundRect">
             <a:avLst/>
@@ -6883,8 +6730,8 @@
         </p:nvSpPr>
         <p:spPr>
           <a:xfrm>
-            <a:off x="3611880" y="1645920"/>
-            <a:ext cx="2267712" cy="4572000"/>
+            <a:off x="914400" y="2404872"/>
+            <a:ext cx="10362895" cy="594360"/>
           </a:xfrm>
           <a:prstGeom prst="rect">
             <a:avLst/>
@@ -6898,7 +6745,7 @@
           <a:lstStyle/>
           <a:p>
             <a:pPr>
-              <a:defRPr sz="1200" b="1">
+              <a:defRPr sz="1150" b="1">
                 <a:solidFill>
                   <a:srgbClr val="10B981"/>
                 </a:solidFill>
@@ -6906,7 +6753,7 @@
               </a:defRPr>
             </a:pPr>
             <a:r>
-              <a:t>APPLICATION BACKEND</a:t>
+              <a:t>2. Supply Procurement (PO)</a:t>
             </a:r>
           </a:p>
           <a:p>
@@ -6914,29 +6761,7 @@
               <a:spcBef>
                 <a:spcPts val="200"/>
               </a:spcBef>
-              <a:defRPr sz="950">
-                <a:solidFill>
-                  <a:srgbClr val="6E82A0"/>
-                </a:solidFill>
-              </a:defRPr>
-            </a:pPr>
-            <a:r>
-              <a:t>Python Flask REST Microservice</a:t>
-            </a:r>
-          </a:p>
-          <a:p>
-            <a:pPr>
-              <a:spcAft>
-                <a:spcPts val="600"/>
-              </a:spcAft>
-            </a:pPr>
-          </a:p>
-          <a:p>
-            <a:pPr>
-              <a:spcBef>
-                <a:spcPts val="400"/>
-              </a:spcBef>
-              <a:defRPr sz="950">
+              <a:defRPr sz="1000">
                 <a:solidFill>
                   <a:srgbClr val="F8FAFC"/>
                 </a:solidFill>
@@ -6944,55 +6769,7 @@
               </a:defRPr>
             </a:pPr>
             <a:r>
-              <a:t>• Python 3.10+ Flask Web Microservice Architecture</a:t>
-            </a:r>
-          </a:p>
-          <a:p>
-            <a:pPr>
-              <a:spcBef>
-                <a:spcPts val="400"/>
-              </a:spcBef>
-              <a:defRPr sz="950">
-                <a:solidFill>
-                  <a:srgbClr val="F8FAFC"/>
-                </a:solidFill>
-                <a:latin typeface="Calibri"/>
-              </a:defRPr>
-            </a:pPr>
-            <a:r>
-              <a:t>• RESTful API Endpoints (/api/products, /api/inventory, /api/orders, etc.)</a:t>
-            </a:r>
-          </a:p>
-          <a:p>
-            <a:pPr>
-              <a:spcBef>
-                <a:spcPts val="400"/>
-              </a:spcBef>
-              <a:defRPr sz="950">
-                <a:solidFill>
-                  <a:srgbClr val="F8FAFC"/>
-                </a:solidFill>
-                <a:latin typeface="Calibri"/>
-              </a:defRPr>
-            </a:pPr>
-            <a:r>
-              <a:t>• Flask Session-based Authentication &amp; Role-Based Access Control (RBAC)</a:t>
-            </a:r>
-          </a:p>
-          <a:p>
-            <a:pPr>
-              <a:spcBef>
-                <a:spcPts val="400"/>
-              </a:spcBef>
-              <a:defRPr sz="950">
-                <a:solidFill>
-                  <a:srgbClr val="F8FAFC"/>
-                </a:solidFill>
-                <a:latin typeface="Calibri"/>
-              </a:defRPr>
-            </a:pPr>
-            <a:r>
-              <a:t>• Automated CSV Spreadsheet Generator Pipeline (RFC 4180)</a:t>
+              <a:t>Admin/Staff selects supplier, product, destination depot, and quantity. System creates purchase_orders and purchase_order_items records in 'Pending' state.</a:t>
             </a:r>
           </a:p>
         </p:txBody>
@@ -7005,8 +6782,8 @@
         </p:nvSpPr>
         <p:spPr>
           <a:xfrm>
-            <a:off x="6217920" y="1508760"/>
-            <a:ext cx="2542032" cy="4846320"/>
+            <a:off x="731520" y="3154680"/>
+            <a:ext cx="10728655" cy="731520"/>
           </a:xfrm>
           <a:prstGeom prst="roundRect">
             <a:avLst/>
@@ -7050,8 +6827,8 @@
         </p:nvSpPr>
         <p:spPr>
           <a:xfrm>
-            <a:off x="6355080" y="1645920"/>
-            <a:ext cx="2267712" cy="4572000"/>
+            <a:off x="914400" y="3227832"/>
+            <a:ext cx="10362895" cy="594360"/>
           </a:xfrm>
           <a:prstGeom prst="rect">
             <a:avLst/>
@@ -7065,15 +6842,15 @@
           <a:lstStyle/>
           <a:p>
             <a:pPr>
-              <a:defRPr sz="1200" b="1">
-                <a:solidFill>
-                  <a:srgbClr val="F59E0B"/>
+              <a:defRPr sz="1150" b="1">
+                <a:solidFill>
+                  <a:srgbClr val="06B6D4"/>
                 </a:solidFill>
                 <a:latin typeface="Arial"/>
               </a:defRPr>
             </a:pPr>
             <a:r>
-              <a:t>ANALYTICS ENGINE</a:t>
+              <a:t>3. Warehouse Inbound Delivery &amp; Trigger</a:t>
             </a:r>
           </a:p>
           <a:p>
@@ -7081,29 +6858,7 @@
               <a:spcBef>
                 <a:spcPts val="200"/>
               </a:spcBef>
-              <a:defRPr sz="950">
-                <a:solidFill>
-                  <a:srgbClr val="6E82A0"/>
-                </a:solidFill>
-              </a:defRPr>
-            </a:pPr>
-            <a:r>
-              <a:t>Predictive Demand &amp; Forecasting Service</a:t>
-            </a:r>
-          </a:p>
-          <a:p>
-            <a:pPr>
-              <a:spcAft>
-                <a:spcPts val="600"/>
-              </a:spcAft>
-            </a:pPr>
-          </a:p>
-          <a:p>
-            <a:pPr>
-              <a:spcBef>
-                <a:spcPts val="400"/>
-              </a:spcBef>
-              <a:defRPr sz="950">
+              <a:defRPr sz="1000">
                 <a:solidFill>
                   <a:srgbClr val="F8FAFC"/>
                 </a:solidFill>
@@ -7111,55 +6866,7 @@
               </a:defRPr>
             </a:pPr>
             <a:r>
-              <a:t>• Historical Sales Run-Rate Velocity Algorithm (units/day)</a:t>
-            </a:r>
-          </a:p>
-          <a:p>
-            <a:pPr>
-              <a:spcBef>
-                <a:spcPts val="400"/>
-              </a:spcBef>
-              <a:defRPr sz="950">
-                <a:solidFill>
-                  <a:srgbClr val="F8FAFC"/>
-                </a:solidFill>
-                <a:latin typeface="Calibri"/>
-              </a:defRPr>
-            </a:pPr>
-            <a:r>
-              <a:t>• Dynamic Days-to-Stockout Remaining Calculator</a:t>
-            </a:r>
-          </a:p>
-          <a:p>
-            <a:pPr>
-              <a:spcBef>
-                <a:spcPts val="400"/>
-              </a:spcBef>
-              <a:defRPr sz="950">
-                <a:solidFill>
-                  <a:srgbClr val="F8FAFC"/>
-                </a:solidFill>
-                <a:latin typeface="Calibri"/>
-              </a:defRPr>
-            </a:pPr>
-            <a:r>
-              <a:t>• Multi-Tiered Stockout Risk Classifier (Critical, Moderate, Healthy)</a:t>
-            </a:r>
-          </a:p>
-          <a:p>
-            <a:pPr>
-              <a:spcBef>
-                <a:spcPts val="400"/>
-              </a:spcBef>
-              <a:defRPr sz="950">
-                <a:solidFill>
-                  <a:srgbClr val="F8FAFC"/>
-                </a:solidFill>
-                <a:latin typeface="Calibri"/>
-              </a:defRPr>
-            </a:pPr>
-            <a:r>
-              <a:t>• 1-Click Auto-Draft Purchase Order Generator</a:t>
+              <a:t>Warehouse marks PO 'Received'. The active trigger after_po_receive fires, automatically executing an atomic UPSERT replenishment into the inventory table.</a:t>
             </a:r>
           </a:p>
         </p:txBody>
@@ -7172,8 +6879,8 @@
         </p:nvSpPr>
         <p:spPr>
           <a:xfrm>
-            <a:off x="8961120" y="1508760"/>
-            <a:ext cx="2542032" cy="4846320"/>
+            <a:off x="731520" y="3977640"/>
+            <a:ext cx="10728655" cy="731520"/>
           </a:xfrm>
           <a:prstGeom prst="roundRect">
             <a:avLst/>
@@ -7217,8 +6924,8 @@
         </p:nvSpPr>
         <p:spPr>
           <a:xfrm>
-            <a:off x="9098280" y="1645920"/>
-            <a:ext cx="2267712" cy="4572000"/>
+            <a:off x="914400" y="4050792"/>
+            <a:ext cx="10362895" cy="594360"/>
           </a:xfrm>
           <a:prstGeom prst="rect">
             <a:avLst/>
@@ -7232,15 +6939,15 @@
           <a:lstStyle/>
           <a:p>
             <a:pPr>
-              <a:defRPr sz="1200" b="1">
-                <a:solidFill>
-                  <a:srgbClr val="F43F5E"/>
+              <a:defRPr sz="1150" b="1">
+                <a:solidFill>
+                  <a:srgbClr val="10B981"/>
                 </a:solidFill>
                 <a:latin typeface="Arial"/>
               </a:defRPr>
             </a:pPr>
             <a:r>
-              <a:t>DATABASE LAYER</a:t>
+              <a:t>4. Sales Order Dispatch &amp; Stock Deduction</a:t>
             </a:r>
           </a:p>
           <a:p>
@@ -7248,29 +6955,104 @@
               <a:spcBef>
                 <a:spcPts val="200"/>
               </a:spcBef>
-              <a:defRPr sz="950">
-                <a:solidFill>
-                  <a:srgbClr val="6E82A0"/>
-                </a:solidFill>
-              </a:defRPr>
-            </a:pPr>
-            <a:r>
-              <a:t>SQLite3 Relational Database Engine</a:t>
-            </a:r>
-          </a:p>
-          <a:p>
-            <a:pPr>
-              <a:spcAft>
-                <a:spcPts val="600"/>
-              </a:spcAft>
-            </a:pPr>
+              <a:defRPr sz="1000">
+                <a:solidFill>
+                  <a:srgbClr val="F8FAFC"/>
+                </a:solidFill>
+                <a:latin typeface="Calibri"/>
+              </a:defRPr>
+            </a:pPr>
+            <a:r>
+              <a:t>Customer sale is registered. The active trigger after_so_item_insert fires, atomically decrementing inventory stock. CHECK constraint rolls back if stock &lt; 0.</a:t>
+            </a:r>
+          </a:p>
+        </p:txBody>
+      </p:sp>
+      <p:sp>
+        <p:nvSpPr>
+          <p:cNvPr id="15" name="Rounded Rectangle 14"/>
+          <p:cNvSpPr/>
+          <p:nvPr/>
+        </p:nvSpPr>
+        <p:spPr>
+          <a:xfrm>
+            <a:off x="731520" y="4800600"/>
+            <a:ext cx="10728655" cy="731520"/>
+          </a:xfrm>
+          <a:prstGeom prst="roundRect">
+            <a:avLst/>
+          </a:prstGeom>
+          <a:solidFill>
+            <a:srgbClr val="141C30"/>
+          </a:solidFill>
+          <a:ln w="12700">
+            <a:solidFill>
+              <a:srgbClr val="2D3C5A"/>
+            </a:solidFill>
+          </a:ln>
+        </p:spPr>
+        <p:style>
+          <a:lnRef idx="1">
+            <a:schemeClr val="accent1"/>
+          </a:lnRef>
+          <a:fillRef idx="3">
+            <a:schemeClr val="accent1"/>
+          </a:fillRef>
+          <a:effectRef idx="2">
+            <a:schemeClr val="accent1"/>
+          </a:effectRef>
+          <a:fontRef idx="minor">
+            <a:schemeClr val="lt1"/>
+          </a:fontRef>
+        </p:style>
+        <p:txBody>
+          <a:bodyPr rtlCol="0" anchor="ctr"/>
+          <a:lstStyle/>
+          <a:p>
+            <a:pPr algn="ctr"/>
+          </a:p>
+        </p:txBody>
+      </p:sp>
+      <p:sp>
+        <p:nvSpPr>
+          <p:cNvPr id="16" name="TextBox 15"/>
+          <p:cNvSpPr txBox="1"/>
+          <p:nvPr/>
+        </p:nvSpPr>
+        <p:spPr>
+          <a:xfrm>
+            <a:off x="914400" y="4873752"/>
+            <a:ext cx="10362895" cy="594360"/>
+          </a:xfrm>
+          <a:prstGeom prst="rect">
+            <a:avLst/>
+          </a:prstGeom>
+          <a:noFill/>
+        </p:spPr>
+        <p:txBody>
+          <a:bodyPr wrap="square">
+            <a:spAutoFit/>
+          </a:bodyPr>
+          <a:lstStyle/>
+          <a:p>
+            <a:pPr>
+              <a:defRPr sz="1150" b="1">
+                <a:solidFill>
+                  <a:srgbClr val="06B6D4"/>
+                </a:solidFill>
+                <a:latin typeface="Arial"/>
+              </a:defRPr>
+            </a:pPr>
+            <a:r>
+              <a:t>5. Carrier Logistics &amp; Invoicing</a:t>
+            </a:r>
           </a:p>
           <a:p>
             <a:pPr>
               <a:spcBef>
-                <a:spcPts val="400"/>
+                <a:spcPts val="200"/>
               </a:spcBef>
-              <a:defRPr sz="950">
+              <a:defRPr sz="1000">
                 <a:solidFill>
                   <a:srgbClr val="F8FAFC"/>
                 </a:solidFill>
@@ -7278,15 +7060,96 @@
               </a:defRPr>
             </a:pPr>
             <a:r>
-              <a:t>• 11 Normalized Tables with Foreign Key Cascade Enforcement (PRAGMA foreign_keys = ON)</a:t>
+              <a:t>Sales dispatch automatically generates a 1:1 shipments record and a 1:1 billing ledger invoice. Shipment delivery milestone syncs invoice payment dates.</a:t>
+            </a:r>
+          </a:p>
+        </p:txBody>
+      </p:sp>
+      <p:sp>
+        <p:nvSpPr>
+          <p:cNvPr id="17" name="Rounded Rectangle 16"/>
+          <p:cNvSpPr/>
+          <p:nvPr/>
+        </p:nvSpPr>
+        <p:spPr>
+          <a:xfrm>
+            <a:off x="731520" y="5623560"/>
+            <a:ext cx="10728655" cy="731520"/>
+          </a:xfrm>
+          <a:prstGeom prst="roundRect">
+            <a:avLst/>
+          </a:prstGeom>
+          <a:solidFill>
+            <a:srgbClr val="141C30"/>
+          </a:solidFill>
+          <a:ln w="12700">
+            <a:solidFill>
+              <a:srgbClr val="2D3C5A"/>
+            </a:solidFill>
+          </a:ln>
+        </p:spPr>
+        <p:style>
+          <a:lnRef idx="1">
+            <a:schemeClr val="accent1"/>
+          </a:lnRef>
+          <a:fillRef idx="3">
+            <a:schemeClr val="accent1"/>
+          </a:fillRef>
+          <a:effectRef idx="2">
+            <a:schemeClr val="accent1"/>
+          </a:effectRef>
+          <a:fontRef idx="minor">
+            <a:schemeClr val="lt1"/>
+          </a:fontRef>
+        </p:style>
+        <p:txBody>
+          <a:bodyPr rtlCol="0" anchor="ctr"/>
+          <a:lstStyle/>
+          <a:p>
+            <a:pPr algn="ctr"/>
+          </a:p>
+        </p:txBody>
+      </p:sp>
+      <p:sp>
+        <p:nvSpPr>
+          <p:cNvPr id="18" name="TextBox 17"/>
+          <p:cNvSpPr txBox="1"/>
+          <p:nvPr/>
+        </p:nvSpPr>
+        <p:spPr>
+          <a:xfrm>
+            <a:off x="914400" y="5696712"/>
+            <a:ext cx="10362895" cy="594360"/>
+          </a:xfrm>
+          <a:prstGeom prst="rect">
+            <a:avLst/>
+          </a:prstGeom>
+          <a:noFill/>
+        </p:spPr>
+        <p:txBody>
+          <a:bodyPr wrap="square">
+            <a:spAutoFit/>
+          </a:bodyPr>
+          <a:lstStyle/>
+          <a:p>
+            <a:pPr>
+              <a:defRPr sz="1150" b="1">
+                <a:solidFill>
+                  <a:srgbClr val="10B981"/>
+                </a:solidFill>
+                <a:latin typeface="Arial"/>
+              </a:defRPr>
+            </a:pPr>
+            <a:r>
+              <a:t>6. Predictive Forecasting &amp; Auto-PO</a:t>
             </a:r>
           </a:p>
           <a:p>
             <a:pPr>
               <a:spcBef>
-                <a:spcPts val="400"/>
+                <a:spcPts val="200"/>
               </a:spcBef>
-              <a:defRPr sz="950">
+              <a:defRPr sz="1000">
                 <a:solidFill>
                   <a:srgbClr val="F8FAFC"/>
                 </a:solidFill>
@@ -7294,39 +7157,7 @@
               </a:defRPr>
             </a:pPr>
             <a:r>
-              <a:t>• Event-Driven Active Triggers (after_so_item_insert, after_po_receive)</a:t>
-            </a:r>
-          </a:p>
-          <a:p>
-            <a:pPr>
-              <a:spcBef>
-                <a:spcPts val="400"/>
-              </a:spcBef>
-              <a:defRPr sz="950">
-                <a:solidFill>
-                  <a:srgbClr val="F8FAFC"/>
-                </a:solidFill>
-                <a:latin typeface="Calibri"/>
-              </a:defRPr>
-            </a:pPr>
-            <a:r>
-              <a:t>• Materialized Database View (low_stock_alerts_view)</a:t>
-            </a:r>
-          </a:p>
-          <a:p>
-            <a:pPr>
-              <a:spcBef>
-                <a:spcPts val="400"/>
-              </a:spcBef>
-              <a:defRPr sz="950">
-                <a:solidFill>
-                  <a:srgbClr val="F8FAFC"/>
-                </a:solidFill>
-                <a:latin typeface="Calibri"/>
-              </a:defRPr>
-            </a:pPr>
-            <a:r>
-              <a:t>• B-Tree Performance Indexes on Foreign Keys (idx_inventory_prod, etc.)</a:t>
+              <a:t>Sales run-rate velocity engine recalculates days of remaining stock. Products approaching exhaustion generate automated 1-click restock PO drafts.</a:t>
             </a:r>
           </a:p>
         </p:txBody>
@@ -7340,6 +7171,879 @@
 </file>
 
 <file path=ppt/slides/slide15.xml><?xml version="1.0" encoding="utf-8"?>
+<p:sld xmlns:a="http://schemas.openxmlformats.org/drawingml/2006/main" xmlns:p="http://schemas.openxmlformats.org/presentationml/2006/main" xmlns:r="http://schemas.openxmlformats.org/officeDocument/2006/relationships">
+  <p:cSld>
+    <p:spTree>
+      <p:nvGrpSpPr>
+        <p:cNvPr id="1" name=""/>
+        <p:cNvGrpSpPr/>
+        <p:nvPr/>
+      </p:nvGrpSpPr>
+      <p:grpSpPr/>
+      <p:sp>
+        <p:nvSpPr>
+          <p:cNvPr id="2" name="Rectangle 1"/>
+          <p:cNvSpPr/>
+          <p:nvPr/>
+        </p:nvSpPr>
+        <p:spPr>
+          <a:xfrm>
+            <a:off x="0" y="0"/>
+            <a:ext cx="12191695" cy="6858000"/>
+          </a:xfrm>
+          <a:prstGeom prst="rect">
+            <a:avLst/>
+          </a:prstGeom>
+          <a:solidFill>
+            <a:srgbClr val="0A0F1D"/>
+          </a:solidFill>
+          <a:ln>
+            <a:noFill/>
+          </a:ln>
+        </p:spPr>
+        <p:style>
+          <a:lnRef idx="1">
+            <a:schemeClr val="accent1"/>
+          </a:lnRef>
+          <a:fillRef idx="3">
+            <a:schemeClr val="accent1"/>
+          </a:fillRef>
+          <a:effectRef idx="2">
+            <a:schemeClr val="accent1"/>
+          </a:effectRef>
+          <a:fontRef idx="minor">
+            <a:schemeClr val="lt1"/>
+          </a:fontRef>
+        </p:style>
+        <p:txBody>
+          <a:bodyPr rtlCol="0" anchor="ctr"/>
+          <a:lstStyle/>
+          <a:p>
+            <a:pPr algn="ctr"/>
+          </a:p>
+        </p:txBody>
+      </p:sp>
+      <p:sp>
+        <p:nvSpPr>
+          <p:cNvPr id="3" name="TextBox 2"/>
+          <p:cNvSpPr txBox="1"/>
+          <p:nvPr/>
+        </p:nvSpPr>
+        <p:spPr>
+          <a:xfrm>
+            <a:off x="731520" y="320040"/>
+            <a:ext cx="9144000" cy="320040"/>
+          </a:xfrm>
+          <a:prstGeom prst="rect">
+            <a:avLst/>
+          </a:prstGeom>
+          <a:noFill/>
+        </p:spPr>
+        <p:txBody>
+          <a:bodyPr wrap="square">
+            <a:spAutoFit/>
+          </a:bodyPr>
+          <a:lstStyle/>
+          <a:p>
+            <a:pPr>
+              <a:defRPr sz="1000" b="1">
+                <a:solidFill>
+                  <a:srgbClr val="06B6D4"/>
+                </a:solidFill>
+                <a:latin typeface="Arial"/>
+              </a:defRPr>
+            </a:pPr>
+            <a:r>
+              <a:t>STOCK MASTER | DBMS SEMESTER PROJECT</a:t>
+            </a:r>
+          </a:p>
+        </p:txBody>
+      </p:sp>
+      <p:sp>
+        <p:nvSpPr>
+          <p:cNvPr id="4" name="TextBox 3"/>
+          <p:cNvSpPr txBox="1"/>
+          <p:nvPr/>
+        </p:nvSpPr>
+        <p:spPr>
+          <a:xfrm>
+            <a:off x="10241280" y="320040"/>
+            <a:ext cx="1188720" cy="320040"/>
+          </a:xfrm>
+          <a:prstGeom prst="rect">
+            <a:avLst/>
+          </a:prstGeom>
+          <a:noFill/>
+        </p:spPr>
+        <p:txBody>
+          <a:bodyPr wrap="none">
+            <a:spAutoFit/>
+          </a:bodyPr>
+          <a:lstStyle/>
+          <a:p>
+            <a:pPr algn="r">
+              <a:defRPr sz="1000" b="1">
+                <a:solidFill>
+                  <a:srgbClr val="6E82A0"/>
+                </a:solidFill>
+                <a:latin typeface="Arial"/>
+              </a:defRPr>
+            </a:pPr>
+            <a:r>
+              <a:t>12 / 18</a:t>
+            </a:r>
+          </a:p>
+        </p:txBody>
+      </p:sp>
+      <p:sp>
+        <p:nvSpPr>
+          <p:cNvPr id="5" name="TextBox 4"/>
+          <p:cNvSpPr txBox="1"/>
+          <p:nvPr/>
+        </p:nvSpPr>
+        <p:spPr>
+          <a:xfrm>
+            <a:off x="731520" y="594360"/>
+            <a:ext cx="10515600" cy="548640"/>
+          </a:xfrm>
+          <a:prstGeom prst="rect">
+            <a:avLst/>
+          </a:prstGeom>
+          <a:noFill/>
+        </p:spPr>
+        <p:txBody>
+          <a:bodyPr wrap="square">
+            <a:spAutoFit/>
+          </a:bodyPr>
+          <a:lstStyle/>
+          <a:p>
+            <a:pPr>
+              <a:defRPr sz="2100" b="1">
+                <a:solidFill>
+                  <a:srgbClr val="F8FAFC"/>
+                </a:solidFill>
+                <a:latin typeface="Arial"/>
+              </a:defRPr>
+            </a:pPr>
+            <a:r>
+              <a:t>Multi-Tier System Architecture</a:t>
+            </a:r>
+          </a:p>
+        </p:txBody>
+      </p:sp>
+      <p:sp>
+        <p:nvSpPr>
+          <p:cNvPr id="6" name="TextBox 5"/>
+          <p:cNvSpPr txBox="1"/>
+          <p:nvPr/>
+        </p:nvSpPr>
+        <p:spPr>
+          <a:xfrm>
+            <a:off x="731520" y="1115568"/>
+            <a:ext cx="10515600" cy="320040"/>
+          </a:xfrm>
+          <a:prstGeom prst="rect">
+            <a:avLst/>
+          </a:prstGeom>
+          <a:noFill/>
+        </p:spPr>
+        <p:txBody>
+          <a:bodyPr wrap="square">
+            <a:spAutoFit/>
+          </a:bodyPr>
+          <a:lstStyle/>
+          <a:p>
+            <a:pPr>
+              <a:defRPr sz="1100">
+                <a:solidFill>
+                  <a:srgbClr val="A0AFC8"/>
+                </a:solidFill>
+                <a:latin typeface="Calibri"/>
+              </a:defRPr>
+            </a:pPr>
+            <a:r>
+              <a:t>Decoupled presentation, application backend, analytics engine, and relational database layers</a:t>
+            </a:r>
+          </a:p>
+        </p:txBody>
+      </p:sp>
+      <p:sp>
+        <p:nvSpPr>
+          <p:cNvPr id="7" name="Rounded Rectangle 6"/>
+          <p:cNvSpPr/>
+          <p:nvPr/>
+        </p:nvSpPr>
+        <p:spPr>
+          <a:xfrm>
+            <a:off x="731520" y="1508760"/>
+            <a:ext cx="2542032" cy="4846320"/>
+          </a:xfrm>
+          <a:prstGeom prst="roundRect">
+            <a:avLst/>
+          </a:prstGeom>
+          <a:solidFill>
+            <a:srgbClr val="141C30"/>
+          </a:solidFill>
+          <a:ln w="12700">
+            <a:solidFill>
+              <a:srgbClr val="2D3C5A"/>
+            </a:solidFill>
+          </a:ln>
+        </p:spPr>
+        <p:style>
+          <a:lnRef idx="1">
+            <a:schemeClr val="accent1"/>
+          </a:lnRef>
+          <a:fillRef idx="3">
+            <a:schemeClr val="accent1"/>
+          </a:fillRef>
+          <a:effectRef idx="2">
+            <a:schemeClr val="accent1"/>
+          </a:effectRef>
+          <a:fontRef idx="minor">
+            <a:schemeClr val="lt1"/>
+          </a:fontRef>
+        </p:style>
+        <p:txBody>
+          <a:bodyPr rtlCol="0" anchor="ctr"/>
+          <a:lstStyle/>
+          <a:p>
+            <a:pPr algn="ctr"/>
+          </a:p>
+        </p:txBody>
+      </p:sp>
+      <p:sp>
+        <p:nvSpPr>
+          <p:cNvPr id="8" name="TextBox 7"/>
+          <p:cNvSpPr txBox="1"/>
+          <p:nvPr/>
+        </p:nvSpPr>
+        <p:spPr>
+          <a:xfrm>
+            <a:off x="868680" y="1645920"/>
+            <a:ext cx="2267712" cy="4572000"/>
+          </a:xfrm>
+          <a:prstGeom prst="rect">
+            <a:avLst/>
+          </a:prstGeom>
+          <a:noFill/>
+        </p:spPr>
+        <p:txBody>
+          <a:bodyPr wrap="square">
+            <a:spAutoFit/>
+          </a:bodyPr>
+          <a:lstStyle/>
+          <a:p>
+            <a:pPr>
+              <a:defRPr sz="1200" b="1">
+                <a:solidFill>
+                  <a:srgbClr val="06B6D4"/>
+                </a:solidFill>
+                <a:latin typeface="Arial"/>
+              </a:defRPr>
+            </a:pPr>
+            <a:r>
+              <a:t>PRESENTATION LAYER</a:t>
+            </a:r>
+          </a:p>
+          <a:p>
+            <a:pPr>
+              <a:spcBef>
+                <a:spcPts val="200"/>
+              </a:spcBef>
+              <a:defRPr sz="950">
+                <a:solidFill>
+                  <a:srgbClr val="6E82A0"/>
+                </a:solidFill>
+              </a:defRPr>
+            </a:pPr>
+            <a:r>
+              <a:t>Modern Glassmorphic Web Client</a:t>
+            </a:r>
+          </a:p>
+          <a:p>
+            <a:pPr>
+              <a:spcAft>
+                <a:spcPts val="600"/>
+              </a:spcAft>
+            </a:pPr>
+          </a:p>
+          <a:p>
+            <a:pPr>
+              <a:spcBef>
+                <a:spcPts val="400"/>
+              </a:spcBef>
+              <a:defRPr sz="950">
+                <a:solidFill>
+                  <a:srgbClr val="F8FAFC"/>
+                </a:solidFill>
+                <a:latin typeface="Calibri"/>
+              </a:defRPr>
+            </a:pPr>
+            <a:r>
+              <a:t>• HTML5 Semantic Layout &amp; Responsive Glassmorphic CSS3 System</a:t>
+            </a:r>
+          </a:p>
+          <a:p>
+            <a:pPr>
+              <a:spcBef>
+                <a:spcPts val="400"/>
+              </a:spcBef>
+              <a:defRPr sz="950">
+                <a:solidFill>
+                  <a:srgbClr val="F8FAFC"/>
+                </a:solidFill>
+                <a:latin typeface="Calibri"/>
+              </a:defRPr>
+            </a:pPr>
+            <a:r>
+              <a:t>• Vanilla ES6+ JavaScript Client with Hash-based Router</a:t>
+            </a:r>
+          </a:p>
+          <a:p>
+            <a:pPr>
+              <a:spcBef>
+                <a:spcPts val="400"/>
+              </a:spcBef>
+              <a:defRPr sz="950">
+                <a:solidFill>
+                  <a:srgbClr val="F8FAFC"/>
+                </a:solidFill>
+                <a:latin typeface="Calibri"/>
+              </a:defRPr>
+            </a:pPr>
+            <a:r>
+              <a:t>• Dynamic SVG Warehouse Capacity Occupancy Bar Generators</a:t>
+            </a:r>
+          </a:p>
+          <a:p>
+            <a:pPr>
+              <a:spcBef>
+                <a:spcPts val="400"/>
+              </a:spcBef>
+              <a:defRPr sz="950">
+                <a:solidFill>
+                  <a:srgbClr val="F8FAFC"/>
+                </a:solidFill>
+                <a:latin typeface="Calibri"/>
+              </a:defRPr>
+            </a:pPr>
+            <a:r>
+              <a:t>• Lucide Vector Iconography &amp; Interactive Modal Dialogues</a:t>
+            </a:r>
+          </a:p>
+        </p:txBody>
+      </p:sp>
+      <p:sp>
+        <p:nvSpPr>
+          <p:cNvPr id="9" name="Rounded Rectangle 8"/>
+          <p:cNvSpPr/>
+          <p:nvPr/>
+        </p:nvSpPr>
+        <p:spPr>
+          <a:xfrm>
+            <a:off x="3474720" y="1508760"/>
+            <a:ext cx="2542032" cy="4846320"/>
+          </a:xfrm>
+          <a:prstGeom prst="roundRect">
+            <a:avLst/>
+          </a:prstGeom>
+          <a:solidFill>
+            <a:srgbClr val="141C30"/>
+          </a:solidFill>
+          <a:ln w="12700">
+            <a:solidFill>
+              <a:srgbClr val="2D3C5A"/>
+            </a:solidFill>
+          </a:ln>
+        </p:spPr>
+        <p:style>
+          <a:lnRef idx="1">
+            <a:schemeClr val="accent1"/>
+          </a:lnRef>
+          <a:fillRef idx="3">
+            <a:schemeClr val="accent1"/>
+          </a:fillRef>
+          <a:effectRef idx="2">
+            <a:schemeClr val="accent1"/>
+          </a:effectRef>
+          <a:fontRef idx="minor">
+            <a:schemeClr val="lt1"/>
+          </a:fontRef>
+        </p:style>
+        <p:txBody>
+          <a:bodyPr rtlCol="0" anchor="ctr"/>
+          <a:lstStyle/>
+          <a:p>
+            <a:pPr algn="ctr"/>
+          </a:p>
+        </p:txBody>
+      </p:sp>
+      <p:sp>
+        <p:nvSpPr>
+          <p:cNvPr id="10" name="TextBox 9"/>
+          <p:cNvSpPr txBox="1"/>
+          <p:nvPr/>
+        </p:nvSpPr>
+        <p:spPr>
+          <a:xfrm>
+            <a:off x="3611880" y="1645920"/>
+            <a:ext cx="2267712" cy="4572000"/>
+          </a:xfrm>
+          <a:prstGeom prst="rect">
+            <a:avLst/>
+          </a:prstGeom>
+          <a:noFill/>
+        </p:spPr>
+        <p:txBody>
+          <a:bodyPr wrap="square">
+            <a:spAutoFit/>
+          </a:bodyPr>
+          <a:lstStyle/>
+          <a:p>
+            <a:pPr>
+              <a:defRPr sz="1200" b="1">
+                <a:solidFill>
+                  <a:srgbClr val="10B981"/>
+                </a:solidFill>
+                <a:latin typeface="Arial"/>
+              </a:defRPr>
+            </a:pPr>
+            <a:r>
+              <a:t>APPLICATION BACKEND</a:t>
+            </a:r>
+          </a:p>
+          <a:p>
+            <a:pPr>
+              <a:spcBef>
+                <a:spcPts val="200"/>
+              </a:spcBef>
+              <a:defRPr sz="950">
+                <a:solidFill>
+                  <a:srgbClr val="6E82A0"/>
+                </a:solidFill>
+              </a:defRPr>
+            </a:pPr>
+            <a:r>
+              <a:t>Python Flask REST Microservice</a:t>
+            </a:r>
+          </a:p>
+          <a:p>
+            <a:pPr>
+              <a:spcAft>
+                <a:spcPts val="600"/>
+              </a:spcAft>
+            </a:pPr>
+          </a:p>
+          <a:p>
+            <a:pPr>
+              <a:spcBef>
+                <a:spcPts val="400"/>
+              </a:spcBef>
+              <a:defRPr sz="950">
+                <a:solidFill>
+                  <a:srgbClr val="F8FAFC"/>
+                </a:solidFill>
+                <a:latin typeface="Calibri"/>
+              </a:defRPr>
+            </a:pPr>
+            <a:r>
+              <a:t>• Python 3.10+ Flask Web Microservice Architecture</a:t>
+            </a:r>
+          </a:p>
+          <a:p>
+            <a:pPr>
+              <a:spcBef>
+                <a:spcPts val="400"/>
+              </a:spcBef>
+              <a:defRPr sz="950">
+                <a:solidFill>
+                  <a:srgbClr val="F8FAFC"/>
+                </a:solidFill>
+                <a:latin typeface="Calibri"/>
+              </a:defRPr>
+            </a:pPr>
+            <a:r>
+              <a:t>• RESTful API Endpoints (/api/products, /api/inventory, /api/orders, etc.)</a:t>
+            </a:r>
+          </a:p>
+          <a:p>
+            <a:pPr>
+              <a:spcBef>
+                <a:spcPts val="400"/>
+              </a:spcBef>
+              <a:defRPr sz="950">
+                <a:solidFill>
+                  <a:srgbClr val="F8FAFC"/>
+                </a:solidFill>
+                <a:latin typeface="Calibri"/>
+              </a:defRPr>
+            </a:pPr>
+            <a:r>
+              <a:t>• Flask Session-based Authentication &amp; Role-Based Access Control (RBAC)</a:t>
+            </a:r>
+          </a:p>
+          <a:p>
+            <a:pPr>
+              <a:spcBef>
+                <a:spcPts val="400"/>
+              </a:spcBef>
+              <a:defRPr sz="950">
+                <a:solidFill>
+                  <a:srgbClr val="F8FAFC"/>
+                </a:solidFill>
+                <a:latin typeface="Calibri"/>
+              </a:defRPr>
+            </a:pPr>
+            <a:r>
+              <a:t>• Automated CSV Spreadsheet Generator Pipeline (RFC 4180)</a:t>
+            </a:r>
+          </a:p>
+        </p:txBody>
+      </p:sp>
+      <p:sp>
+        <p:nvSpPr>
+          <p:cNvPr id="11" name="Rounded Rectangle 10"/>
+          <p:cNvSpPr/>
+          <p:nvPr/>
+        </p:nvSpPr>
+        <p:spPr>
+          <a:xfrm>
+            <a:off x="6217920" y="1508760"/>
+            <a:ext cx="2542032" cy="4846320"/>
+          </a:xfrm>
+          <a:prstGeom prst="roundRect">
+            <a:avLst/>
+          </a:prstGeom>
+          <a:solidFill>
+            <a:srgbClr val="141C30"/>
+          </a:solidFill>
+          <a:ln w="12700">
+            <a:solidFill>
+              <a:srgbClr val="2D3C5A"/>
+            </a:solidFill>
+          </a:ln>
+        </p:spPr>
+        <p:style>
+          <a:lnRef idx="1">
+            <a:schemeClr val="accent1"/>
+          </a:lnRef>
+          <a:fillRef idx="3">
+            <a:schemeClr val="accent1"/>
+          </a:fillRef>
+          <a:effectRef idx="2">
+            <a:schemeClr val="accent1"/>
+          </a:effectRef>
+          <a:fontRef idx="minor">
+            <a:schemeClr val="lt1"/>
+          </a:fontRef>
+        </p:style>
+        <p:txBody>
+          <a:bodyPr rtlCol="0" anchor="ctr"/>
+          <a:lstStyle/>
+          <a:p>
+            <a:pPr algn="ctr"/>
+          </a:p>
+        </p:txBody>
+      </p:sp>
+      <p:sp>
+        <p:nvSpPr>
+          <p:cNvPr id="12" name="TextBox 11"/>
+          <p:cNvSpPr txBox="1"/>
+          <p:nvPr/>
+        </p:nvSpPr>
+        <p:spPr>
+          <a:xfrm>
+            <a:off x="6355080" y="1645920"/>
+            <a:ext cx="2267712" cy="4572000"/>
+          </a:xfrm>
+          <a:prstGeom prst="rect">
+            <a:avLst/>
+          </a:prstGeom>
+          <a:noFill/>
+        </p:spPr>
+        <p:txBody>
+          <a:bodyPr wrap="square">
+            <a:spAutoFit/>
+          </a:bodyPr>
+          <a:lstStyle/>
+          <a:p>
+            <a:pPr>
+              <a:defRPr sz="1200" b="1">
+                <a:solidFill>
+                  <a:srgbClr val="F59E0B"/>
+                </a:solidFill>
+                <a:latin typeface="Arial"/>
+              </a:defRPr>
+            </a:pPr>
+            <a:r>
+              <a:t>ANALYTICS ENGINE</a:t>
+            </a:r>
+          </a:p>
+          <a:p>
+            <a:pPr>
+              <a:spcBef>
+                <a:spcPts val="200"/>
+              </a:spcBef>
+              <a:defRPr sz="950">
+                <a:solidFill>
+                  <a:srgbClr val="6E82A0"/>
+                </a:solidFill>
+              </a:defRPr>
+            </a:pPr>
+            <a:r>
+              <a:t>Predictive Demand &amp; Forecasting Service</a:t>
+            </a:r>
+          </a:p>
+          <a:p>
+            <a:pPr>
+              <a:spcAft>
+                <a:spcPts val="600"/>
+              </a:spcAft>
+            </a:pPr>
+          </a:p>
+          <a:p>
+            <a:pPr>
+              <a:spcBef>
+                <a:spcPts val="400"/>
+              </a:spcBef>
+              <a:defRPr sz="950">
+                <a:solidFill>
+                  <a:srgbClr val="F8FAFC"/>
+                </a:solidFill>
+                <a:latin typeface="Calibri"/>
+              </a:defRPr>
+            </a:pPr>
+            <a:r>
+              <a:t>• Historical Sales Run-Rate Velocity Algorithm (units/day)</a:t>
+            </a:r>
+          </a:p>
+          <a:p>
+            <a:pPr>
+              <a:spcBef>
+                <a:spcPts val="400"/>
+              </a:spcBef>
+              <a:defRPr sz="950">
+                <a:solidFill>
+                  <a:srgbClr val="F8FAFC"/>
+                </a:solidFill>
+                <a:latin typeface="Calibri"/>
+              </a:defRPr>
+            </a:pPr>
+            <a:r>
+              <a:t>• Dynamic Days-to-Stockout Remaining Calculator</a:t>
+            </a:r>
+          </a:p>
+          <a:p>
+            <a:pPr>
+              <a:spcBef>
+                <a:spcPts val="400"/>
+              </a:spcBef>
+              <a:defRPr sz="950">
+                <a:solidFill>
+                  <a:srgbClr val="F8FAFC"/>
+                </a:solidFill>
+                <a:latin typeface="Calibri"/>
+              </a:defRPr>
+            </a:pPr>
+            <a:r>
+              <a:t>• Multi-Tiered Stockout Risk Classifier (Critical, Moderate, Healthy)</a:t>
+            </a:r>
+          </a:p>
+          <a:p>
+            <a:pPr>
+              <a:spcBef>
+                <a:spcPts val="400"/>
+              </a:spcBef>
+              <a:defRPr sz="950">
+                <a:solidFill>
+                  <a:srgbClr val="F8FAFC"/>
+                </a:solidFill>
+                <a:latin typeface="Calibri"/>
+              </a:defRPr>
+            </a:pPr>
+            <a:r>
+              <a:t>• 1-Click Auto-Draft Purchase Order Generator</a:t>
+            </a:r>
+          </a:p>
+        </p:txBody>
+      </p:sp>
+      <p:sp>
+        <p:nvSpPr>
+          <p:cNvPr id="13" name="Rounded Rectangle 12"/>
+          <p:cNvSpPr/>
+          <p:nvPr/>
+        </p:nvSpPr>
+        <p:spPr>
+          <a:xfrm>
+            <a:off x="8961120" y="1508760"/>
+            <a:ext cx="2542032" cy="4846320"/>
+          </a:xfrm>
+          <a:prstGeom prst="roundRect">
+            <a:avLst/>
+          </a:prstGeom>
+          <a:solidFill>
+            <a:srgbClr val="141C30"/>
+          </a:solidFill>
+          <a:ln w="12700">
+            <a:solidFill>
+              <a:srgbClr val="2D3C5A"/>
+            </a:solidFill>
+          </a:ln>
+        </p:spPr>
+        <p:style>
+          <a:lnRef idx="1">
+            <a:schemeClr val="accent1"/>
+          </a:lnRef>
+          <a:fillRef idx="3">
+            <a:schemeClr val="accent1"/>
+          </a:fillRef>
+          <a:effectRef idx="2">
+            <a:schemeClr val="accent1"/>
+          </a:effectRef>
+          <a:fontRef idx="minor">
+            <a:schemeClr val="lt1"/>
+          </a:fontRef>
+        </p:style>
+        <p:txBody>
+          <a:bodyPr rtlCol="0" anchor="ctr"/>
+          <a:lstStyle/>
+          <a:p>
+            <a:pPr algn="ctr"/>
+          </a:p>
+        </p:txBody>
+      </p:sp>
+      <p:sp>
+        <p:nvSpPr>
+          <p:cNvPr id="14" name="TextBox 13"/>
+          <p:cNvSpPr txBox="1"/>
+          <p:nvPr/>
+        </p:nvSpPr>
+        <p:spPr>
+          <a:xfrm>
+            <a:off x="9098280" y="1645920"/>
+            <a:ext cx="2267712" cy="4572000"/>
+          </a:xfrm>
+          <a:prstGeom prst="rect">
+            <a:avLst/>
+          </a:prstGeom>
+          <a:noFill/>
+        </p:spPr>
+        <p:txBody>
+          <a:bodyPr wrap="square">
+            <a:spAutoFit/>
+          </a:bodyPr>
+          <a:lstStyle/>
+          <a:p>
+            <a:pPr>
+              <a:defRPr sz="1200" b="1">
+                <a:solidFill>
+                  <a:srgbClr val="F43F5E"/>
+                </a:solidFill>
+                <a:latin typeface="Arial"/>
+              </a:defRPr>
+            </a:pPr>
+            <a:r>
+              <a:t>DATABASE LAYER</a:t>
+            </a:r>
+          </a:p>
+          <a:p>
+            <a:pPr>
+              <a:spcBef>
+                <a:spcPts val="200"/>
+              </a:spcBef>
+              <a:defRPr sz="950">
+                <a:solidFill>
+                  <a:srgbClr val="6E82A0"/>
+                </a:solidFill>
+              </a:defRPr>
+            </a:pPr>
+            <a:r>
+              <a:t>SQLite3 Relational Database Engine</a:t>
+            </a:r>
+          </a:p>
+          <a:p>
+            <a:pPr>
+              <a:spcAft>
+                <a:spcPts val="600"/>
+              </a:spcAft>
+            </a:pPr>
+          </a:p>
+          <a:p>
+            <a:pPr>
+              <a:spcBef>
+                <a:spcPts val="400"/>
+              </a:spcBef>
+              <a:defRPr sz="950">
+                <a:solidFill>
+                  <a:srgbClr val="F8FAFC"/>
+                </a:solidFill>
+                <a:latin typeface="Calibri"/>
+              </a:defRPr>
+            </a:pPr>
+            <a:r>
+              <a:t>• 11 Normalized Tables with Foreign Key Cascade Enforcement (PRAGMA foreign_keys = ON)</a:t>
+            </a:r>
+          </a:p>
+          <a:p>
+            <a:pPr>
+              <a:spcBef>
+                <a:spcPts val="400"/>
+              </a:spcBef>
+              <a:defRPr sz="950">
+                <a:solidFill>
+                  <a:srgbClr val="F8FAFC"/>
+                </a:solidFill>
+                <a:latin typeface="Calibri"/>
+              </a:defRPr>
+            </a:pPr>
+            <a:r>
+              <a:t>• Event-Driven Active Triggers (after_so_item_insert, after_po_receive)</a:t>
+            </a:r>
+          </a:p>
+          <a:p>
+            <a:pPr>
+              <a:spcBef>
+                <a:spcPts val="400"/>
+              </a:spcBef>
+              <a:defRPr sz="950">
+                <a:solidFill>
+                  <a:srgbClr val="F8FAFC"/>
+                </a:solidFill>
+                <a:latin typeface="Calibri"/>
+              </a:defRPr>
+            </a:pPr>
+            <a:r>
+              <a:t>• Materialized Database View (low_stock_alerts_view)</a:t>
+            </a:r>
+          </a:p>
+          <a:p>
+            <a:pPr>
+              <a:spcBef>
+                <a:spcPts val="400"/>
+              </a:spcBef>
+              <a:defRPr sz="950">
+                <a:solidFill>
+                  <a:srgbClr val="F8FAFC"/>
+                </a:solidFill>
+                <a:latin typeface="Calibri"/>
+              </a:defRPr>
+            </a:pPr>
+            <a:r>
+              <a:t>• B-Tree Performance Indexes on Foreign Keys (idx_inventory_prod, etc.)</a:t>
+            </a:r>
+          </a:p>
+        </p:txBody>
+      </p:sp>
+    </p:spTree>
+  </p:cSld>
+  <p:clrMapOvr>
+    <a:masterClrMapping/>
+  </p:clrMapOvr>
+</p:sld>
+</file>
+
+<file path=ppt/slides/slide16.xml><?xml version="1.0" encoding="utf-8"?>
 <p:sld xmlns:a="http://schemas.openxmlformats.org/drawingml/2006/main" xmlns:p="http://schemas.openxmlformats.org/presentationml/2006/main" xmlns:r="http://schemas.openxmlformats.org/officeDocument/2006/relationships">
   <p:cSld>
     <p:spTree>
@@ -8139,609 +8843,6 @@
 </p:sld>
 </file>
 
-<file path=ppt/slides/slide16.xml><?xml version="1.0" encoding="utf-8"?>
-<p:sld xmlns:a="http://schemas.openxmlformats.org/drawingml/2006/main" xmlns:p="http://schemas.openxmlformats.org/presentationml/2006/main" xmlns:r="http://schemas.openxmlformats.org/officeDocument/2006/relationships">
-  <p:cSld>
-    <p:spTree>
-      <p:nvGrpSpPr>
-        <p:cNvPr id="1" name=""/>
-        <p:cNvGrpSpPr/>
-        <p:nvPr/>
-      </p:nvGrpSpPr>
-      <p:grpSpPr/>
-      <p:sp>
-        <p:nvSpPr>
-          <p:cNvPr id="2" name="Rectangle 1"/>
-          <p:cNvSpPr/>
-          <p:nvPr/>
-        </p:nvSpPr>
-        <p:spPr>
-          <a:xfrm>
-            <a:off x="0" y="0"/>
-            <a:ext cx="12191695" cy="6858000"/>
-          </a:xfrm>
-          <a:prstGeom prst="rect">
-            <a:avLst/>
-          </a:prstGeom>
-          <a:solidFill>
-            <a:srgbClr val="0A0F1D"/>
-          </a:solidFill>
-          <a:ln>
-            <a:noFill/>
-          </a:ln>
-        </p:spPr>
-        <p:style>
-          <a:lnRef idx="1">
-            <a:schemeClr val="accent1"/>
-          </a:lnRef>
-          <a:fillRef idx="3">
-            <a:schemeClr val="accent1"/>
-          </a:fillRef>
-          <a:effectRef idx="2">
-            <a:schemeClr val="accent1"/>
-          </a:effectRef>
-          <a:fontRef idx="minor">
-            <a:schemeClr val="lt1"/>
-          </a:fontRef>
-        </p:style>
-        <p:txBody>
-          <a:bodyPr rtlCol="0" anchor="ctr"/>
-          <a:lstStyle/>
-          <a:p>
-            <a:pPr algn="ctr"/>
-          </a:p>
-        </p:txBody>
-      </p:sp>
-      <p:sp>
-        <p:nvSpPr>
-          <p:cNvPr id="3" name="TextBox 2"/>
-          <p:cNvSpPr txBox="1"/>
-          <p:nvPr/>
-        </p:nvSpPr>
-        <p:spPr>
-          <a:xfrm>
-            <a:off x="731520" y="320040"/>
-            <a:ext cx="9144000" cy="320040"/>
-          </a:xfrm>
-          <a:prstGeom prst="rect">
-            <a:avLst/>
-          </a:prstGeom>
-          <a:noFill/>
-        </p:spPr>
-        <p:txBody>
-          <a:bodyPr wrap="square">
-            <a:spAutoFit/>
-          </a:bodyPr>
-          <a:lstStyle/>
-          <a:p>
-            <a:pPr>
-              <a:defRPr sz="1000" b="1">
-                <a:solidFill>
-                  <a:srgbClr val="06B6D4"/>
-                </a:solidFill>
-                <a:latin typeface="Arial"/>
-              </a:defRPr>
-            </a:pPr>
-            <a:r>
-              <a:t>STOCK MASTER | DBMS SEMESTER PROJECT</a:t>
-            </a:r>
-          </a:p>
-        </p:txBody>
-      </p:sp>
-      <p:sp>
-        <p:nvSpPr>
-          <p:cNvPr id="4" name="TextBox 3"/>
-          <p:cNvSpPr txBox="1"/>
-          <p:nvPr/>
-        </p:nvSpPr>
-        <p:spPr>
-          <a:xfrm>
-            <a:off x="10241280" y="320040"/>
-            <a:ext cx="1188720" cy="320040"/>
-          </a:xfrm>
-          <a:prstGeom prst="rect">
-            <a:avLst/>
-          </a:prstGeom>
-          <a:noFill/>
-        </p:spPr>
-        <p:txBody>
-          <a:bodyPr wrap="none">
-            <a:spAutoFit/>
-          </a:bodyPr>
-          <a:lstStyle/>
-          <a:p>
-            <a:pPr algn="r">
-              <a:defRPr sz="1000" b="1">
-                <a:solidFill>
-                  <a:srgbClr val="6E82A0"/>
-                </a:solidFill>
-                <a:latin typeface="Arial"/>
-              </a:defRPr>
-            </a:pPr>
-            <a:r>
-              <a:t>14 / 18</a:t>
-            </a:r>
-          </a:p>
-        </p:txBody>
-      </p:sp>
-      <p:sp>
-        <p:nvSpPr>
-          <p:cNvPr id="5" name="TextBox 4"/>
-          <p:cNvSpPr txBox="1"/>
-          <p:nvPr/>
-        </p:nvSpPr>
-        <p:spPr>
-          <a:xfrm>
-            <a:off x="731520" y="594360"/>
-            <a:ext cx="10515600" cy="548640"/>
-          </a:xfrm>
-          <a:prstGeom prst="rect">
-            <a:avLst/>
-          </a:prstGeom>
-          <a:noFill/>
-        </p:spPr>
-        <p:txBody>
-          <a:bodyPr wrap="square">
-            <a:spAutoFit/>
-          </a:bodyPr>
-          <a:lstStyle/>
-          <a:p>
-            <a:pPr>
-              <a:defRPr sz="2100" b="1">
-                <a:solidFill>
-                  <a:srgbClr val="F8FAFC"/>
-                </a:solidFill>
-                <a:latin typeface="Arial"/>
-              </a:defRPr>
-            </a:pPr>
-            <a:r>
-              <a:t>Database Operations &amp; Advanced SQL Triggers</a:t>
-            </a:r>
-          </a:p>
-        </p:txBody>
-      </p:sp>
-      <p:sp>
-        <p:nvSpPr>
-          <p:cNvPr id="6" name="TextBox 5"/>
-          <p:cNvSpPr txBox="1"/>
-          <p:nvPr/>
-        </p:nvSpPr>
-        <p:spPr>
-          <a:xfrm>
-            <a:off x="731520" y="1115568"/>
-            <a:ext cx="10515600" cy="320040"/>
-          </a:xfrm>
-          <a:prstGeom prst="rect">
-            <a:avLst/>
-          </a:prstGeom>
-          <a:noFill/>
-        </p:spPr>
-        <p:txBody>
-          <a:bodyPr wrap="square">
-            <a:spAutoFit/>
-          </a:bodyPr>
-          <a:lstStyle/>
-          <a:p>
-            <a:pPr>
-              <a:defRPr sz="1100">
-                <a:solidFill>
-                  <a:srgbClr val="A0AFC8"/>
-                </a:solidFill>
-                <a:latin typeface="Calibri"/>
-              </a:defRPr>
-            </a:pPr>
-            <a:r>
-              <a:t>Concrete SQL operations powering transaction handling and automated inventory updates</a:t>
-            </a:r>
-          </a:p>
-        </p:txBody>
-      </p:sp>
-      <p:sp>
-        <p:nvSpPr>
-          <p:cNvPr id="7" name="Rounded Rectangle 6"/>
-          <p:cNvSpPr/>
-          <p:nvPr/>
-        </p:nvSpPr>
-        <p:spPr>
-          <a:xfrm>
-            <a:off x="731520" y="1508760"/>
-            <a:ext cx="5212080" cy="4846320"/>
-          </a:xfrm>
-          <a:prstGeom prst="roundRect">
-            <a:avLst/>
-          </a:prstGeom>
-          <a:solidFill>
-            <a:srgbClr val="141C30"/>
-          </a:solidFill>
-          <a:ln w="12700">
-            <a:solidFill>
-              <a:srgbClr val="2D3C5A"/>
-            </a:solidFill>
-          </a:ln>
-        </p:spPr>
-        <p:style>
-          <a:lnRef idx="1">
-            <a:schemeClr val="accent1"/>
-          </a:lnRef>
-          <a:fillRef idx="3">
-            <a:schemeClr val="accent1"/>
-          </a:fillRef>
-          <a:effectRef idx="2">
-            <a:schemeClr val="accent1"/>
-          </a:effectRef>
-          <a:fontRef idx="minor">
-            <a:schemeClr val="lt1"/>
-          </a:fontRef>
-        </p:style>
-        <p:txBody>
-          <a:bodyPr rtlCol="0" anchor="ctr"/>
-          <a:lstStyle/>
-          <a:p>
-            <a:pPr algn="ctr"/>
-          </a:p>
-        </p:txBody>
-      </p:sp>
-      <p:sp>
-        <p:nvSpPr>
-          <p:cNvPr id="8" name="TextBox 7"/>
-          <p:cNvSpPr txBox="1"/>
-          <p:nvPr/>
-        </p:nvSpPr>
-        <p:spPr>
-          <a:xfrm>
-            <a:off x="914400" y="1618488"/>
-            <a:ext cx="4846320" cy="320040"/>
-          </a:xfrm>
-          <a:prstGeom prst="rect">
-            <a:avLst/>
-          </a:prstGeom>
-          <a:noFill/>
-        </p:spPr>
-        <p:txBody>
-          <a:bodyPr wrap="none">
-            <a:spAutoFit/>
-          </a:bodyPr>
-          <a:lstStyle/>
-          <a:p>
-            <a:pPr>
-              <a:defRPr sz="1200" b="1">
-                <a:solidFill>
-                  <a:srgbClr val="06B6D4"/>
-                </a:solidFill>
-                <a:latin typeface="Arial"/>
-              </a:defRPr>
-            </a:pPr>
-            <a:r>
-              <a:t>TRIGGER A: AUTOMATIC STOCK DEDUCTION</a:t>
-            </a:r>
-          </a:p>
-        </p:txBody>
-      </p:sp>
-      <p:sp>
-        <p:nvSpPr>
-          <p:cNvPr id="9" name="TextBox 8"/>
-          <p:cNvSpPr txBox="1"/>
-          <p:nvPr/>
-        </p:nvSpPr>
-        <p:spPr>
-          <a:xfrm>
-            <a:off x="914400" y="1965960"/>
-            <a:ext cx="4846320" cy="4206240"/>
-          </a:xfrm>
-          <a:prstGeom prst="rect">
-            <a:avLst/>
-          </a:prstGeom>
-          <a:noFill/>
-        </p:spPr>
-        <p:txBody>
-          <a:bodyPr wrap="square">
-            <a:spAutoFit/>
-          </a:bodyPr>
-          <a:lstStyle/>
-          <a:p>
-            <a:pPr>
-              <a:defRPr sz="1000">
-                <a:solidFill>
-                  <a:srgbClr val="A0AFC8"/>
-                </a:solidFill>
-              </a:defRPr>
-            </a:pPr>
-            <a:r>
-              <a:t>Executes after customer sale line item insertion:</a:t>
-            </a:r>
-          </a:p>
-          <a:p>
-            <a:pPr>
-              <a:spcBef>
-                <a:spcPts val="600"/>
-              </a:spcBef>
-              <a:defRPr sz="950">
-                <a:solidFill>
-                  <a:srgbClr val="06B6D4"/>
-                </a:solidFill>
-                <a:latin typeface="Consolas"/>
-              </a:defRPr>
-            </a:pPr>
-            <a:r>
-              <a:t>CREATE TRIGGER after_so_item_insert</a:t>
-            </a:r>
-            <a:br/>
-            <a:r>
-              <a:t>AFTER INSERT ON sales_order_items</a:t>
-            </a:r>
-            <a:br/>
-            <a:r>
-              <a:t>BEGIN</a:t>
-            </a:r>
-            <a:br/>
-            <a:r>
-              <a:t>    UPDATE inventory </a:t>
-            </a:r>
-            <a:br/>
-            <a:r>
-              <a:t>    SET Quantity = Quantity - NEW.Quantity </a:t>
-            </a:r>
-            <a:br/>
-            <a:r>
-              <a:t>    WHERE ProductID = NEW.ProductID </a:t>
-            </a:r>
-            <a:br/>
-            <a:r>
-              <a:t>      AND WarehouseID = (</a:t>
-            </a:r>
-            <a:br/>
-            <a:r>
-              <a:t>          SELECT WarehouseID </a:t>
-            </a:r>
-            <a:br/>
-            <a:r>
-              <a:t>          FROM sales_orders </a:t>
-            </a:r>
-            <a:br/>
-            <a:r>
-              <a:t>          WHERE SalesOrderID = NEW.SalesOrderID</a:t>
-            </a:r>
-            <a:br/>
-            <a:r>
-              <a:t>      );</a:t>
-            </a:r>
-            <a:br/>
-            <a:r>
-              <a:t>END;</a:t>
-            </a:r>
-          </a:p>
-          <a:p>
-            <a:pPr>
-              <a:spcBef>
-                <a:spcPts val="800"/>
-              </a:spcBef>
-              <a:defRPr sz="950">
-                <a:solidFill>
-                  <a:srgbClr val="F8FAFC"/>
-                </a:solidFill>
-              </a:defRPr>
-            </a:pPr>
-            <a:r>
-              <a:t>• Correct Warehouse Scoping: Uses subquery on sales_orders to ensure stock is deducted only from the dispatching depot.</a:t>
-            </a:r>
-            <a:br/>
-            <a:r>
-              <a:t>• Non-Negative Safeguard: If Quantity drops below 0, the table CHECK(Quantity &gt;= 0) constraint causes an immediate atomic rollback.</a:t>
-            </a:r>
-          </a:p>
-        </p:txBody>
-      </p:sp>
-      <p:sp>
-        <p:nvSpPr>
-          <p:cNvPr id="10" name="Rounded Rectangle 9"/>
-          <p:cNvSpPr/>
-          <p:nvPr/>
-        </p:nvSpPr>
-        <p:spPr>
-          <a:xfrm>
-            <a:off x="6248095" y="1508760"/>
-            <a:ext cx="5212080" cy="4846320"/>
-          </a:xfrm>
-          <a:prstGeom prst="roundRect">
-            <a:avLst/>
-          </a:prstGeom>
-          <a:solidFill>
-            <a:srgbClr val="141C30"/>
-          </a:solidFill>
-          <a:ln w="12700">
-            <a:solidFill>
-              <a:srgbClr val="2D3C5A"/>
-            </a:solidFill>
-          </a:ln>
-        </p:spPr>
-        <p:style>
-          <a:lnRef idx="1">
-            <a:schemeClr val="accent1"/>
-          </a:lnRef>
-          <a:fillRef idx="3">
-            <a:schemeClr val="accent1"/>
-          </a:fillRef>
-          <a:effectRef idx="2">
-            <a:schemeClr val="accent1"/>
-          </a:effectRef>
-          <a:fontRef idx="minor">
-            <a:schemeClr val="lt1"/>
-          </a:fontRef>
-        </p:style>
-        <p:txBody>
-          <a:bodyPr rtlCol="0" anchor="ctr"/>
-          <a:lstStyle/>
-          <a:p>
-            <a:pPr algn="ctr"/>
-          </a:p>
-        </p:txBody>
-      </p:sp>
-      <p:sp>
-        <p:nvSpPr>
-          <p:cNvPr id="11" name="TextBox 10"/>
-          <p:cNvSpPr txBox="1"/>
-          <p:nvPr/>
-        </p:nvSpPr>
-        <p:spPr>
-          <a:xfrm>
-            <a:off x="6430975" y="1618488"/>
-            <a:ext cx="4846320" cy="320040"/>
-          </a:xfrm>
-          <a:prstGeom prst="rect">
-            <a:avLst/>
-          </a:prstGeom>
-          <a:noFill/>
-        </p:spPr>
-        <p:txBody>
-          <a:bodyPr wrap="none">
-            <a:spAutoFit/>
-          </a:bodyPr>
-          <a:lstStyle/>
-          <a:p>
-            <a:pPr>
-              <a:defRPr sz="1200" b="1">
-                <a:solidFill>
-                  <a:srgbClr val="06B6D4"/>
-                </a:solidFill>
-                <a:latin typeface="Arial"/>
-              </a:defRPr>
-            </a:pPr>
-            <a:r>
-              <a:t>TRIGGER B: AUTOMATED UPSERT REPLENISHMENT</a:t>
-            </a:r>
-          </a:p>
-        </p:txBody>
-      </p:sp>
-      <p:sp>
-        <p:nvSpPr>
-          <p:cNvPr id="12" name="TextBox 11"/>
-          <p:cNvSpPr txBox="1"/>
-          <p:nvPr/>
-        </p:nvSpPr>
-        <p:spPr>
-          <a:xfrm>
-            <a:off x="6430975" y="1965960"/>
-            <a:ext cx="4846320" cy="4206240"/>
-          </a:xfrm>
-          <a:prstGeom prst="rect">
-            <a:avLst/>
-          </a:prstGeom>
-          <a:noFill/>
-        </p:spPr>
-        <p:txBody>
-          <a:bodyPr wrap="square">
-            <a:spAutoFit/>
-          </a:bodyPr>
-          <a:lstStyle/>
-          <a:p>
-            <a:pPr>
-              <a:defRPr sz="1000">
-                <a:solidFill>
-                  <a:srgbClr val="A0AFC8"/>
-                </a:solidFill>
-              </a:defRPr>
-            </a:pPr>
-            <a:r>
-              <a:t>Executes when purchase order status updates to 'Received':</a:t>
-            </a:r>
-          </a:p>
-          <a:p>
-            <a:pPr>
-              <a:spcBef>
-                <a:spcPts val="600"/>
-              </a:spcBef>
-              <a:defRPr sz="900">
-                <a:solidFill>
-                  <a:srgbClr val="10B981"/>
-                </a:solidFill>
-                <a:latin typeface="Consolas"/>
-              </a:defRPr>
-            </a:pPr>
-            <a:r>
-              <a:t>CREATE TRIGGER after_po_receive</a:t>
-            </a:r>
-            <a:br/>
-            <a:r>
-              <a:t>AFTER UPDATE OF Status ON purchase_orders</a:t>
-            </a:r>
-            <a:br/>
-            <a:r>
-              <a:t>FOR EACH ROW WHEN NEW.Status = 'Received' </a:t>
-            </a:r>
-            <a:br/>
-            <a:r>
-              <a:t>              AND OLD.Status = 'Pending'</a:t>
-            </a:r>
-            <a:br/>
-            <a:r>
-              <a:t>BEGIN</a:t>
-            </a:r>
-            <a:br/>
-            <a:r>
-              <a:t>    INSERT INTO inventory (</a:t>
-            </a:r>
-            <a:br/>
-            <a:r>
-              <a:t>        WarehouseID, ProductID, Quantity, MinimumStock</a:t>
-            </a:r>
-            <a:br/>
-            <a:r>
-              <a:t>    )</a:t>
-            </a:r>
-            <a:br/>
-            <a:r>
-              <a:t>    SELECT NEW.WarehouseID, poi.ProductID, poi.Quantity, 10</a:t>
-            </a:r>
-            <a:br/>
-            <a:r>
-              <a:t>    FROM purchase_order_items poi</a:t>
-            </a:r>
-            <a:br/>
-            <a:r>
-              <a:t>    WHERE poi.PurchaseOrderID = NEW.PurchaseOrderID</a:t>
-            </a:r>
-            <a:br/>
-            <a:r>
-              <a:t>    ON CONFLICT(WarehouseID, ProductID) DO UPDATE SET</a:t>
-            </a:r>
-            <a:br/>
-            <a:r>
-              <a:t>        Quantity = Quantity + excluded.Quantity;</a:t>
-            </a:r>
-            <a:br/>
-            <a:r>
-              <a:t>END;</a:t>
-            </a:r>
-          </a:p>
-          <a:p>
-            <a:pPr>
-              <a:spcBef>
-                <a:spcPts val="600"/>
-              </a:spcBef>
-              <a:defRPr sz="950">
-                <a:solidFill>
-                  <a:srgbClr val="F8FAFC"/>
-                </a:solidFill>
-              </a:defRPr>
-            </a:pPr>
-            <a:r>
-              <a:t>• Atomic Restocking: Updates multiple items from line items table in one query.</a:t>
-            </a:r>
-            <a:br/>
-            <a:r>
-              <a:t>• UPSERT Logic: Uses SQLite ON CONFLICT DO UPDATE to insert new inventory slots or increment existing stock counts.</a:t>
-            </a:r>
-          </a:p>
-        </p:txBody>
-      </p:sp>
-    </p:spTree>
-  </p:cSld>
-  <p:clrMapOvr>
-    <a:masterClrMapping/>
-  </p:clrMapOvr>
-</p:sld>
-</file>
-
 <file path=ppt/slides/slide17.xml><?xml version="1.0" encoding="utf-8"?>
 <p:sld xmlns:a="http://schemas.openxmlformats.org/drawingml/2006/main" xmlns:p="http://schemas.openxmlformats.org/presentationml/2006/main" xmlns:r="http://schemas.openxmlformats.org/officeDocument/2006/relationships">
   <p:cSld>
@@ -8862,7 +8963,7 @@
               </a:defRPr>
             </a:pPr>
             <a:r>
-              <a:t>15 / 18</a:t>
+              <a:t>14 / 18</a:t>
             </a:r>
           </a:p>
         </p:txBody>
@@ -8898,7 +8999,7 @@
               </a:defRPr>
             </a:pPr>
             <a:r>
-              <a:t>Work Completed &amp; Deliverables (Review 1 &amp; Review 2)</a:t>
+              <a:t>Database Operations &amp; Advanced SQL Triggers</a:t>
             </a:r>
           </a:p>
         </p:txBody>
@@ -8934,7 +9035,7 @@
               </a:defRPr>
             </a:pPr>
             <a:r>
-              <a:t>Evolution of StockMaster across course milestone reviews</a:t>
+              <a:t>Concrete SQL operations powering transaction handling and automated inventory updates</a:t>
             </a:r>
           </a:p>
         </p:txBody>
@@ -8947,8 +9048,8 @@
         </p:nvSpPr>
         <p:spPr>
           <a:xfrm>
-            <a:off x="731520" y="1645920"/>
-            <a:ext cx="5212080" cy="2194560"/>
+            <a:off x="731520" y="1508760"/>
+            <a:ext cx="5212080" cy="4846320"/>
           </a:xfrm>
           <a:prstGeom prst="roundRect">
             <a:avLst/>
@@ -8992,8 +9093,44 @@
         </p:nvSpPr>
         <p:spPr>
           <a:xfrm>
-            <a:off x="914400" y="1783080"/>
-            <a:ext cx="4846320" cy="1920240"/>
+            <a:off x="914400" y="1618488"/>
+            <a:ext cx="4846320" cy="320040"/>
+          </a:xfrm>
+          <a:prstGeom prst="rect">
+            <a:avLst/>
+          </a:prstGeom>
+          <a:noFill/>
+        </p:spPr>
+        <p:txBody>
+          <a:bodyPr wrap="none">
+            <a:spAutoFit/>
+          </a:bodyPr>
+          <a:lstStyle/>
+          <a:p>
+            <a:pPr>
+              <a:defRPr sz="1200" b="1">
+                <a:solidFill>
+                  <a:srgbClr val="06B6D4"/>
+                </a:solidFill>
+                <a:latin typeface="Arial"/>
+              </a:defRPr>
+            </a:pPr>
+            <a:r>
+              <a:t>TRIGGER A: AUTOMATIC STOCK DEDUCTION</a:t>
+            </a:r>
+          </a:p>
+        </p:txBody>
+      </p:sp>
+      <p:sp>
+        <p:nvSpPr>
+          <p:cNvPr id="9" name="TextBox 8"/>
+          <p:cNvSpPr txBox="1"/>
+          <p:nvPr/>
+        </p:nvSpPr>
+        <p:spPr>
+          <a:xfrm>
+            <a:off x="914400" y="1965960"/>
+            <a:ext cx="4846320" cy="4206240"/>
           </a:xfrm>
           <a:prstGeom prst="rect">
             <a:avLst/>
@@ -9007,93 +9144,107 @@
           <a:lstStyle/>
           <a:p>
             <a:pPr>
-              <a:defRPr sz="1200" b="1">
+              <a:defRPr sz="1000">
+                <a:solidFill>
+                  <a:srgbClr val="A0AFC8"/>
+                </a:solidFill>
+              </a:defRPr>
+            </a:pPr>
+            <a:r>
+              <a:t>Executes after customer sale line item insertion:</a:t>
+            </a:r>
+          </a:p>
+          <a:p>
+            <a:pPr>
+              <a:spcBef>
+                <a:spcPts val="600"/>
+              </a:spcBef>
+              <a:defRPr sz="950">
                 <a:solidFill>
                   <a:srgbClr val="06B6D4"/>
                 </a:solidFill>
-                <a:latin typeface="Arial"/>
-              </a:defRPr>
-            </a:pPr>
-            <a:r>
-              <a:t>01 — DATABASE ARCHITECTURE (Review 1)</a:t>
+                <a:latin typeface="Consolas"/>
+              </a:defRPr>
+            </a:pPr>
+            <a:r>
+              <a:t>CREATE TRIGGER after_so_item_insert</a:t>
+            </a:r>
+            <a:br/>
+            <a:r>
+              <a:t>AFTER INSERT ON sales_order_items</a:t>
+            </a:r>
+            <a:br/>
+            <a:r>
+              <a:t>BEGIN</a:t>
+            </a:r>
+            <a:br/>
+            <a:r>
+              <a:t>    UPDATE inventory </a:t>
+            </a:r>
+            <a:br/>
+            <a:r>
+              <a:t>    SET Quantity = Quantity - NEW.Quantity </a:t>
+            </a:r>
+            <a:br/>
+            <a:r>
+              <a:t>    WHERE ProductID = NEW.ProductID </a:t>
+            </a:r>
+            <a:br/>
+            <a:r>
+              <a:t>      AND WarehouseID = (</a:t>
+            </a:r>
+            <a:br/>
+            <a:r>
+              <a:t>          SELECT WarehouseID </a:t>
+            </a:r>
+            <a:br/>
+            <a:r>
+              <a:t>          FROM sales_orders </a:t>
+            </a:r>
+            <a:br/>
+            <a:r>
+              <a:t>          WHERE SalesOrderID = NEW.SalesOrderID</a:t>
+            </a:r>
+            <a:br/>
+            <a:r>
+              <a:t>      );</a:t>
+            </a:r>
+            <a:br/>
+            <a:r>
+              <a:t>END;</a:t>
             </a:r>
           </a:p>
           <a:p>
             <a:pPr>
               <a:spcBef>
-                <a:spcPts val="300"/>
+                <a:spcPts val="800"/>
               </a:spcBef>
-              <a:defRPr sz="1000">
+              <a:defRPr sz="950">
                 <a:solidFill>
                   <a:srgbClr val="F8FAFC"/>
                 </a:solidFill>
-                <a:latin typeface="Calibri"/>
-              </a:defRPr>
-            </a:pPr>
-            <a:r>
-              <a:t>• 11 fully normalized tables implementing BCNF/3NF specifications.</a:t>
-            </a:r>
-          </a:p>
-          <a:p>
-            <a:pPr>
-              <a:spcBef>
-                <a:spcPts val="300"/>
-              </a:spcBef>
-              <a:defRPr sz="1000">
-                <a:solidFill>
-                  <a:srgbClr val="F8FAFC"/>
-                </a:solidFill>
-                <a:latin typeface="Calibri"/>
-              </a:defRPr>
-            </a:pPr>
-            <a:r>
-              <a:t>• Complete data population: 25 interconnected records per table (625 inventory records).</a:t>
-            </a:r>
-          </a:p>
-          <a:p>
-            <a:pPr>
-              <a:spcBef>
-                <a:spcPts val="300"/>
-              </a:spcBef>
-              <a:defRPr sz="1000">
-                <a:solidFill>
-                  <a:srgbClr val="F8FAFC"/>
-                </a:solidFill>
-                <a:latin typeface="Calibri"/>
-              </a:defRPr>
-            </a:pPr>
-            <a:r>
-              <a:t>• Active triggers (stock decrement &amp; replenishment) and database views.</a:t>
-            </a:r>
-          </a:p>
-          <a:p>
-            <a:pPr>
-              <a:spcBef>
-                <a:spcPts val="300"/>
-              </a:spcBef>
-              <a:defRPr sz="1000">
-                <a:solidFill>
-                  <a:srgbClr val="F8FAFC"/>
-                </a:solidFill>
-                <a:latin typeface="Calibri"/>
-              </a:defRPr>
-            </a:pPr>
-            <a:r>
-              <a:t>• Foreign key referential integrity with ON DELETE CASCADE rules.</a:t>
-            </a:r>
-          </a:p>
-        </p:txBody>
-      </p:sp>
-      <p:sp>
-        <p:nvSpPr>
-          <p:cNvPr id="9" name="Rounded Rectangle 8"/>
+              </a:defRPr>
+            </a:pPr>
+            <a:r>
+              <a:t>• Correct Warehouse Scoping: Uses subquery on sales_orders to ensure stock is deducted only from the dispatching depot.</a:t>
+            </a:r>
+            <a:br/>
+            <a:r>
+              <a:t>• Non-Negative Safeguard: If Quantity drops below 0, the table CHECK(Quantity &gt;= 0) constraint causes an immediate atomic rollback.</a:t>
+            </a:r>
+          </a:p>
+        </p:txBody>
+      </p:sp>
+      <p:sp>
+        <p:nvSpPr>
+          <p:cNvPr id="10" name="Rounded Rectangle 9"/>
           <p:cNvSpPr/>
           <p:nvPr/>
         </p:nvSpPr>
         <p:spPr>
           <a:xfrm>
-            <a:off x="6248095" y="1645920"/>
-            <a:ext cx="5212080" cy="2194560"/>
+            <a:off x="6248095" y="1508760"/>
+            <a:ext cx="5212080" cy="4846320"/>
           </a:xfrm>
           <a:prstGeom prst="roundRect">
             <a:avLst/>
@@ -9131,14 +9282,50 @@
       </p:sp>
       <p:sp>
         <p:nvSpPr>
-          <p:cNvPr id="10" name="TextBox 9"/>
+          <p:cNvPr id="11" name="TextBox 10"/>
           <p:cNvSpPr txBox="1"/>
           <p:nvPr/>
         </p:nvSpPr>
         <p:spPr>
           <a:xfrm>
-            <a:off x="6430975" y="1783080"/>
-            <a:ext cx="4846320" cy="1920240"/>
+            <a:off x="6430975" y="1618488"/>
+            <a:ext cx="4846320" cy="320040"/>
+          </a:xfrm>
+          <a:prstGeom prst="rect">
+            <a:avLst/>
+          </a:prstGeom>
+          <a:noFill/>
+        </p:spPr>
+        <p:txBody>
+          <a:bodyPr wrap="none">
+            <a:spAutoFit/>
+          </a:bodyPr>
+          <a:lstStyle/>
+          <a:p>
+            <a:pPr>
+              <a:defRPr sz="1200" b="1">
+                <a:solidFill>
+                  <a:srgbClr val="06B6D4"/>
+                </a:solidFill>
+                <a:latin typeface="Arial"/>
+              </a:defRPr>
+            </a:pPr>
+            <a:r>
+              <a:t>TRIGGER B: AUTOMATED UPSERT REPLENISHMENT</a:t>
+            </a:r>
+          </a:p>
+        </p:txBody>
+      </p:sp>
+      <p:sp>
+        <p:nvSpPr>
+          <p:cNvPr id="12" name="TextBox 11"/>
+          <p:cNvSpPr txBox="1"/>
+          <p:nvPr/>
+        </p:nvSpPr>
+        <p:spPr>
+          <a:xfrm>
+            <a:off x="6430975" y="1965960"/>
+            <a:ext cx="4846320" cy="4206240"/>
           </a:xfrm>
           <a:prstGeom prst="rect">
             <a:avLst/>
@@ -9152,369 +9339,101 @@
           <a:lstStyle/>
           <a:p>
             <a:pPr>
-              <a:defRPr sz="1200" b="1">
+              <a:defRPr sz="1000">
+                <a:solidFill>
+                  <a:srgbClr val="A0AFC8"/>
+                </a:solidFill>
+              </a:defRPr>
+            </a:pPr>
+            <a:r>
+              <a:t>Executes when purchase order status updates to 'Received':</a:t>
+            </a:r>
+          </a:p>
+          <a:p>
+            <a:pPr>
+              <a:spcBef>
+                <a:spcPts val="600"/>
+              </a:spcBef>
+              <a:defRPr sz="900">
                 <a:solidFill>
                   <a:srgbClr val="10B981"/>
                 </a:solidFill>
-                <a:latin typeface="Arial"/>
-              </a:defRPr>
-            </a:pPr>
-            <a:r>
-              <a:t>02 — FULL-STACK WEB PLATFORM (Review 1)</a:t>
+                <a:latin typeface="Consolas"/>
+              </a:defRPr>
+            </a:pPr>
+            <a:r>
+              <a:t>CREATE TRIGGER after_po_receive</a:t>
+            </a:r>
+            <a:br/>
+            <a:r>
+              <a:t>AFTER UPDATE OF Status ON purchase_orders</a:t>
+            </a:r>
+            <a:br/>
+            <a:r>
+              <a:t>FOR EACH ROW WHEN NEW.Status = 'Received' </a:t>
+            </a:r>
+            <a:br/>
+            <a:r>
+              <a:t>              AND OLD.Status = 'Pending'</a:t>
+            </a:r>
+            <a:br/>
+            <a:r>
+              <a:t>BEGIN</a:t>
+            </a:r>
+            <a:br/>
+            <a:r>
+              <a:t>    INSERT INTO inventory (</a:t>
+            </a:r>
+            <a:br/>
+            <a:r>
+              <a:t>        WarehouseID, ProductID, Quantity, MinimumStock</a:t>
+            </a:r>
+            <a:br/>
+            <a:r>
+              <a:t>    )</a:t>
+            </a:r>
+            <a:br/>
+            <a:r>
+              <a:t>    SELECT NEW.WarehouseID, poi.ProductID, poi.Quantity, 10</a:t>
+            </a:r>
+            <a:br/>
+            <a:r>
+              <a:t>    FROM purchase_order_items poi</a:t>
+            </a:r>
+            <a:br/>
+            <a:r>
+              <a:t>    WHERE poi.PurchaseOrderID = NEW.PurchaseOrderID</a:t>
+            </a:r>
+            <a:br/>
+            <a:r>
+              <a:t>    ON CONFLICT(WarehouseID, ProductID) DO UPDATE SET</a:t>
+            </a:r>
+            <a:br/>
+            <a:r>
+              <a:t>        Quantity = Quantity + excluded.Quantity;</a:t>
+            </a:r>
+            <a:br/>
+            <a:r>
+              <a:t>END;</a:t>
             </a:r>
           </a:p>
           <a:p>
             <a:pPr>
               <a:spcBef>
-                <a:spcPts val="300"/>
+                <a:spcPts val="600"/>
               </a:spcBef>
-              <a:defRPr sz="1000">
+              <a:defRPr sz="950">
                 <a:solidFill>
                   <a:srgbClr val="F8FAFC"/>
                 </a:solidFill>
-                <a:latin typeface="Calibri"/>
-              </a:defRPr>
-            </a:pPr>
-            <a:r>
-              <a:t>• Responsive Glassmorphic Dark UI powered by Python Flask REST APIs.</a:t>
-            </a:r>
-          </a:p>
-          <a:p>
-            <a:pPr>
-              <a:spcBef>
-                <a:spcPts val="300"/>
-              </a:spcBef>
-              <a:defRPr sz="1000">
-                <a:solidFill>
-                  <a:srgbClr val="F8FAFC"/>
-                </a:solidFill>
-                <a:latin typeface="Calibri"/>
-              </a:defRPr>
-            </a:pPr>
-            <a:r>
-              <a:t>• Dynamic SVG warehouse storage capacity occupancy visualizations.</a:t>
-            </a:r>
-          </a:p>
-          <a:p>
-            <a:pPr>
-              <a:spcBef>
-                <a:spcPts val="300"/>
-              </a:spcBef>
-              <a:defRPr sz="1000">
-                <a:solidFill>
-                  <a:srgbClr val="F8FAFC"/>
-                </a:solidFill>
-                <a:latin typeface="Calibri"/>
-              </a:defRPr>
-            </a:pPr>
-            <a:r>
-              <a:t>• Complete modal workflows for adding products, suppliers, POs, and sales dispatches.</a:t>
-            </a:r>
-          </a:p>
-          <a:p>
-            <a:pPr>
-              <a:spcBef>
-                <a:spcPts val="300"/>
-              </a:spcBef>
-              <a:defRPr sz="1000">
-                <a:solidFill>
-                  <a:srgbClr val="F8FAFC"/>
-                </a:solidFill>
-                <a:latin typeface="Calibri"/>
-              </a:defRPr>
-            </a:pPr>
-            <a:r>
-              <a:t>• Real-time operational dashboard with financial summaries and event logs.</a:t>
-            </a:r>
-          </a:p>
-        </p:txBody>
-      </p:sp>
-      <p:sp>
-        <p:nvSpPr>
-          <p:cNvPr id="11" name="Rounded Rectangle 10"/>
-          <p:cNvSpPr/>
-          <p:nvPr/>
-        </p:nvSpPr>
-        <p:spPr>
-          <a:xfrm>
-            <a:off x="731520" y="4160520"/>
-            <a:ext cx="5212080" cy="2194560"/>
-          </a:xfrm>
-          <a:prstGeom prst="roundRect">
-            <a:avLst/>
-          </a:prstGeom>
-          <a:solidFill>
-            <a:srgbClr val="141C30"/>
-          </a:solidFill>
-          <a:ln w="12700">
-            <a:solidFill>
-              <a:srgbClr val="2D3C5A"/>
-            </a:solidFill>
-          </a:ln>
-        </p:spPr>
-        <p:style>
-          <a:lnRef idx="1">
-            <a:schemeClr val="accent1"/>
-          </a:lnRef>
-          <a:fillRef idx="3">
-            <a:schemeClr val="accent1"/>
-          </a:fillRef>
-          <a:effectRef idx="2">
-            <a:schemeClr val="accent1"/>
-          </a:effectRef>
-          <a:fontRef idx="minor">
-            <a:schemeClr val="lt1"/>
-          </a:fontRef>
-        </p:style>
-        <p:txBody>
-          <a:bodyPr rtlCol="0" anchor="ctr"/>
-          <a:lstStyle/>
-          <a:p>
-            <a:pPr algn="ctr"/>
-          </a:p>
-        </p:txBody>
-      </p:sp>
-      <p:sp>
-        <p:nvSpPr>
-          <p:cNvPr id="12" name="TextBox 11"/>
-          <p:cNvSpPr txBox="1"/>
-          <p:nvPr/>
-        </p:nvSpPr>
-        <p:spPr>
-          <a:xfrm>
-            <a:off x="914400" y="4297680"/>
-            <a:ext cx="4846320" cy="1920240"/>
-          </a:xfrm>
-          <a:prstGeom prst="rect">
-            <a:avLst/>
-          </a:prstGeom>
-          <a:noFill/>
-        </p:spPr>
-        <p:txBody>
-          <a:bodyPr wrap="square">
-            <a:spAutoFit/>
-          </a:bodyPr>
-          <a:lstStyle/>
-          <a:p>
-            <a:pPr>
-              <a:defRPr sz="1200" b="1">
-                <a:solidFill>
-                  <a:srgbClr val="F59E0B"/>
-                </a:solidFill>
-                <a:latin typeface="Arial"/>
-              </a:defRPr>
-            </a:pPr>
-            <a:r>
-              <a:t>03 — ROLE-BASED ACCESS CONTROL (Review 2)</a:t>
-            </a:r>
-          </a:p>
-          <a:p>
-            <a:pPr>
-              <a:spcBef>
-                <a:spcPts val="300"/>
-              </a:spcBef>
-              <a:defRPr sz="1000">
-                <a:solidFill>
-                  <a:srgbClr val="F8FAFC"/>
-                </a:solidFill>
-                <a:latin typeface="Calibri"/>
-              </a:defRPr>
-            </a:pPr>
-            <a:r>
-              <a:t>• Session-based user authentication with live user profile in sidebar.</a:t>
-            </a:r>
-          </a:p>
-          <a:p>
-            <a:pPr>
-              <a:spcBef>
-                <a:spcPts val="300"/>
-              </a:spcBef>
-              <a:defRPr sz="1000">
-                <a:solidFill>
-                  <a:srgbClr val="F8FAFC"/>
-                </a:solidFill>
-                <a:latin typeface="Calibri"/>
-              </a:defRPr>
-            </a:pPr>
-            <a:r>
-              <a:t>• 1-Click live role switcher between System Admin and Warehouse Staff.</a:t>
-            </a:r>
-          </a:p>
-          <a:p>
-            <a:pPr>
-              <a:spcBef>
-                <a:spcPts val="300"/>
-              </a:spcBef>
-              <a:defRPr sz="1000">
-                <a:solidFill>
-                  <a:srgbClr val="F8FAFC"/>
-                </a:solidFill>
-                <a:latin typeface="Calibri"/>
-              </a:defRPr>
-            </a:pPr>
-            <a:r>
-              <a:t>• Dynamic UI enforcement: hides executive financials and locks billing for staff.</a:t>
-            </a:r>
-          </a:p>
-          <a:p>
-            <a:pPr>
-              <a:spcBef>
-                <a:spcPts val="300"/>
-              </a:spcBef>
-              <a:defRPr sz="1000">
-                <a:solidFill>
-                  <a:srgbClr val="F8FAFC"/>
-                </a:solidFill>
-                <a:latin typeface="Calibri"/>
-              </a:defRPr>
-            </a:pPr>
-            <a:r>
-              <a:t>• Administrative button gating (restricts SKU alterations for non-admins).</a:t>
-            </a:r>
-          </a:p>
-        </p:txBody>
-      </p:sp>
-      <p:sp>
-        <p:nvSpPr>
-          <p:cNvPr id="13" name="Rounded Rectangle 12"/>
-          <p:cNvSpPr/>
-          <p:nvPr/>
-        </p:nvSpPr>
-        <p:spPr>
-          <a:xfrm>
-            <a:off x="6248095" y="4160520"/>
-            <a:ext cx="5212080" cy="2194560"/>
-          </a:xfrm>
-          <a:prstGeom prst="roundRect">
-            <a:avLst/>
-          </a:prstGeom>
-          <a:solidFill>
-            <a:srgbClr val="141C30"/>
-          </a:solidFill>
-          <a:ln w="12700">
-            <a:solidFill>
-              <a:srgbClr val="2D3C5A"/>
-            </a:solidFill>
-          </a:ln>
-        </p:spPr>
-        <p:style>
-          <a:lnRef idx="1">
-            <a:schemeClr val="accent1"/>
-          </a:lnRef>
-          <a:fillRef idx="3">
-            <a:schemeClr val="accent1"/>
-          </a:fillRef>
-          <a:effectRef idx="2">
-            <a:schemeClr val="accent1"/>
-          </a:effectRef>
-          <a:fontRef idx="minor">
-            <a:schemeClr val="lt1"/>
-          </a:fontRef>
-        </p:style>
-        <p:txBody>
-          <a:bodyPr rtlCol="0" anchor="ctr"/>
-          <a:lstStyle/>
-          <a:p>
-            <a:pPr algn="ctr"/>
-          </a:p>
-        </p:txBody>
-      </p:sp>
-      <p:sp>
-        <p:nvSpPr>
-          <p:cNvPr id="14" name="TextBox 13"/>
-          <p:cNvSpPr txBox="1"/>
-          <p:nvPr/>
-        </p:nvSpPr>
-        <p:spPr>
-          <a:xfrm>
-            <a:off x="6430975" y="4297680"/>
-            <a:ext cx="4846320" cy="1920240"/>
-          </a:xfrm>
-          <a:prstGeom prst="rect">
-            <a:avLst/>
-          </a:prstGeom>
-          <a:noFill/>
-        </p:spPr>
-        <p:txBody>
-          <a:bodyPr wrap="square">
-            <a:spAutoFit/>
-          </a:bodyPr>
-          <a:lstStyle/>
-          <a:p>
-            <a:pPr>
-              <a:defRPr sz="1200" b="1">
-                <a:solidFill>
-                  <a:srgbClr val="F43F5E"/>
-                </a:solidFill>
-                <a:latin typeface="Arial"/>
-              </a:defRPr>
-            </a:pPr>
-            <a:r>
-              <a:t>04 — FORECASTING &amp; SPREADSHEETS (Review 2)</a:t>
-            </a:r>
-          </a:p>
-          <a:p>
-            <a:pPr>
-              <a:spcBef>
-                <a:spcPts val="300"/>
-              </a:spcBef>
-              <a:defRPr sz="1000">
-                <a:solidFill>
-                  <a:srgbClr val="F8FAFC"/>
-                </a:solidFill>
-                <a:latin typeface="Calibri"/>
-              </a:defRPr>
-            </a:pPr>
-            <a:r>
-              <a:t>• Smart Demand Forecasting Engine calculating sales velocity &amp; stockout days.</a:t>
-            </a:r>
-          </a:p>
-          <a:p>
-            <a:pPr>
-              <a:spcBef>
-                <a:spcPts val="300"/>
-              </a:spcBef>
-              <a:defRPr sz="1000">
-                <a:solidFill>
-                  <a:srgbClr val="F8FAFC"/>
-                </a:solidFill>
-                <a:latin typeface="Calibri"/>
-              </a:defRPr>
-            </a:pPr>
-            <a:r>
-              <a:t>• Multi-tiered risk categorization (🔴 Critical, 🟡 Moderate, 🟢 Safe buffer).</a:t>
-            </a:r>
-          </a:p>
-          <a:p>
-            <a:pPr>
-              <a:spcBef>
-                <a:spcPts val="300"/>
-              </a:spcBef>
-              <a:defRPr sz="1000">
-                <a:solidFill>
-                  <a:srgbClr val="F8FAFC"/>
-                </a:solidFill>
-                <a:latin typeface="Calibri"/>
-              </a:defRPr>
-            </a:pPr>
-            <a:r>
-              <a:t>• 1-Click 'Auto-Draft PO' action pre-filling restock purchase orders.</a:t>
-            </a:r>
-          </a:p>
-          <a:p>
-            <a:pPr>
-              <a:spcBef>
-                <a:spcPts val="300"/>
-              </a:spcBef>
-              <a:defRPr sz="1000">
-                <a:solidFill>
-                  <a:srgbClr val="F8FAFC"/>
-                </a:solidFill>
-                <a:latin typeface="Calibri"/>
-              </a:defRPr>
-            </a:pPr>
-            <a:r>
-              <a:t>• Spreadsheet CSV export buttons across products, inventory, orders, and ledgers.</a:t>
+              </a:defRPr>
+            </a:pPr>
+            <a:r>
+              <a:t>• Atomic Restocking: Updates multiple items from line items table in one query.</a:t>
+            </a:r>
+            <a:br/>
+            <a:r>
+              <a:t>• UPSERT Logic: Uses SQLite ON CONFLICT DO UPDATE to insert new inventory slots or increment existing stock counts.</a:t>
             </a:r>
           </a:p>
         </p:txBody>
@@ -9647,7 +9566,7 @@
               </a:defRPr>
             </a:pPr>
             <a:r>
-              <a:t>16 / 18</a:t>
+              <a:t>15 / 18</a:t>
             </a:r>
           </a:p>
         </p:txBody>
@@ -9683,7 +9602,7 @@
               </a:defRPr>
             </a:pPr>
             <a:r>
-              <a:t>Live Application Showcase &amp; Interface Modules</a:t>
+              <a:t>Work Completed &amp; Deliverables (Review 1 &amp; Review 2)</a:t>
             </a:r>
           </a:p>
         </p:txBody>
@@ -9719,7 +9638,7 @@
               </a:defRPr>
             </a:pPr>
             <a:r>
-              <a:t>Primary system views operational in the web application (http://localhost:5000/)</a:t>
+              <a:t>Evolution of StockMaster across course milestone reviews</a:t>
             </a:r>
           </a:p>
         </p:txBody>
@@ -9777,8 +9696,8 @@
         </p:nvSpPr>
         <p:spPr>
           <a:xfrm>
-            <a:off x="914400" y="1828800"/>
-            <a:ext cx="4846320" cy="1828800"/>
+            <a:off x="914400" y="1783080"/>
+            <a:ext cx="4846320" cy="1920240"/>
           </a:xfrm>
           <a:prstGeom prst="rect">
             <a:avLst/>
@@ -9792,7 +9711,7 @@
           <a:lstStyle/>
           <a:p>
             <a:pPr>
-              <a:defRPr sz="1300" b="1">
+              <a:defRPr sz="1200" b="1">
                 <a:solidFill>
                   <a:srgbClr val="06B6D4"/>
                 </a:solidFill>
@@ -9800,15 +9719,15 @@
               </a:defRPr>
             </a:pPr>
             <a:r>
-              <a:t>1. Central Operations Dashboard</a:t>
+              <a:t>01 — DATABASE ARCHITECTURE (Review 1)</a:t>
             </a:r>
           </a:p>
           <a:p>
             <a:pPr>
               <a:spcBef>
-                <a:spcPts val="800"/>
+                <a:spcPts val="300"/>
               </a:spcBef>
-              <a:defRPr sz="1100">
+              <a:defRPr sz="1000">
                 <a:solidFill>
                   <a:srgbClr val="F8FAFC"/>
                 </a:solidFill>
@@ -9816,7 +9735,55 @@
               </a:defRPr>
             </a:pPr>
             <a:r>
-              <a:t>Features real-time KPI metrics, dynamic SVG warehouse capacity occupancy bars, financial revenue/expense aggregates, and live database union activity logs.</a:t>
+              <a:t>• 11 fully normalized tables implementing BCNF/3NF specifications.</a:t>
+            </a:r>
+          </a:p>
+          <a:p>
+            <a:pPr>
+              <a:spcBef>
+                <a:spcPts val="300"/>
+              </a:spcBef>
+              <a:defRPr sz="1000">
+                <a:solidFill>
+                  <a:srgbClr val="F8FAFC"/>
+                </a:solidFill>
+                <a:latin typeface="Calibri"/>
+              </a:defRPr>
+            </a:pPr>
+            <a:r>
+              <a:t>• Complete data population: 25 interconnected records per table (625 inventory records).</a:t>
+            </a:r>
+          </a:p>
+          <a:p>
+            <a:pPr>
+              <a:spcBef>
+                <a:spcPts val="300"/>
+              </a:spcBef>
+              <a:defRPr sz="1000">
+                <a:solidFill>
+                  <a:srgbClr val="F8FAFC"/>
+                </a:solidFill>
+                <a:latin typeface="Calibri"/>
+              </a:defRPr>
+            </a:pPr>
+            <a:r>
+              <a:t>• Active triggers (stock decrement &amp; replenishment) and database views.</a:t>
+            </a:r>
+          </a:p>
+          <a:p>
+            <a:pPr>
+              <a:spcBef>
+                <a:spcPts val="300"/>
+              </a:spcBef>
+              <a:defRPr sz="1000">
+                <a:solidFill>
+                  <a:srgbClr val="F8FAFC"/>
+                </a:solidFill>
+                <a:latin typeface="Calibri"/>
+              </a:defRPr>
+            </a:pPr>
+            <a:r>
+              <a:t>• Foreign key referential integrity with ON DELETE CASCADE rules.</a:t>
             </a:r>
           </a:p>
         </p:txBody>
@@ -9874,8 +9841,8 @@
         </p:nvSpPr>
         <p:spPr>
           <a:xfrm>
-            <a:off x="6430975" y="1828800"/>
-            <a:ext cx="4846320" cy="1828800"/>
+            <a:off x="6430975" y="1783080"/>
+            <a:ext cx="4846320" cy="1920240"/>
           </a:xfrm>
           <a:prstGeom prst="rect">
             <a:avLst/>
@@ -9889,7 +9856,7 @@
           <a:lstStyle/>
           <a:p>
             <a:pPr>
-              <a:defRPr sz="1300" b="1">
+              <a:defRPr sz="1200" b="1">
                 <a:solidFill>
                   <a:srgbClr val="10B981"/>
                 </a:solidFill>
@@ -9897,15 +9864,15 @@
               </a:defRPr>
             </a:pPr>
             <a:r>
-              <a:t>2. Real-Time Inventory Stock Table</a:t>
+              <a:t>02 — FULL-STACK WEB PLATFORM (Review 1)</a:t>
             </a:r>
           </a:p>
           <a:p>
             <a:pPr>
               <a:spcBef>
-                <a:spcPts val="800"/>
+                <a:spcPts val="300"/>
               </a:spcBef>
-              <a:defRPr sz="1100">
+              <a:defRPr sz="1000">
                 <a:solidFill>
                   <a:srgbClr val="F8FAFC"/>
                 </a:solidFill>
@@ -9913,7 +9880,55 @@
               </a:defRPr>
             </a:pPr>
             <a:r>
-              <a:t>Displays product stocks across warehouses with pulsing low-stock status badges, warehouse dropdown filters, and a dedicated 'Verify Stock' alert filter.</a:t>
+              <a:t>• Responsive Glassmorphic Dark UI powered by Python Flask REST APIs.</a:t>
+            </a:r>
+          </a:p>
+          <a:p>
+            <a:pPr>
+              <a:spcBef>
+                <a:spcPts val="300"/>
+              </a:spcBef>
+              <a:defRPr sz="1000">
+                <a:solidFill>
+                  <a:srgbClr val="F8FAFC"/>
+                </a:solidFill>
+                <a:latin typeface="Calibri"/>
+              </a:defRPr>
+            </a:pPr>
+            <a:r>
+              <a:t>• Dynamic SVG warehouse storage capacity occupancy visualizations.</a:t>
+            </a:r>
+          </a:p>
+          <a:p>
+            <a:pPr>
+              <a:spcBef>
+                <a:spcPts val="300"/>
+              </a:spcBef>
+              <a:defRPr sz="1000">
+                <a:solidFill>
+                  <a:srgbClr val="F8FAFC"/>
+                </a:solidFill>
+                <a:latin typeface="Calibri"/>
+              </a:defRPr>
+            </a:pPr>
+            <a:r>
+              <a:t>• Complete modal workflows for adding products, suppliers, POs, and sales dispatches.</a:t>
+            </a:r>
+          </a:p>
+          <a:p>
+            <a:pPr>
+              <a:spcBef>
+                <a:spcPts val="300"/>
+              </a:spcBef>
+              <a:defRPr sz="1000">
+                <a:solidFill>
+                  <a:srgbClr val="F8FAFC"/>
+                </a:solidFill>
+                <a:latin typeface="Calibri"/>
+              </a:defRPr>
+            </a:pPr>
+            <a:r>
+              <a:t>• Real-time operational dashboard with financial summaries and event logs.</a:t>
             </a:r>
           </a:p>
         </p:txBody>
@@ -9971,8 +9986,8 @@
         </p:nvSpPr>
         <p:spPr>
           <a:xfrm>
-            <a:off x="914400" y="4343400"/>
-            <a:ext cx="4846320" cy="1828800"/>
+            <a:off x="914400" y="4297680"/>
+            <a:ext cx="4846320" cy="1920240"/>
           </a:xfrm>
           <a:prstGeom prst="rect">
             <a:avLst/>
@@ -9986,7 +10001,7 @@
           <a:lstStyle/>
           <a:p>
             <a:pPr>
-              <a:defRPr sz="1300" b="1">
+              <a:defRPr sz="1200" b="1">
                 <a:solidFill>
                   <a:srgbClr val="F59E0B"/>
                 </a:solidFill>
@@ -9994,15 +10009,15 @@
               </a:defRPr>
             </a:pPr>
             <a:r>
-              <a:t>3. Orders, Logistics &amp; Billing Ledger</a:t>
+              <a:t>03 — ROLE-BASED ACCESS CONTROL (Review 2)</a:t>
             </a:r>
           </a:p>
           <a:p>
             <a:pPr>
               <a:spcBef>
-                <a:spcPts val="800"/>
+                <a:spcPts val="300"/>
               </a:spcBef>
-              <a:defRPr sz="1100">
+              <a:defRPr sz="1000">
                 <a:solidFill>
                   <a:srgbClr val="F8FAFC"/>
                 </a:solidFill>
@@ -10010,7 +10025,55 @@
               </a:defRPr>
             </a:pPr>
             <a:r>
-              <a:t>Multi-tab transaction hub managing Supply POs (with 'Mark Received' action), Customer Sales Orders, Carrier Shipment progression, and Billing invoice ledgers.</a:t>
+              <a:t>• Session-based user authentication with live user profile in sidebar.</a:t>
+            </a:r>
+          </a:p>
+          <a:p>
+            <a:pPr>
+              <a:spcBef>
+                <a:spcPts val="300"/>
+              </a:spcBef>
+              <a:defRPr sz="1000">
+                <a:solidFill>
+                  <a:srgbClr val="F8FAFC"/>
+                </a:solidFill>
+                <a:latin typeface="Calibri"/>
+              </a:defRPr>
+            </a:pPr>
+            <a:r>
+              <a:t>• 1-Click live role switcher between System Admin and Warehouse Staff.</a:t>
+            </a:r>
+          </a:p>
+          <a:p>
+            <a:pPr>
+              <a:spcBef>
+                <a:spcPts val="300"/>
+              </a:spcBef>
+              <a:defRPr sz="1000">
+                <a:solidFill>
+                  <a:srgbClr val="F8FAFC"/>
+                </a:solidFill>
+                <a:latin typeface="Calibri"/>
+              </a:defRPr>
+            </a:pPr>
+            <a:r>
+              <a:t>• Dynamic UI enforcement: hides executive financials and locks billing for staff.</a:t>
+            </a:r>
+          </a:p>
+          <a:p>
+            <a:pPr>
+              <a:spcBef>
+                <a:spcPts val="300"/>
+              </a:spcBef>
+              <a:defRPr sz="1000">
+                <a:solidFill>
+                  <a:srgbClr val="F8FAFC"/>
+                </a:solidFill>
+                <a:latin typeface="Calibri"/>
+              </a:defRPr>
+            </a:pPr>
+            <a:r>
+              <a:t>• Administrative button gating (restricts SKU alterations for non-admins).</a:t>
             </a:r>
           </a:p>
         </p:txBody>
@@ -10068,8 +10131,8 @@
         </p:nvSpPr>
         <p:spPr>
           <a:xfrm>
-            <a:off x="6430975" y="4343400"/>
-            <a:ext cx="4846320" cy="1828800"/>
+            <a:off x="6430975" y="4297680"/>
+            <a:ext cx="4846320" cy="1920240"/>
           </a:xfrm>
           <a:prstGeom prst="rect">
             <a:avLst/>
@@ -10083,7 +10146,7 @@
           <a:lstStyle/>
           <a:p>
             <a:pPr>
-              <a:defRPr sz="1300" b="1">
+              <a:defRPr sz="1200" b="1">
                 <a:solidFill>
                   <a:srgbClr val="F43F5E"/>
                 </a:solidFill>
@@ -10091,15 +10154,15 @@
               </a:defRPr>
             </a:pPr>
             <a:r>
-              <a:t>4. Demand Forecasting &amp; Restock Engine</a:t>
+              <a:t>04 — FORECASTING &amp; SPREADSHEETS (Review 2)</a:t>
             </a:r>
           </a:p>
           <a:p>
             <a:pPr>
               <a:spcBef>
-                <a:spcPts val="800"/>
+                <a:spcPts val="300"/>
               </a:spcBef>
-              <a:defRPr sz="1100">
+              <a:defRPr sz="1000">
                 <a:solidFill>
                   <a:srgbClr val="F8FAFC"/>
                 </a:solidFill>
@@ -10107,7 +10170,55 @@
               </a:defRPr>
             </a:pPr>
             <a:r>
-              <a:t>Real-time sales velocity modeling, days-of-stock countdown, tiered risk pills (🔴 Urgent Reorder, 🟡 Moderate, 🟢 Safe), and 1-click 'Auto-Draft PO' prefill.</a:t>
+              <a:t>• Smart Demand Forecasting Engine calculating sales velocity &amp; stockout days.</a:t>
+            </a:r>
+          </a:p>
+          <a:p>
+            <a:pPr>
+              <a:spcBef>
+                <a:spcPts val="300"/>
+              </a:spcBef>
+              <a:defRPr sz="1000">
+                <a:solidFill>
+                  <a:srgbClr val="F8FAFC"/>
+                </a:solidFill>
+                <a:latin typeface="Calibri"/>
+              </a:defRPr>
+            </a:pPr>
+            <a:r>
+              <a:t>• Multi-tiered risk categorization (🔴 Critical, 🟡 Moderate, 🟢 Safe buffer).</a:t>
+            </a:r>
+          </a:p>
+          <a:p>
+            <a:pPr>
+              <a:spcBef>
+                <a:spcPts val="300"/>
+              </a:spcBef>
+              <a:defRPr sz="1000">
+                <a:solidFill>
+                  <a:srgbClr val="F8FAFC"/>
+                </a:solidFill>
+                <a:latin typeface="Calibri"/>
+              </a:defRPr>
+            </a:pPr>
+            <a:r>
+              <a:t>• 1-Click 'Auto-Draft PO' action pre-filling restock purchase orders.</a:t>
+            </a:r>
+          </a:p>
+          <a:p>
+            <a:pPr>
+              <a:spcBef>
+                <a:spcPts val="300"/>
+              </a:spcBef>
+              <a:defRPr sz="1000">
+                <a:solidFill>
+                  <a:srgbClr val="F8FAFC"/>
+                </a:solidFill>
+                <a:latin typeface="Calibri"/>
+              </a:defRPr>
+            </a:pPr>
+            <a:r>
+              <a:t>• Spreadsheet CSV export buttons across products, inventory, orders, and ledgers.</a:t>
             </a:r>
           </a:p>
         </p:txBody>
@@ -10240,7 +10351,7 @@
               </a:defRPr>
             </a:pPr>
             <a:r>
-              <a:t>17 / 18</a:t>
+              <a:t>16 / 18</a:t>
             </a:r>
           </a:p>
         </p:txBody>
@@ -10276,7 +10387,7 @@
               </a:defRPr>
             </a:pPr>
             <a:r>
-              <a:t>Conclusion &amp; Future Scope</a:t>
+              <a:t>Live Application Showcase &amp; Interface Modules</a:t>
             </a:r>
           </a:p>
         </p:txBody>
@@ -10312,7 +10423,7 @@
               </a:defRPr>
             </a:pPr>
             <a:r>
-              <a:t>Summary of achievements and future engineering roadmap</a:t>
+              <a:t>Primary system views operational in the web application (http://localhost:5000/)</a:t>
             </a:r>
           </a:p>
         </p:txBody>
@@ -10325,8 +10436,8 @@
         </p:nvSpPr>
         <p:spPr>
           <a:xfrm>
-            <a:off x="731520" y="1508760"/>
-            <a:ext cx="5212080" cy="4846320"/>
+            <a:off x="731520" y="1645920"/>
+            <a:ext cx="5212080" cy="2194560"/>
           </a:xfrm>
           <a:prstGeom prst="roundRect">
             <a:avLst/>
@@ -10370,44 +10481,8 @@
         </p:nvSpPr>
         <p:spPr>
           <a:xfrm>
-            <a:off x="914400" y="1618488"/>
-            <a:ext cx="4846320" cy="320040"/>
-          </a:xfrm>
-          <a:prstGeom prst="rect">
-            <a:avLst/>
-          </a:prstGeom>
-          <a:noFill/>
-        </p:spPr>
-        <p:txBody>
-          <a:bodyPr wrap="none">
-            <a:spAutoFit/>
-          </a:bodyPr>
-          <a:lstStyle/>
-          <a:p>
-            <a:pPr>
-              <a:defRPr sz="1200" b="1">
-                <a:solidFill>
-                  <a:srgbClr val="06B6D4"/>
-                </a:solidFill>
-                <a:latin typeface="Arial"/>
-              </a:defRPr>
-            </a:pPr>
-            <a:r>
-              <a:t>PROJECT CONCLUSION</a:t>
-            </a:r>
-          </a:p>
-        </p:txBody>
-      </p:sp>
-      <p:sp>
-        <p:nvSpPr>
-          <p:cNvPr id="9" name="TextBox 8"/>
-          <p:cNvSpPr txBox="1"/>
-          <p:nvPr/>
-        </p:nvSpPr>
-        <p:spPr>
-          <a:xfrm>
-            <a:off x="914400" y="1965960"/>
-            <a:ext cx="4846320" cy="4206240"/>
+            <a:off x="914400" y="1828800"/>
+            <a:ext cx="4846320" cy="1828800"/>
           </a:xfrm>
           <a:prstGeom prst="rect">
             <a:avLst/>
@@ -10421,124 +10496,45 @@
           <a:lstStyle/>
           <a:p>
             <a:pPr>
+              <a:defRPr sz="1300" b="1">
+                <a:solidFill>
+                  <a:srgbClr val="06B6D4"/>
+                </a:solidFill>
+                <a:latin typeface="Arial"/>
+              </a:defRPr>
+            </a:pPr>
+            <a:r>
+              <a:t>1. Central Operations Dashboard</a:t>
+            </a:r>
+          </a:p>
+          <a:p>
+            <a:pPr>
               <a:spcBef>
-                <a:spcPts val="0"/>
+                <a:spcPts val="800"/>
               </a:spcBef>
-              <a:defRPr sz="1100" b="1">
-                <a:solidFill>
-                  <a:srgbClr val="10B981"/>
-                </a:solidFill>
-              </a:defRPr>
-            </a:pPr>
-            <a:r>
-              <a:t>• Bridged Theory &amp; Application:</a:t>
-            </a:r>
-          </a:p>
-          <a:p>
-            <a:pPr>
-              <a:defRPr sz="1000">
+              <a:defRPr sz="1100">
                 <a:solidFill>
                   <a:srgbClr val="F8FAFC"/>
                 </a:solidFill>
-              </a:defRPr>
-            </a:pPr>
-            <a:r>
-              <a:t>  Successfully engineered a multi-warehouse management system embodying core DBMS concepts (BCNF, Triggers, Views, Indexes, ACID).</a:t>
-            </a:r>
-          </a:p>
-          <a:p>
-            <a:pPr>
-              <a:spcBef>
-                <a:spcPts val="600"/>
-              </a:spcBef>
-              <a:defRPr sz="1100" b="1">
-                <a:solidFill>
-                  <a:srgbClr val="10B981"/>
-                </a:solidFill>
-              </a:defRPr>
-            </a:pPr>
-            <a:r>
-              <a:t>• Eliminated Operational Drift:</a:t>
-            </a:r>
-          </a:p>
-          <a:p>
-            <a:pPr>
-              <a:defRPr sz="1000">
-                <a:solidFill>
-                  <a:srgbClr val="F8FAFC"/>
-                </a:solidFill>
-              </a:defRPr>
-            </a:pPr>
-            <a:r>
-              <a:t>  Automated database triggers replace manual stock math, guaranteeing that inventory strictly mirrors real-world sales and inbound supplies.</a:t>
-            </a:r>
-          </a:p>
-          <a:p>
-            <a:pPr>
-              <a:spcBef>
-                <a:spcPts val="600"/>
-              </a:spcBef>
-              <a:defRPr sz="1100" b="1">
-                <a:solidFill>
-                  <a:srgbClr val="10B981"/>
-                </a:solidFill>
-              </a:defRPr>
-            </a:pPr>
-            <a:r>
-              <a:t>• Enterprise-Ready RBAC:</a:t>
-            </a:r>
-          </a:p>
-          <a:p>
-            <a:pPr>
-              <a:defRPr sz="1000">
-                <a:solidFill>
-                  <a:srgbClr val="F8FAFC"/>
-                </a:solidFill>
-              </a:defRPr>
-            </a:pPr>
-            <a:r>
-              <a:t>  Session-based role authorization ensures operational staff only access fulfillment modules while protecting corporate balance sheets.</a:t>
-            </a:r>
-          </a:p>
-          <a:p>
-            <a:pPr>
-              <a:spcBef>
-                <a:spcPts val="600"/>
-              </a:spcBef>
-              <a:defRPr sz="1100" b="1">
-                <a:solidFill>
-                  <a:srgbClr val="10B981"/>
-                </a:solidFill>
-              </a:defRPr>
-            </a:pPr>
-            <a:r>
-              <a:t>• Proactive Supply Protection:</a:t>
-            </a:r>
-          </a:p>
-          <a:p>
-            <a:pPr>
-              <a:defRPr sz="1000">
-                <a:solidFill>
-                  <a:srgbClr val="F8FAFC"/>
-                </a:solidFill>
-              </a:defRPr>
-            </a:pPr>
-            <a:r>
-              <a:t>  Smart demand forecasting eliminates the guesswork from restocking, transforming reactive warehouses into predictive logistics hubs.</a:t>
-            </a:r>
-          </a:p>
-        </p:txBody>
-      </p:sp>
-      <p:sp>
-        <p:nvSpPr>
-          <p:cNvPr id="10" name="Rounded Rectangle 9"/>
+                <a:latin typeface="Calibri"/>
+              </a:defRPr>
+            </a:pPr>
+            <a:r>
+              <a:t>Features real-time KPI metrics, dynamic SVG warehouse capacity occupancy bars, financial revenue/expense aggregates, and live database union activity logs.</a:t>
+            </a:r>
+          </a:p>
+        </p:txBody>
+      </p:sp>
+      <p:sp>
+        <p:nvSpPr>
+          <p:cNvPr id="9" name="Rounded Rectangle 8"/>
           <p:cNvSpPr/>
           <p:nvPr/>
         </p:nvSpPr>
         <p:spPr>
           <a:xfrm>
-            <a:off x="6248095" y="1508760"/>
-            <a:ext cx="5212080" cy="4846320"/>
+            <a:off x="6248095" y="1645920"/>
+            <a:ext cx="5212080" cy="2194560"/>
           </a:xfrm>
           <a:prstGeom prst="roundRect">
             <a:avLst/>
@@ -10576,50 +10572,14 @@
       </p:sp>
       <p:sp>
         <p:nvSpPr>
-          <p:cNvPr id="11" name="TextBox 10"/>
+          <p:cNvPr id="10" name="TextBox 9"/>
           <p:cNvSpPr txBox="1"/>
           <p:nvPr/>
         </p:nvSpPr>
         <p:spPr>
           <a:xfrm>
-            <a:off x="6430975" y="1618488"/>
-            <a:ext cx="4846320" cy="320040"/>
-          </a:xfrm>
-          <a:prstGeom prst="rect">
-            <a:avLst/>
-          </a:prstGeom>
-          <a:noFill/>
-        </p:spPr>
-        <p:txBody>
-          <a:bodyPr wrap="none">
-            <a:spAutoFit/>
-          </a:bodyPr>
-          <a:lstStyle/>
-          <a:p>
-            <a:pPr>
-              <a:defRPr sz="1200" b="1">
-                <a:solidFill>
-                  <a:srgbClr val="06B6D4"/>
-                </a:solidFill>
-                <a:latin typeface="Arial"/>
-              </a:defRPr>
-            </a:pPr>
-            <a:r>
-              <a:t>FUTURE ENGINEERING SCOPE</a:t>
-            </a:r>
-          </a:p>
-        </p:txBody>
-      </p:sp>
-      <p:sp>
-        <p:nvSpPr>
-          <p:cNvPr id="12" name="TextBox 11"/>
-          <p:cNvSpPr txBox="1"/>
-          <p:nvPr/>
-        </p:nvSpPr>
-        <p:spPr>
-          <a:xfrm>
-            <a:off x="6430975" y="1965960"/>
-            <a:ext cx="4846320" cy="4206240"/>
+            <a:off x="6430975" y="1828800"/>
+            <a:ext cx="4846320" cy="1828800"/>
           </a:xfrm>
           <a:prstGeom prst="rect">
             <a:avLst/>
@@ -10633,110 +10593,225 @@
           <a:lstStyle/>
           <a:p>
             <a:pPr>
+              <a:defRPr sz="1300" b="1">
+                <a:solidFill>
+                  <a:srgbClr val="10B981"/>
+                </a:solidFill>
+                <a:latin typeface="Arial"/>
+              </a:defRPr>
+            </a:pPr>
+            <a:r>
+              <a:t>2. Real-Time Inventory Stock Table</a:t>
+            </a:r>
+          </a:p>
+          <a:p>
+            <a:pPr>
               <a:spcBef>
-                <a:spcPts val="0"/>
+                <a:spcPts val="800"/>
               </a:spcBef>
-              <a:defRPr sz="1100" b="1">
-                <a:solidFill>
-                  <a:srgbClr val="06B6D4"/>
-                </a:solidFill>
-              </a:defRPr>
-            </a:pPr>
-            <a:r>
-              <a:t>▶ Mobile Barcode / RFID Scanning:</a:t>
-            </a:r>
-          </a:p>
-          <a:p>
-            <a:pPr>
-              <a:defRPr sz="1000">
+              <a:defRPr sz="1100">
                 <a:solidFill>
                   <a:srgbClr val="F8FAFC"/>
                 </a:solidFill>
-              </a:defRPr>
-            </a:pPr>
-            <a:r>
-              <a:t>  Integrate camera/scanner APIs for rapid stock auditing, reducing dispatch scan times at physical warehouse loading bays.</a:t>
+                <a:latin typeface="Calibri"/>
+              </a:defRPr>
+            </a:pPr>
+            <a:r>
+              <a:t>Displays product stocks across warehouses with pulsing low-stock status badges, warehouse dropdown filters, and a dedicated 'Verify Stock' alert filter.</a:t>
+            </a:r>
+          </a:p>
+        </p:txBody>
+      </p:sp>
+      <p:sp>
+        <p:nvSpPr>
+          <p:cNvPr id="11" name="Rounded Rectangle 10"/>
+          <p:cNvSpPr/>
+          <p:nvPr/>
+        </p:nvSpPr>
+        <p:spPr>
+          <a:xfrm>
+            <a:off x="731520" y="4160520"/>
+            <a:ext cx="5212080" cy="2194560"/>
+          </a:xfrm>
+          <a:prstGeom prst="roundRect">
+            <a:avLst/>
+          </a:prstGeom>
+          <a:solidFill>
+            <a:srgbClr val="141C30"/>
+          </a:solidFill>
+          <a:ln w="12700">
+            <a:solidFill>
+              <a:srgbClr val="2D3C5A"/>
+            </a:solidFill>
+          </a:ln>
+        </p:spPr>
+        <p:style>
+          <a:lnRef idx="1">
+            <a:schemeClr val="accent1"/>
+          </a:lnRef>
+          <a:fillRef idx="3">
+            <a:schemeClr val="accent1"/>
+          </a:fillRef>
+          <a:effectRef idx="2">
+            <a:schemeClr val="accent1"/>
+          </a:effectRef>
+          <a:fontRef idx="minor">
+            <a:schemeClr val="lt1"/>
+          </a:fontRef>
+        </p:style>
+        <p:txBody>
+          <a:bodyPr rtlCol="0" anchor="ctr"/>
+          <a:lstStyle/>
+          <a:p>
+            <a:pPr algn="ctr"/>
+          </a:p>
+        </p:txBody>
+      </p:sp>
+      <p:sp>
+        <p:nvSpPr>
+          <p:cNvPr id="12" name="TextBox 11"/>
+          <p:cNvSpPr txBox="1"/>
+          <p:nvPr/>
+        </p:nvSpPr>
+        <p:spPr>
+          <a:xfrm>
+            <a:off x="914400" y="4343400"/>
+            <a:ext cx="4846320" cy="1828800"/>
+          </a:xfrm>
+          <a:prstGeom prst="rect">
+            <a:avLst/>
+          </a:prstGeom>
+          <a:noFill/>
+        </p:spPr>
+        <p:txBody>
+          <a:bodyPr wrap="square">
+            <a:spAutoFit/>
+          </a:bodyPr>
+          <a:lstStyle/>
+          <a:p>
+            <a:pPr>
+              <a:defRPr sz="1300" b="1">
+                <a:solidFill>
+                  <a:srgbClr val="F59E0B"/>
+                </a:solidFill>
+                <a:latin typeface="Arial"/>
+              </a:defRPr>
+            </a:pPr>
+            <a:r>
+              <a:t>3. Orders, Logistics &amp; Billing Ledger</a:t>
             </a:r>
           </a:p>
           <a:p>
             <a:pPr>
               <a:spcBef>
-                <a:spcPts val="600"/>
+                <a:spcPts val="800"/>
               </a:spcBef>
-              <a:defRPr sz="1100" b="1">
-                <a:solidFill>
-                  <a:srgbClr val="06B6D4"/>
-                </a:solidFill>
-              </a:defRPr>
-            </a:pPr>
-            <a:r>
-              <a:t>▶ Automated Supplier Webhook APIs:</a:t>
-            </a:r>
-          </a:p>
-          <a:p>
-            <a:pPr>
-              <a:defRPr sz="1000">
+              <a:defRPr sz="1100">
                 <a:solidFill>
                   <a:srgbClr val="F8FAFC"/>
                 </a:solidFill>
-              </a:defRPr>
-            </a:pPr>
-            <a:r>
-              <a:t>  Establish direct B2B Electronic Data Interchange (EDI) webhooks to automatically submit purchase orders to external suppliers.</a:t>
+                <a:latin typeface="Calibri"/>
+              </a:defRPr>
+            </a:pPr>
+            <a:r>
+              <a:t>Multi-tab transaction hub managing Supply POs (with 'Mark Received' action), Customer Sales Orders, Carrier Shipment progression, and Billing invoice ledgers.</a:t>
+            </a:r>
+          </a:p>
+        </p:txBody>
+      </p:sp>
+      <p:sp>
+        <p:nvSpPr>
+          <p:cNvPr id="13" name="Rounded Rectangle 12"/>
+          <p:cNvSpPr/>
+          <p:nvPr/>
+        </p:nvSpPr>
+        <p:spPr>
+          <a:xfrm>
+            <a:off x="6248095" y="4160520"/>
+            <a:ext cx="5212080" cy="2194560"/>
+          </a:xfrm>
+          <a:prstGeom prst="roundRect">
+            <a:avLst/>
+          </a:prstGeom>
+          <a:solidFill>
+            <a:srgbClr val="141C30"/>
+          </a:solidFill>
+          <a:ln w="12700">
+            <a:solidFill>
+              <a:srgbClr val="2D3C5A"/>
+            </a:solidFill>
+          </a:ln>
+        </p:spPr>
+        <p:style>
+          <a:lnRef idx="1">
+            <a:schemeClr val="accent1"/>
+          </a:lnRef>
+          <a:fillRef idx="3">
+            <a:schemeClr val="accent1"/>
+          </a:fillRef>
+          <a:effectRef idx="2">
+            <a:schemeClr val="accent1"/>
+          </a:effectRef>
+          <a:fontRef idx="minor">
+            <a:schemeClr val="lt1"/>
+          </a:fontRef>
+        </p:style>
+        <p:txBody>
+          <a:bodyPr rtlCol="0" anchor="ctr"/>
+          <a:lstStyle/>
+          <a:p>
+            <a:pPr algn="ctr"/>
+          </a:p>
+        </p:txBody>
+      </p:sp>
+      <p:sp>
+        <p:nvSpPr>
+          <p:cNvPr id="14" name="TextBox 13"/>
+          <p:cNvSpPr txBox="1"/>
+          <p:nvPr/>
+        </p:nvSpPr>
+        <p:spPr>
+          <a:xfrm>
+            <a:off x="6430975" y="4343400"/>
+            <a:ext cx="4846320" cy="1828800"/>
+          </a:xfrm>
+          <a:prstGeom prst="rect">
+            <a:avLst/>
+          </a:prstGeom>
+          <a:noFill/>
+        </p:spPr>
+        <p:txBody>
+          <a:bodyPr wrap="square">
+            <a:spAutoFit/>
+          </a:bodyPr>
+          <a:lstStyle/>
+          <a:p>
+            <a:pPr>
+              <a:defRPr sz="1300" b="1">
+                <a:solidFill>
+                  <a:srgbClr val="F43F5E"/>
+                </a:solidFill>
+                <a:latin typeface="Arial"/>
+              </a:defRPr>
+            </a:pPr>
+            <a:r>
+              <a:t>4. Demand Forecasting &amp; Restock Engine</a:t>
             </a:r>
           </a:p>
           <a:p>
             <a:pPr>
               <a:spcBef>
-                <a:spcPts val="600"/>
+                <a:spcPts val="800"/>
               </a:spcBef>
-              <a:defRPr sz="1100" b="1">
-                <a:solidFill>
-                  <a:srgbClr val="06B6D4"/>
-                </a:solidFill>
-              </a:defRPr>
-            </a:pPr>
-            <a:r>
-              <a:t>▶ Cloud Database Migration:</a:t>
-            </a:r>
-          </a:p>
-          <a:p>
-            <a:pPr>
-              <a:defRPr sz="1000">
+              <a:defRPr sz="1100">
                 <a:solidFill>
                   <a:srgbClr val="F8FAFC"/>
                 </a:solidFill>
-              </a:defRPr>
-            </a:pPr>
-            <a:r>
-              <a:t>  Transition from embedded SQLite to cloud PostgreSQL on AWS RDS with connection pooling for multi-region concurrent access.</a:t>
-            </a:r>
-          </a:p>
-          <a:p>
-            <a:pPr>
-              <a:spcBef>
-                <a:spcPts val="600"/>
-              </a:spcBef>
-              <a:defRPr sz="1100" b="1">
-                <a:solidFill>
-                  <a:srgbClr val="06B6D4"/>
-                </a:solidFill>
-              </a:defRPr>
-            </a:pPr>
-            <a:r>
-              <a:t>▶ Machine Learning Demand Prediction:</a:t>
-            </a:r>
-          </a:p>
-          <a:p>
-            <a:pPr>
-              <a:defRPr sz="1000">
-                <a:solidFill>
-                  <a:srgbClr val="F8FAFC"/>
-                </a:solidFill>
-              </a:defRPr>
-            </a:pPr>
-            <a:r>
-              <a:t>  Incorporate seasonal ARIMA or regression models to factor in holiday demand spikes and supply lead times.</a:t>
+                <a:latin typeface="Calibri"/>
+              </a:defRPr>
+            </a:pPr>
+            <a:r>
+              <a:t>Real-time sales velocity modeling, days-of-stock countdown, tiered risk pills (🔴 Urgent Reorder, 🟡 Moderate, 🟢 Safe), and 1-click 'Auto-Draft PO' prefill.</a:t>
             </a:r>
           </a:p>
         </p:txBody>
@@ -11489,6 +11564,635 @@
       </p:sp>
       <p:sp>
         <p:nvSpPr>
+          <p:cNvPr id="3" name="TextBox 2"/>
+          <p:cNvSpPr txBox="1"/>
+          <p:nvPr/>
+        </p:nvSpPr>
+        <p:spPr>
+          <a:xfrm>
+            <a:off x="731520" y="320040"/>
+            <a:ext cx="9144000" cy="320040"/>
+          </a:xfrm>
+          <a:prstGeom prst="rect">
+            <a:avLst/>
+          </a:prstGeom>
+          <a:noFill/>
+        </p:spPr>
+        <p:txBody>
+          <a:bodyPr wrap="square">
+            <a:spAutoFit/>
+          </a:bodyPr>
+          <a:lstStyle/>
+          <a:p>
+            <a:pPr>
+              <a:defRPr sz="1000" b="1">
+                <a:solidFill>
+                  <a:srgbClr val="06B6D4"/>
+                </a:solidFill>
+                <a:latin typeface="Arial"/>
+              </a:defRPr>
+            </a:pPr>
+            <a:r>
+              <a:t>STOCK MASTER | DBMS SEMESTER PROJECT</a:t>
+            </a:r>
+          </a:p>
+        </p:txBody>
+      </p:sp>
+      <p:sp>
+        <p:nvSpPr>
+          <p:cNvPr id="4" name="TextBox 3"/>
+          <p:cNvSpPr txBox="1"/>
+          <p:nvPr/>
+        </p:nvSpPr>
+        <p:spPr>
+          <a:xfrm>
+            <a:off x="10241280" y="320040"/>
+            <a:ext cx="1188720" cy="320040"/>
+          </a:xfrm>
+          <a:prstGeom prst="rect">
+            <a:avLst/>
+          </a:prstGeom>
+          <a:noFill/>
+        </p:spPr>
+        <p:txBody>
+          <a:bodyPr wrap="none">
+            <a:spAutoFit/>
+          </a:bodyPr>
+          <a:lstStyle/>
+          <a:p>
+            <a:pPr algn="r">
+              <a:defRPr sz="1000" b="1">
+                <a:solidFill>
+                  <a:srgbClr val="6E82A0"/>
+                </a:solidFill>
+                <a:latin typeface="Arial"/>
+              </a:defRPr>
+            </a:pPr>
+            <a:r>
+              <a:t>17 / 18</a:t>
+            </a:r>
+          </a:p>
+        </p:txBody>
+      </p:sp>
+      <p:sp>
+        <p:nvSpPr>
+          <p:cNvPr id="5" name="TextBox 4"/>
+          <p:cNvSpPr txBox="1"/>
+          <p:nvPr/>
+        </p:nvSpPr>
+        <p:spPr>
+          <a:xfrm>
+            <a:off x="731520" y="594360"/>
+            <a:ext cx="10515600" cy="548640"/>
+          </a:xfrm>
+          <a:prstGeom prst="rect">
+            <a:avLst/>
+          </a:prstGeom>
+          <a:noFill/>
+        </p:spPr>
+        <p:txBody>
+          <a:bodyPr wrap="square">
+            <a:spAutoFit/>
+          </a:bodyPr>
+          <a:lstStyle/>
+          <a:p>
+            <a:pPr>
+              <a:defRPr sz="2100" b="1">
+                <a:solidFill>
+                  <a:srgbClr val="F8FAFC"/>
+                </a:solidFill>
+                <a:latin typeface="Arial"/>
+              </a:defRPr>
+            </a:pPr>
+            <a:r>
+              <a:t>Conclusion &amp; Future Scope</a:t>
+            </a:r>
+          </a:p>
+        </p:txBody>
+      </p:sp>
+      <p:sp>
+        <p:nvSpPr>
+          <p:cNvPr id="6" name="TextBox 5"/>
+          <p:cNvSpPr txBox="1"/>
+          <p:nvPr/>
+        </p:nvSpPr>
+        <p:spPr>
+          <a:xfrm>
+            <a:off x="731520" y="1115568"/>
+            <a:ext cx="10515600" cy="320040"/>
+          </a:xfrm>
+          <a:prstGeom prst="rect">
+            <a:avLst/>
+          </a:prstGeom>
+          <a:noFill/>
+        </p:spPr>
+        <p:txBody>
+          <a:bodyPr wrap="square">
+            <a:spAutoFit/>
+          </a:bodyPr>
+          <a:lstStyle/>
+          <a:p>
+            <a:pPr>
+              <a:defRPr sz="1100">
+                <a:solidFill>
+                  <a:srgbClr val="A0AFC8"/>
+                </a:solidFill>
+                <a:latin typeface="Calibri"/>
+              </a:defRPr>
+            </a:pPr>
+            <a:r>
+              <a:t>Summary of achievements and future engineering roadmap</a:t>
+            </a:r>
+          </a:p>
+        </p:txBody>
+      </p:sp>
+      <p:sp>
+        <p:nvSpPr>
+          <p:cNvPr id="7" name="Rounded Rectangle 6"/>
+          <p:cNvSpPr/>
+          <p:nvPr/>
+        </p:nvSpPr>
+        <p:spPr>
+          <a:xfrm>
+            <a:off x="731520" y="1508760"/>
+            <a:ext cx="5212080" cy="4846320"/>
+          </a:xfrm>
+          <a:prstGeom prst="roundRect">
+            <a:avLst/>
+          </a:prstGeom>
+          <a:solidFill>
+            <a:srgbClr val="141C30"/>
+          </a:solidFill>
+          <a:ln w="12700">
+            <a:solidFill>
+              <a:srgbClr val="2D3C5A"/>
+            </a:solidFill>
+          </a:ln>
+        </p:spPr>
+        <p:style>
+          <a:lnRef idx="1">
+            <a:schemeClr val="accent1"/>
+          </a:lnRef>
+          <a:fillRef idx="3">
+            <a:schemeClr val="accent1"/>
+          </a:fillRef>
+          <a:effectRef idx="2">
+            <a:schemeClr val="accent1"/>
+          </a:effectRef>
+          <a:fontRef idx="minor">
+            <a:schemeClr val="lt1"/>
+          </a:fontRef>
+        </p:style>
+        <p:txBody>
+          <a:bodyPr rtlCol="0" anchor="ctr"/>
+          <a:lstStyle/>
+          <a:p>
+            <a:pPr algn="ctr"/>
+          </a:p>
+        </p:txBody>
+      </p:sp>
+      <p:sp>
+        <p:nvSpPr>
+          <p:cNvPr id="8" name="TextBox 7"/>
+          <p:cNvSpPr txBox="1"/>
+          <p:nvPr/>
+        </p:nvSpPr>
+        <p:spPr>
+          <a:xfrm>
+            <a:off x="914400" y="1618488"/>
+            <a:ext cx="4846320" cy="320040"/>
+          </a:xfrm>
+          <a:prstGeom prst="rect">
+            <a:avLst/>
+          </a:prstGeom>
+          <a:noFill/>
+        </p:spPr>
+        <p:txBody>
+          <a:bodyPr wrap="none">
+            <a:spAutoFit/>
+          </a:bodyPr>
+          <a:lstStyle/>
+          <a:p>
+            <a:pPr>
+              <a:defRPr sz="1200" b="1">
+                <a:solidFill>
+                  <a:srgbClr val="06B6D4"/>
+                </a:solidFill>
+                <a:latin typeface="Arial"/>
+              </a:defRPr>
+            </a:pPr>
+            <a:r>
+              <a:t>PROJECT CONCLUSION</a:t>
+            </a:r>
+          </a:p>
+        </p:txBody>
+      </p:sp>
+      <p:sp>
+        <p:nvSpPr>
+          <p:cNvPr id="9" name="TextBox 8"/>
+          <p:cNvSpPr txBox="1"/>
+          <p:nvPr/>
+        </p:nvSpPr>
+        <p:spPr>
+          <a:xfrm>
+            <a:off x="914400" y="1965960"/>
+            <a:ext cx="4846320" cy="4206240"/>
+          </a:xfrm>
+          <a:prstGeom prst="rect">
+            <a:avLst/>
+          </a:prstGeom>
+          <a:noFill/>
+        </p:spPr>
+        <p:txBody>
+          <a:bodyPr wrap="square">
+            <a:spAutoFit/>
+          </a:bodyPr>
+          <a:lstStyle/>
+          <a:p>
+            <a:pPr>
+              <a:spcBef>
+                <a:spcPts val="0"/>
+              </a:spcBef>
+              <a:defRPr sz="1100" b="1">
+                <a:solidFill>
+                  <a:srgbClr val="10B981"/>
+                </a:solidFill>
+              </a:defRPr>
+            </a:pPr>
+            <a:r>
+              <a:t>• Bridged Theory &amp; Application:</a:t>
+            </a:r>
+          </a:p>
+          <a:p>
+            <a:pPr>
+              <a:defRPr sz="1000">
+                <a:solidFill>
+                  <a:srgbClr val="F8FAFC"/>
+                </a:solidFill>
+              </a:defRPr>
+            </a:pPr>
+            <a:r>
+              <a:t>  Successfully engineered a multi-warehouse management system embodying core DBMS concepts (BCNF, Triggers, Views, Indexes, ACID).</a:t>
+            </a:r>
+          </a:p>
+          <a:p>
+            <a:pPr>
+              <a:spcBef>
+                <a:spcPts val="600"/>
+              </a:spcBef>
+              <a:defRPr sz="1100" b="1">
+                <a:solidFill>
+                  <a:srgbClr val="10B981"/>
+                </a:solidFill>
+              </a:defRPr>
+            </a:pPr>
+            <a:r>
+              <a:t>• Eliminated Operational Drift:</a:t>
+            </a:r>
+          </a:p>
+          <a:p>
+            <a:pPr>
+              <a:defRPr sz="1000">
+                <a:solidFill>
+                  <a:srgbClr val="F8FAFC"/>
+                </a:solidFill>
+              </a:defRPr>
+            </a:pPr>
+            <a:r>
+              <a:t>  Automated database triggers replace manual stock math, guaranteeing that inventory strictly mirrors real-world sales and inbound supplies.</a:t>
+            </a:r>
+          </a:p>
+          <a:p>
+            <a:pPr>
+              <a:spcBef>
+                <a:spcPts val="600"/>
+              </a:spcBef>
+              <a:defRPr sz="1100" b="1">
+                <a:solidFill>
+                  <a:srgbClr val="10B981"/>
+                </a:solidFill>
+              </a:defRPr>
+            </a:pPr>
+            <a:r>
+              <a:t>• Enterprise-Ready RBAC:</a:t>
+            </a:r>
+          </a:p>
+          <a:p>
+            <a:pPr>
+              <a:defRPr sz="1000">
+                <a:solidFill>
+                  <a:srgbClr val="F8FAFC"/>
+                </a:solidFill>
+              </a:defRPr>
+            </a:pPr>
+            <a:r>
+              <a:t>  Session-based role authorization ensures operational staff only access fulfillment modules while protecting corporate balance sheets.</a:t>
+            </a:r>
+          </a:p>
+          <a:p>
+            <a:pPr>
+              <a:spcBef>
+                <a:spcPts val="600"/>
+              </a:spcBef>
+              <a:defRPr sz="1100" b="1">
+                <a:solidFill>
+                  <a:srgbClr val="10B981"/>
+                </a:solidFill>
+              </a:defRPr>
+            </a:pPr>
+            <a:r>
+              <a:t>• Proactive Supply Protection:</a:t>
+            </a:r>
+          </a:p>
+          <a:p>
+            <a:pPr>
+              <a:defRPr sz="1000">
+                <a:solidFill>
+                  <a:srgbClr val="F8FAFC"/>
+                </a:solidFill>
+              </a:defRPr>
+            </a:pPr>
+            <a:r>
+              <a:t>  Smart demand forecasting eliminates the guesswork from restocking, transforming reactive warehouses into predictive logistics hubs.</a:t>
+            </a:r>
+          </a:p>
+        </p:txBody>
+      </p:sp>
+      <p:sp>
+        <p:nvSpPr>
+          <p:cNvPr id="10" name="Rounded Rectangle 9"/>
+          <p:cNvSpPr/>
+          <p:nvPr/>
+        </p:nvSpPr>
+        <p:spPr>
+          <a:xfrm>
+            <a:off x="6248095" y="1508760"/>
+            <a:ext cx="5212080" cy="4846320"/>
+          </a:xfrm>
+          <a:prstGeom prst="roundRect">
+            <a:avLst/>
+          </a:prstGeom>
+          <a:solidFill>
+            <a:srgbClr val="141C30"/>
+          </a:solidFill>
+          <a:ln w="12700">
+            <a:solidFill>
+              <a:srgbClr val="2D3C5A"/>
+            </a:solidFill>
+          </a:ln>
+        </p:spPr>
+        <p:style>
+          <a:lnRef idx="1">
+            <a:schemeClr val="accent1"/>
+          </a:lnRef>
+          <a:fillRef idx="3">
+            <a:schemeClr val="accent1"/>
+          </a:fillRef>
+          <a:effectRef idx="2">
+            <a:schemeClr val="accent1"/>
+          </a:effectRef>
+          <a:fontRef idx="minor">
+            <a:schemeClr val="lt1"/>
+          </a:fontRef>
+        </p:style>
+        <p:txBody>
+          <a:bodyPr rtlCol="0" anchor="ctr"/>
+          <a:lstStyle/>
+          <a:p>
+            <a:pPr algn="ctr"/>
+          </a:p>
+        </p:txBody>
+      </p:sp>
+      <p:sp>
+        <p:nvSpPr>
+          <p:cNvPr id="11" name="TextBox 10"/>
+          <p:cNvSpPr txBox="1"/>
+          <p:nvPr/>
+        </p:nvSpPr>
+        <p:spPr>
+          <a:xfrm>
+            <a:off x="6430975" y="1618488"/>
+            <a:ext cx="4846320" cy="320040"/>
+          </a:xfrm>
+          <a:prstGeom prst="rect">
+            <a:avLst/>
+          </a:prstGeom>
+          <a:noFill/>
+        </p:spPr>
+        <p:txBody>
+          <a:bodyPr wrap="none">
+            <a:spAutoFit/>
+          </a:bodyPr>
+          <a:lstStyle/>
+          <a:p>
+            <a:pPr>
+              <a:defRPr sz="1200" b="1">
+                <a:solidFill>
+                  <a:srgbClr val="06B6D4"/>
+                </a:solidFill>
+                <a:latin typeface="Arial"/>
+              </a:defRPr>
+            </a:pPr>
+            <a:r>
+              <a:t>FUTURE ENGINEERING SCOPE</a:t>
+            </a:r>
+          </a:p>
+        </p:txBody>
+      </p:sp>
+      <p:sp>
+        <p:nvSpPr>
+          <p:cNvPr id="12" name="TextBox 11"/>
+          <p:cNvSpPr txBox="1"/>
+          <p:nvPr/>
+        </p:nvSpPr>
+        <p:spPr>
+          <a:xfrm>
+            <a:off x="6430975" y="1965960"/>
+            <a:ext cx="4846320" cy="4206240"/>
+          </a:xfrm>
+          <a:prstGeom prst="rect">
+            <a:avLst/>
+          </a:prstGeom>
+          <a:noFill/>
+        </p:spPr>
+        <p:txBody>
+          <a:bodyPr wrap="square">
+            <a:spAutoFit/>
+          </a:bodyPr>
+          <a:lstStyle/>
+          <a:p>
+            <a:pPr>
+              <a:spcBef>
+                <a:spcPts val="0"/>
+              </a:spcBef>
+              <a:defRPr sz="1100" b="1">
+                <a:solidFill>
+                  <a:srgbClr val="06B6D4"/>
+                </a:solidFill>
+              </a:defRPr>
+            </a:pPr>
+            <a:r>
+              <a:t>▶ Mobile Barcode / RFID Scanning:</a:t>
+            </a:r>
+          </a:p>
+          <a:p>
+            <a:pPr>
+              <a:defRPr sz="1000">
+                <a:solidFill>
+                  <a:srgbClr val="F8FAFC"/>
+                </a:solidFill>
+              </a:defRPr>
+            </a:pPr>
+            <a:r>
+              <a:t>  Integrate camera/scanner APIs for rapid stock auditing, reducing dispatch scan times at physical warehouse loading bays.</a:t>
+            </a:r>
+          </a:p>
+          <a:p>
+            <a:pPr>
+              <a:spcBef>
+                <a:spcPts val="600"/>
+              </a:spcBef>
+              <a:defRPr sz="1100" b="1">
+                <a:solidFill>
+                  <a:srgbClr val="06B6D4"/>
+                </a:solidFill>
+              </a:defRPr>
+            </a:pPr>
+            <a:r>
+              <a:t>▶ Automated Supplier Webhook APIs:</a:t>
+            </a:r>
+          </a:p>
+          <a:p>
+            <a:pPr>
+              <a:defRPr sz="1000">
+                <a:solidFill>
+                  <a:srgbClr val="F8FAFC"/>
+                </a:solidFill>
+              </a:defRPr>
+            </a:pPr>
+            <a:r>
+              <a:t>  Establish direct B2B Electronic Data Interchange (EDI) webhooks to automatically submit purchase orders to external suppliers.</a:t>
+            </a:r>
+          </a:p>
+          <a:p>
+            <a:pPr>
+              <a:spcBef>
+                <a:spcPts val="600"/>
+              </a:spcBef>
+              <a:defRPr sz="1100" b="1">
+                <a:solidFill>
+                  <a:srgbClr val="06B6D4"/>
+                </a:solidFill>
+              </a:defRPr>
+            </a:pPr>
+            <a:r>
+              <a:t>▶ Cloud Database Migration:</a:t>
+            </a:r>
+          </a:p>
+          <a:p>
+            <a:pPr>
+              <a:defRPr sz="1000">
+                <a:solidFill>
+                  <a:srgbClr val="F8FAFC"/>
+                </a:solidFill>
+              </a:defRPr>
+            </a:pPr>
+            <a:r>
+              <a:t>  Transition from embedded SQLite to cloud PostgreSQL on AWS RDS with connection pooling for multi-region concurrent access.</a:t>
+            </a:r>
+          </a:p>
+          <a:p>
+            <a:pPr>
+              <a:spcBef>
+                <a:spcPts val="600"/>
+              </a:spcBef>
+              <a:defRPr sz="1100" b="1">
+                <a:solidFill>
+                  <a:srgbClr val="06B6D4"/>
+                </a:solidFill>
+              </a:defRPr>
+            </a:pPr>
+            <a:r>
+              <a:t>▶ Machine Learning Demand Prediction:</a:t>
+            </a:r>
+          </a:p>
+          <a:p>
+            <a:pPr>
+              <a:defRPr sz="1000">
+                <a:solidFill>
+                  <a:srgbClr val="F8FAFC"/>
+                </a:solidFill>
+              </a:defRPr>
+            </a:pPr>
+            <a:r>
+              <a:t>  Incorporate seasonal ARIMA or regression models to factor in holiday demand spikes and supply lead times.</a:t>
+            </a:r>
+          </a:p>
+        </p:txBody>
+      </p:sp>
+    </p:spTree>
+  </p:cSld>
+  <p:clrMapOvr>
+    <a:masterClrMapping/>
+  </p:clrMapOvr>
+</p:sld>
+</file>
+
+<file path=ppt/slides/slide21.xml><?xml version="1.0" encoding="utf-8"?>
+<p:sld xmlns:a="http://schemas.openxmlformats.org/drawingml/2006/main" xmlns:p="http://schemas.openxmlformats.org/presentationml/2006/main" xmlns:r="http://schemas.openxmlformats.org/officeDocument/2006/relationships">
+  <p:cSld>
+    <p:spTree>
+      <p:nvGrpSpPr>
+        <p:cNvPr id="1" name=""/>
+        <p:cNvGrpSpPr/>
+        <p:nvPr/>
+      </p:nvGrpSpPr>
+      <p:grpSpPr/>
+      <p:sp>
+        <p:nvSpPr>
+          <p:cNvPr id="2" name="Rectangle 1"/>
+          <p:cNvSpPr/>
+          <p:nvPr/>
+        </p:nvSpPr>
+        <p:spPr>
+          <a:xfrm>
+            <a:off x="0" y="0"/>
+            <a:ext cx="12191695" cy="6858000"/>
+          </a:xfrm>
+          <a:prstGeom prst="rect">
+            <a:avLst/>
+          </a:prstGeom>
+          <a:solidFill>
+            <a:srgbClr val="0A0F1D"/>
+          </a:solidFill>
+          <a:ln>
+            <a:noFill/>
+          </a:ln>
+        </p:spPr>
+        <p:style>
+          <a:lnRef idx="1">
+            <a:schemeClr val="accent1"/>
+          </a:lnRef>
+          <a:fillRef idx="3">
+            <a:schemeClr val="accent1"/>
+          </a:fillRef>
+          <a:effectRef idx="2">
+            <a:schemeClr val="accent1"/>
+          </a:effectRef>
+          <a:fontRef idx="minor">
+            <a:schemeClr val="lt1"/>
+          </a:fontRef>
+        </p:style>
+        <p:txBody>
+          <a:bodyPr rtlCol="0" anchor="ctr"/>
+          <a:lstStyle/>
+          <a:p>
+            <a:pPr algn="ctr"/>
+          </a:p>
+        </p:txBody>
+      </p:sp>
+      <p:sp>
+        <p:nvSpPr>
           <p:cNvPr id="3" name="Rounded Rectangle 2"/>
           <p:cNvSpPr/>
           <p:nvPr/>
@@ -14833,7 +15537,7 @@
               </a:defRPr>
             </a:pPr>
             <a:r>
-              <a:t>06 / 18</a:t>
+              <a:t>06 / 21</a:t>
             </a:r>
           </a:p>
         </p:txBody>
@@ -14869,7 +15573,7 @@
               </a:defRPr>
             </a:pPr>
             <a:r>
-              <a:t>Relational Database Schema (Physical Model)</a:t>
+              <a:t>Physical Relational Database Schema Diagram</a:t>
             </a:r>
           </a:p>
         </p:txBody>
@@ -14905,7 +15609,7 @@
               </a:defRPr>
             </a:pPr>
             <a:r>
-              <a:t>11 normalized tables indicating Primary Keys [PK] and Foreign Keys [FK]</a:t>
+              <a:t>Visual mapping of 11 normalized tables, Primary Keys [PK], Foreign Keys [FK], and Integrity Constraints</a:t>
             </a:r>
           </a:p>
         </p:txBody>
@@ -14919,7 +15623,7 @@
         <p:spPr>
           <a:xfrm>
             <a:off x="731520" y="1508760"/>
-            <a:ext cx="3413455" cy="4846320"/>
+            <a:ext cx="8046720" cy="4846320"/>
           </a:xfrm>
           <a:prstGeom prst="roundRect">
             <a:avLst/>
@@ -14955,168 +15659,30 @@
           </a:p>
         </p:txBody>
       </p:sp>
-      <p:sp>
-        <p:nvSpPr>
-          <p:cNvPr id="8" name="TextBox 7"/>
-          <p:cNvSpPr txBox="1"/>
-          <p:nvPr/>
-        </p:nvSpPr>
-        <p:spPr>
-          <a:xfrm>
-            <a:off x="868680" y="1645920"/>
-            <a:ext cx="3139135" cy="4572000"/>
+      <p:pic>
+        <p:nvPicPr>
+          <p:cNvPr id="8" name="Picture 7" descr="relational_schema.png"/>
+          <p:cNvPicPr>
+            <a:picLocks noChangeAspect="1"/>
+          </p:cNvPicPr>
+          <p:nvPr/>
+        </p:nvPicPr>
+        <p:blipFill>
+          <a:blip r:embed="rId2"/>
+          <a:stretch>
+            <a:fillRect/>
+          </a:stretch>
+        </p:blipFill>
+        <p:spPr>
+          <a:xfrm>
+            <a:off x="822960" y="1600200"/>
+            <a:ext cx="7863840" cy="4663440"/>
           </a:xfrm>
           <a:prstGeom prst="rect">
             <a:avLst/>
           </a:prstGeom>
-          <a:noFill/>
-        </p:spPr>
-        <p:txBody>
-          <a:bodyPr wrap="square">
-            <a:spAutoFit/>
-          </a:bodyPr>
-          <a:lstStyle/>
-          <a:p>
-            <a:pPr>
-              <a:spcAft>
-                <a:spcPts val="800"/>
-              </a:spcAft>
-              <a:defRPr sz="1200" b="1">
-                <a:solidFill>
-                  <a:srgbClr val="06B6D4"/>
-                </a:solidFill>
-              </a:defRPr>
-            </a:pPr>
-            <a:r>
-              <a:t>PILLAR 1: MASTER DATA</a:t>
-            </a:r>
-          </a:p>
-          <a:p>
-            <a:pPr>
-              <a:spcBef>
-                <a:spcPts val="600"/>
-              </a:spcBef>
-              <a:defRPr sz="1100" b="1">
-                <a:solidFill>
-                  <a:srgbClr val="F8FAFC"/>
-                </a:solidFill>
-              </a:defRPr>
-            </a:pPr>
-            <a:r>
-              <a:t>USERS</a:t>
-            </a:r>
-          </a:p>
-          <a:p>
-            <a:pPr>
-              <a:spcBef>
-                <a:spcPts val="200"/>
-              </a:spcBef>
-              <a:defRPr sz="950">
-                <a:solidFill>
-                  <a:srgbClr val="A0AFC8"/>
-                </a:solidFill>
-                <a:latin typeface="Consolas"/>
-              </a:defRPr>
-            </a:pPr>
-            <a:r>
-              <a:t>UserID [PK], Name, Email [UNIQUE], Password, Role</a:t>
-            </a:r>
-          </a:p>
-          <a:p>
-            <a:pPr>
-              <a:spcBef>
-                <a:spcPts val="600"/>
-              </a:spcBef>
-              <a:defRPr sz="1100" b="1">
-                <a:solidFill>
-                  <a:srgbClr val="F8FAFC"/>
-                </a:solidFill>
-              </a:defRPr>
-            </a:pPr>
-            <a:r>
-              <a:t>SUPPLIERS</a:t>
-            </a:r>
-          </a:p>
-          <a:p>
-            <a:pPr>
-              <a:spcBef>
-                <a:spcPts val="200"/>
-              </a:spcBef>
-              <a:defRPr sz="950">
-                <a:solidFill>
-                  <a:srgbClr val="A0AFC8"/>
-                </a:solidFill>
-                <a:latin typeface="Consolas"/>
-              </a:defRPr>
-            </a:pPr>
-            <a:r>
-              <a:t>SupplierID [PK], SupplierName, Phone, Email [UNIQUE], Address</a:t>
-            </a:r>
-          </a:p>
-          <a:p>
-            <a:pPr>
-              <a:spcBef>
-                <a:spcPts val="600"/>
-              </a:spcBef>
-              <a:defRPr sz="1100" b="1">
-                <a:solidFill>
-                  <a:srgbClr val="F8FAFC"/>
-                </a:solidFill>
-              </a:defRPr>
-            </a:pPr>
-            <a:r>
-              <a:t>PRODUCTS</a:t>
-            </a:r>
-          </a:p>
-          <a:p>
-            <a:pPr>
-              <a:spcBef>
-                <a:spcPts val="200"/>
-              </a:spcBef>
-              <a:defRPr sz="950">
-                <a:solidFill>
-                  <a:srgbClr val="A0AFC8"/>
-                </a:solidFill>
-                <a:latin typeface="Consolas"/>
-              </a:defRPr>
-            </a:pPr>
-            <a:r>
-              <a:t>ProductID [PK], ProductName, Description, Category, UnitPrice, SupplierID [FK]</a:t>
-            </a:r>
-          </a:p>
-          <a:p>
-            <a:pPr>
-              <a:spcBef>
-                <a:spcPts val="600"/>
-              </a:spcBef>
-              <a:defRPr sz="1100" b="1">
-                <a:solidFill>
-                  <a:srgbClr val="F8FAFC"/>
-                </a:solidFill>
-              </a:defRPr>
-            </a:pPr>
-            <a:r>
-              <a:t>WAREHOUSES</a:t>
-            </a:r>
-          </a:p>
-          <a:p>
-            <a:pPr>
-              <a:spcBef>
-                <a:spcPts val="200"/>
-              </a:spcBef>
-              <a:defRPr sz="950">
-                <a:solidFill>
-                  <a:srgbClr val="A0AFC8"/>
-                </a:solidFill>
-                <a:latin typeface="Consolas"/>
-              </a:defRPr>
-            </a:pPr>
-            <a:r>
-              <a:t>WarehouseID [PK], WarehouseName, Location, Capacity</a:t>
-            </a:r>
-          </a:p>
-        </p:txBody>
-      </p:sp>
+        </p:spPr>
+      </p:pic>
       <p:sp>
         <p:nvSpPr>
           <p:cNvPr id="9" name="Rounded Rectangle 8"/>
@@ -15125,8 +15691,8 @@
         </p:nvSpPr>
         <p:spPr>
           <a:xfrm>
-            <a:off x="4389120" y="1508760"/>
-            <a:ext cx="3413455" cy="4846320"/>
+            <a:off x="8961120" y="1508760"/>
+            <a:ext cx="2499055" cy="4846320"/>
           </a:xfrm>
           <a:prstGeom prst="roundRect">
             <a:avLst/>
@@ -15170,8 +15736,44 @@
         </p:nvSpPr>
         <p:spPr>
           <a:xfrm>
-            <a:off x="4526280" y="1645920"/>
-            <a:ext cx="3139135" cy="4572000"/>
+            <a:off x="9144000" y="1618488"/>
+            <a:ext cx="2133295" cy="320040"/>
+          </a:xfrm>
+          <a:prstGeom prst="rect">
+            <a:avLst/>
+          </a:prstGeom>
+          <a:noFill/>
+        </p:spPr>
+        <p:txBody>
+          <a:bodyPr wrap="none">
+            <a:spAutoFit/>
+          </a:bodyPr>
+          <a:lstStyle/>
+          <a:p>
+            <a:pPr>
+              <a:defRPr sz="1200" b="1">
+                <a:solidFill>
+                  <a:srgbClr val="06B6D4"/>
+                </a:solidFill>
+                <a:latin typeface="Arial"/>
+              </a:defRPr>
+            </a:pPr>
+            <a:r>
+              <a:t>SCHEMA HIGHLIGHTS</a:t>
+            </a:r>
+          </a:p>
+        </p:txBody>
+      </p:sp>
+      <p:sp>
+        <p:nvSpPr>
+          <p:cNvPr id="11" name="TextBox 10"/>
+          <p:cNvSpPr txBox="1"/>
+          <p:nvPr/>
+        </p:nvSpPr>
+        <p:spPr>
+          <a:xfrm>
+            <a:off x="9098280" y="1965960"/>
+            <a:ext cx="2240280" cy="4206240"/>
           </a:xfrm>
           <a:prstGeom prst="rect">
             <a:avLst/>
@@ -15185,17 +15787,32 @@
           <a:lstStyle/>
           <a:p>
             <a:pPr>
-              <a:spcAft>
-                <a:spcPts val="800"/>
-              </a:spcAft>
-              <a:defRPr sz="1200" b="1">
-                <a:solidFill>
-                  <a:srgbClr val="F59E0B"/>
-                </a:solidFill>
-              </a:defRPr>
-            </a:pPr>
-            <a:r>
-              <a:t>PILLAR 2: INVENTORY &amp; ORDERS</a:t>
+              <a:spcBef>
+                <a:spcPts val="0"/>
+              </a:spcBef>
+              <a:defRPr sz="1050" b="1">
+                <a:solidFill>
+                  <a:srgbClr val="06B6D4"/>
+                </a:solidFill>
+              </a:defRPr>
+            </a:pPr>
+            <a:r>
+              <a:t>▶ 11 Tables</a:t>
+            </a:r>
+          </a:p>
+          <a:p>
+            <a:pPr>
+              <a:spcBef>
+                <a:spcPts val="200"/>
+              </a:spcBef>
+              <a:defRPr sz="900">
+                <a:solidFill>
+                  <a:srgbClr val="F8FAFC"/>
+                </a:solidFill>
+              </a:defRPr>
+            </a:pPr>
+            <a:r>
+              <a:t>Complete coverage: Users, Suppliers, Products, Warehouses, Inventory, POs, SOs, Shipments &amp; Billing.</a:t>
             </a:r>
           </a:p>
           <a:p>
@@ -15203,14 +15820,14 @@
               <a:spcBef>
                 <a:spcPts val="600"/>
               </a:spcBef>
-              <a:defRPr sz="1100" b="1">
-                <a:solidFill>
-                  <a:srgbClr val="F8FAFC"/>
-                </a:solidFill>
-              </a:defRPr>
-            </a:pPr>
-            <a:r>
-              <a:t>INVENTORY</a:t>
+              <a:defRPr sz="1050" b="1">
+                <a:solidFill>
+                  <a:srgbClr val="06B6D4"/>
+                </a:solidFill>
+              </a:defRPr>
+            </a:pPr>
+            <a:r>
+              <a:t>▶ Referential Integrity</a:t>
             </a:r>
           </a:p>
           <a:p>
@@ -15218,15 +15835,14 @@
               <a:spcBef>
                 <a:spcPts val="200"/>
               </a:spcBef>
-              <a:defRPr sz="950">
-                <a:solidFill>
-                  <a:srgbClr val="A0AFC8"/>
-                </a:solidFill>
-                <a:latin typeface="Consolas"/>
-              </a:defRPr>
-            </a:pPr>
-            <a:r>
-              <a:t>InventoryID [PK], ProductID [FK], WarehouseID [FK], Quantity, MinimumStock</a:t>
+              <a:defRPr sz="900">
+                <a:solidFill>
+                  <a:srgbClr val="F8FAFC"/>
+                </a:solidFill>
+              </a:defRPr>
+            </a:pPr>
+            <a:r>
+              <a:t>Foreign key cascades (ON DELETE CASCADE) guarantee zero orphan child rows.</a:t>
             </a:r>
           </a:p>
           <a:p>
@@ -15234,14 +15850,14 @@
               <a:spcBef>
                 <a:spcPts val="600"/>
               </a:spcBef>
-              <a:defRPr sz="1100" b="1">
-                <a:solidFill>
-                  <a:srgbClr val="F8FAFC"/>
-                </a:solidFill>
-              </a:defRPr>
-            </a:pPr>
-            <a:r>
-              <a:t>PURCHASE_ORDERS</a:t>
+              <a:defRPr sz="1050" b="1">
+                <a:solidFill>
+                  <a:srgbClr val="06B6D4"/>
+                </a:solidFill>
+              </a:defRPr>
+            </a:pPr>
+            <a:r>
+              <a:t>▶ 1:1 Enforcement</a:t>
             </a:r>
           </a:p>
           <a:p>
@@ -15249,15 +15865,14 @@
               <a:spcBef>
                 <a:spcPts val="200"/>
               </a:spcBef>
-              <a:defRPr sz="950">
-                <a:solidFill>
-                  <a:srgbClr val="A0AFC8"/>
-                </a:solidFill>
-                <a:latin typeface="Consolas"/>
-              </a:defRPr>
-            </a:pPr>
-            <a:r>
-              <a:t>PurchaseOrderID [PK], SupplierID [FK], WarehouseID [FK], OrderDate, Status, TotalAmount</a:t>
+              <a:defRPr sz="900">
+                <a:solidFill>
+                  <a:srgbClr val="F8FAFC"/>
+                </a:solidFill>
+              </a:defRPr>
+            </a:pPr>
+            <a:r>
+              <a:t>UNIQUE constraints on SalesOrderID in Shipments and Billing guarantee clean 1:1 extensions.</a:t>
             </a:r>
           </a:p>
           <a:p>
@@ -15265,14 +15880,14 @@
               <a:spcBef>
                 <a:spcPts val="600"/>
               </a:spcBef>
-              <a:defRPr sz="1100" b="1">
-                <a:solidFill>
-                  <a:srgbClr val="F8FAFC"/>
-                </a:solidFill>
-              </a:defRPr>
-            </a:pPr>
-            <a:r>
-              <a:t>PURCHASE_ORDER_ITEMS</a:t>
+              <a:defRPr sz="1050" b="1">
+                <a:solidFill>
+                  <a:srgbClr val="06B6D4"/>
+                </a:solidFill>
+              </a:defRPr>
+            </a:pPr>
+            <a:r>
+              <a:t>▶ Domain Constraints</a:t>
             </a:r>
           </a:p>
           <a:p>
@@ -15280,222 +15895,14 @@
               <a:spcBef>
                 <a:spcPts val="200"/>
               </a:spcBef>
-              <a:defRPr sz="950">
-                <a:solidFill>
-                  <a:srgbClr val="A0AFC8"/>
-                </a:solidFill>
-                <a:latin typeface="Consolas"/>
-              </a:defRPr>
-            </a:pPr>
-            <a:r>
-              <a:t>ItemID [PK], PurchaseOrderID [FK], ProductID [FK], Quantity, UnitPrice</a:t>
-            </a:r>
-          </a:p>
-          <a:p>
-            <a:pPr>
-              <a:spcBef>
-                <a:spcPts val="600"/>
-              </a:spcBef>
-              <a:defRPr sz="1100" b="1">
+              <a:defRPr sz="900">
                 <a:solidFill>
                   <a:srgbClr val="F8FAFC"/>
                 </a:solidFill>
               </a:defRPr>
             </a:pPr>
             <a:r>
-              <a:t>SALES_ORDERS</a:t>
-            </a:r>
-          </a:p>
-          <a:p>
-            <a:pPr>
-              <a:spcBef>
-                <a:spcPts val="200"/>
-              </a:spcBef>
-              <a:defRPr sz="950">
-                <a:solidFill>
-                  <a:srgbClr val="A0AFC8"/>
-                </a:solidFill>
-                <a:latin typeface="Consolas"/>
-              </a:defRPr>
-            </a:pPr>
-            <a:r>
-              <a:t>SalesOrderID [PK], CustomerName, WarehouseID [FK], OrderDate, Status, TotalAmount</a:t>
-            </a:r>
-          </a:p>
-        </p:txBody>
-      </p:sp>
-      <p:sp>
-        <p:nvSpPr>
-          <p:cNvPr id="11" name="Rounded Rectangle 10"/>
-          <p:cNvSpPr/>
-          <p:nvPr/>
-        </p:nvSpPr>
-        <p:spPr>
-          <a:xfrm>
-            <a:off x="8046720" y="1508760"/>
-            <a:ext cx="3413455" cy="4846320"/>
-          </a:xfrm>
-          <a:prstGeom prst="roundRect">
-            <a:avLst/>
-          </a:prstGeom>
-          <a:solidFill>
-            <a:srgbClr val="141C30"/>
-          </a:solidFill>
-          <a:ln w="12700">
-            <a:solidFill>
-              <a:srgbClr val="2D3C5A"/>
-            </a:solidFill>
-          </a:ln>
-        </p:spPr>
-        <p:style>
-          <a:lnRef idx="1">
-            <a:schemeClr val="accent1"/>
-          </a:lnRef>
-          <a:fillRef idx="3">
-            <a:schemeClr val="accent1"/>
-          </a:fillRef>
-          <a:effectRef idx="2">
-            <a:schemeClr val="accent1"/>
-          </a:effectRef>
-          <a:fontRef idx="minor">
-            <a:schemeClr val="lt1"/>
-          </a:fontRef>
-        </p:style>
-        <p:txBody>
-          <a:bodyPr rtlCol="0" anchor="ctr"/>
-          <a:lstStyle/>
-          <a:p>
-            <a:pPr algn="ctr"/>
-          </a:p>
-        </p:txBody>
-      </p:sp>
-      <p:sp>
-        <p:nvSpPr>
-          <p:cNvPr id="12" name="TextBox 11"/>
-          <p:cNvSpPr txBox="1"/>
-          <p:nvPr/>
-        </p:nvSpPr>
-        <p:spPr>
-          <a:xfrm>
-            <a:off x="8183880" y="1645920"/>
-            <a:ext cx="3139135" cy="4572000"/>
-          </a:xfrm>
-          <a:prstGeom prst="rect">
-            <a:avLst/>
-          </a:prstGeom>
-          <a:noFill/>
-        </p:spPr>
-        <p:txBody>
-          <a:bodyPr wrap="square">
-            <a:spAutoFit/>
-          </a:bodyPr>
-          <a:lstStyle/>
-          <a:p>
-            <a:pPr>
-              <a:spcAft>
-                <a:spcPts val="800"/>
-              </a:spcAft>
-              <a:defRPr sz="1200" b="1">
-                <a:solidFill>
-                  <a:srgbClr val="10B981"/>
-                </a:solidFill>
-              </a:defRPr>
-            </a:pPr>
-            <a:r>
-              <a:t>PILLAR 3: DISPATCH &amp; BILLING</a:t>
-            </a:r>
-          </a:p>
-          <a:p>
-            <a:pPr>
-              <a:spcBef>
-                <a:spcPts val="600"/>
-              </a:spcBef>
-              <a:defRPr sz="1100" b="1">
-                <a:solidFill>
-                  <a:srgbClr val="F8FAFC"/>
-                </a:solidFill>
-              </a:defRPr>
-            </a:pPr>
-            <a:r>
-              <a:t>SALES_ORDER_ITEMS</a:t>
-            </a:r>
-          </a:p>
-          <a:p>
-            <a:pPr>
-              <a:spcBef>
-                <a:spcPts val="200"/>
-              </a:spcBef>
-              <a:defRPr sz="950">
-                <a:solidFill>
-                  <a:srgbClr val="A0AFC8"/>
-                </a:solidFill>
-                <a:latin typeface="Consolas"/>
-              </a:defRPr>
-            </a:pPr>
-            <a:r>
-              <a:t>ItemID [PK], SalesOrderID [FK], ProductID [FK], Quantity, UnitPrice</a:t>
-            </a:r>
-          </a:p>
-          <a:p>
-            <a:pPr>
-              <a:spcBef>
-                <a:spcPts val="600"/>
-              </a:spcBef>
-              <a:defRPr sz="1100" b="1">
-                <a:solidFill>
-                  <a:srgbClr val="F8FAFC"/>
-                </a:solidFill>
-              </a:defRPr>
-            </a:pPr>
-            <a:r>
-              <a:t>SHIPMENTS</a:t>
-            </a:r>
-          </a:p>
-          <a:p>
-            <a:pPr>
-              <a:spcBef>
-                <a:spcPts val="200"/>
-              </a:spcBef>
-              <a:defRPr sz="950">
-                <a:solidFill>
-                  <a:srgbClr val="A0AFC8"/>
-                </a:solidFill>
-                <a:latin typeface="Consolas"/>
-              </a:defRPr>
-            </a:pPr>
-            <a:r>
-              <a:t>ShipmentID [PK], SalesOrderID [FK, UNIQUE], WarehouseID [FK], ShipmentDate, Status</a:t>
-            </a:r>
-          </a:p>
-          <a:p>
-            <a:pPr>
-              <a:spcBef>
-                <a:spcPts val="600"/>
-              </a:spcBef>
-              <a:defRPr sz="1100" b="1">
-                <a:solidFill>
-                  <a:srgbClr val="F8FAFC"/>
-                </a:solidFill>
-              </a:defRPr>
-            </a:pPr>
-            <a:r>
-              <a:t>BILLING</a:t>
-            </a:r>
-          </a:p>
-          <a:p>
-            <a:pPr>
-              <a:spcBef>
-                <a:spcPts val="200"/>
-              </a:spcBef>
-              <a:defRPr sz="950">
-                <a:solidFill>
-                  <a:srgbClr val="A0AFC8"/>
-                </a:solidFill>
-                <a:latin typeface="Consolas"/>
-              </a:defRPr>
-            </a:pPr>
-            <a:r>
-              <a:t>BillID [PK], SalesOrderID [FK, UNIQUE], Amount, PaymentMethod, PaymentStatus, PaymentDate</a:t>
+              <a:t>CHECK constraints guarantee positive pricing (UnitPrice &gt; 0) and non-negative stock (Quantity &gt;= 0).</a:t>
             </a:r>
           </a:p>
         </p:txBody>
@@ -15628,7 +16035,7 @@
               </a:defRPr>
             </a:pPr>
             <a:r>
-              <a:t>07 / 18</a:t>
+              <a:t>07 / 21</a:t>
             </a:r>
           </a:p>
         </p:txBody>
@@ -15664,7 +16071,7 @@
               </a:defRPr>
             </a:pPr>
             <a:r>
-              <a:t>Database Normalization Analysis (Part 1: Core Master Entities)</a:t>
+              <a:t>Relational Database Schema (Physical Model)</a:t>
             </a:r>
           </a:p>
         </p:txBody>
@@ -15700,509 +16107,601 @@
               </a:defRPr>
             </a:pPr>
             <a:r>
-              <a:t>Functional dependencies, candidate keys, and BCNF verification for master entities</a:t>
-            </a:r>
-          </a:p>
-        </p:txBody>
-      </p:sp>
-      <p:graphicFrame>
-        <p:nvGraphicFramePr>
-          <p:cNvPr id="7" name="Table 6"/>
-          <p:cNvGraphicFramePr>
-            <a:graphicFrameLocks noGrp="1"/>
-          </p:cNvGraphicFramePr>
-          <p:nvPr/>
-        </p:nvGraphicFramePr>
-        <p:xfrm>
-          <a:off x="731520" y="1645920"/>
-          <a:ext cx="10728655" cy="4480560"/>
-        </p:xfrm>
-        <a:graphic>
-          <a:graphicData uri="http://schemas.openxmlformats.org/drawingml/2006/table">
-            <a:tbl>
-              <a:tblPr firstRow="1" bandRow="1">
-                <a:tableStyleId>{5C22544A-7EE6-4342-B048-85BDC9FD1C3A}</a:tableStyleId>
-              </a:tblPr>
-              <a:tblGrid>
-                <a:gridCol w="1645920"/>
-                <a:gridCol w="2011680"/>
-                <a:gridCol w="1463040"/>
-                <a:gridCol w="5608015"/>
-              </a:tblGrid>
-              <a:tr h="896112">
-                <a:tc>
-                  <a:txBody>
-                    <a:bodyPr/>
-                    <a:lstStyle/>
-                    <a:p>
-                      <a:pPr>
-                        <a:defRPr sz="1100" b="1">
-                          <a:solidFill>
-                            <a:srgbClr val="F8FAFC"/>
-                          </a:solidFill>
-                        </a:defRPr>
-                      </a:pPr>
-                      <a:r>
-                        <a:t>Table</a:t>
-                      </a:r>
-                    </a:p>
-                  </a:txBody>
-                  <a:tcPr>
-                    <a:solidFill>
-                      <a:srgbClr val="1A366E"/>
-                    </a:solidFill>
-                  </a:tcPr>
-                </a:tc>
-                <a:tc>
-                  <a:txBody>
-                    <a:bodyPr/>
-                    <a:lstStyle/>
-                    <a:p>
-                      <a:pPr>
-                        <a:defRPr sz="1100" b="1">
-                          <a:solidFill>
-                            <a:srgbClr val="F8FAFC"/>
-                          </a:solidFill>
-                        </a:defRPr>
-                      </a:pPr>
-                      <a:r>
-                        <a:t>Candidate Keys</a:t>
-                      </a:r>
-                    </a:p>
-                  </a:txBody>
-                  <a:tcPr>
-                    <a:solidFill>
-                      <a:srgbClr val="1A366E"/>
-                    </a:solidFill>
-                  </a:tcPr>
-                </a:tc>
-                <a:tc>
-                  <a:txBody>
-                    <a:bodyPr/>
-                    <a:lstStyle/>
-                    <a:p>
-                      <a:pPr>
-                        <a:defRPr sz="1100" b="1">
-                          <a:solidFill>
-                            <a:srgbClr val="F8FAFC"/>
-                          </a:solidFill>
-                        </a:defRPr>
-                      </a:pPr>
-                      <a:r>
-                        <a:t>Normal Form</a:t>
-                      </a:r>
-                    </a:p>
-                  </a:txBody>
-                  <a:tcPr>
-                    <a:solidFill>
-                      <a:srgbClr val="1A366E"/>
-                    </a:solidFill>
-                  </a:tcPr>
-                </a:tc>
-                <a:tc>
-                  <a:txBody>
-                    <a:bodyPr/>
-                    <a:lstStyle/>
-                    <a:p>
-                      <a:pPr>
-                        <a:defRPr sz="1100" b="1">
-                          <a:solidFill>
-                            <a:srgbClr val="F8FAFC"/>
-                          </a:solidFill>
-                        </a:defRPr>
-                      </a:pPr>
-                      <a:r>
-                        <a:t>Representative Functional Dependency / Proof</a:t>
-                      </a:r>
-                    </a:p>
-                  </a:txBody>
-                  <a:tcPr>
-                    <a:solidFill>
-                      <a:srgbClr val="1A366E"/>
-                    </a:solidFill>
-                  </a:tcPr>
-                </a:tc>
-              </a:tr>
-              <a:tr h="896112">
-                <a:tc>
-                  <a:txBody>
-                    <a:bodyPr/>
-                    <a:lstStyle/>
-                    <a:p>
-                      <a:pPr>
-                        <a:defRPr sz="1000" b="1">
-                          <a:solidFill>
-                            <a:srgbClr val="06B6D4"/>
-                          </a:solidFill>
-                        </a:defRPr>
-                      </a:pPr>
-                      <a:r>
-                        <a:t>users</a:t>
-                      </a:r>
-                    </a:p>
-                  </a:txBody>
-                  <a:tcPr>
-                    <a:solidFill>
-                      <a:srgbClr val="141C30"/>
-                    </a:solidFill>
-                  </a:tcPr>
-                </a:tc>
-                <a:tc>
-                  <a:txBody>
-                    <a:bodyPr/>
-                    <a:lstStyle/>
-                    <a:p>
-                      <a:pPr>
-                        <a:defRPr sz="1000">
-                          <a:solidFill>
-                            <a:srgbClr val="F8FAFC"/>
-                          </a:solidFill>
-                        </a:defRPr>
-                      </a:pPr>
-                      <a:r>
-                        <a:t>UserID; Email</a:t>
-                      </a:r>
-                    </a:p>
-                  </a:txBody>
-                  <a:tcPr>
-                    <a:solidFill>
-                      <a:srgbClr val="141C30"/>
-                    </a:solidFill>
-                  </a:tcPr>
-                </a:tc>
-                <a:tc>
-                  <a:txBody>
-                    <a:bodyPr/>
-                    <a:lstStyle/>
-                    <a:p>
-                      <a:pPr>
-                        <a:defRPr sz="1000" b="1">
-                          <a:solidFill>
-                            <a:srgbClr val="10B981"/>
-                          </a:solidFill>
-                        </a:defRPr>
-                      </a:pPr>
-                      <a:r>
-                        <a:t>BCNF</a:t>
-                      </a:r>
-                    </a:p>
-                  </a:txBody>
-                  <a:tcPr>
-                    <a:solidFill>
-                      <a:srgbClr val="141C30"/>
-                    </a:solidFill>
-                  </a:tcPr>
-                </a:tc>
-                <a:tc>
-                  <a:txBody>
-                    <a:bodyPr/>
-                    <a:lstStyle/>
-                    <a:p>
-                      <a:pPr>
-                        <a:defRPr sz="1000">
-                          <a:solidFill>
-                            <a:srgbClr val="A0AFC8"/>
-                          </a:solidFill>
-                        </a:defRPr>
-                      </a:pPr>
-                      <a:r>
-                        <a:t>UserID → Name, Email, Password, Role; Email → UserID, Name, Password, Role. Both determinants are superkeys. No non-key attributes determine other attributes.</a:t>
-                      </a:r>
-                    </a:p>
-                  </a:txBody>
-                  <a:tcPr>
-                    <a:solidFill>
-                      <a:srgbClr val="141C30"/>
-                    </a:solidFill>
-                  </a:tcPr>
-                </a:tc>
-              </a:tr>
-              <a:tr h="896112">
-                <a:tc>
-                  <a:txBody>
-                    <a:bodyPr/>
-                    <a:lstStyle/>
-                    <a:p>
-                      <a:pPr>
-                        <a:defRPr sz="1000" b="1">
-                          <a:solidFill>
-                            <a:srgbClr val="06B6D4"/>
-                          </a:solidFill>
-                        </a:defRPr>
-                      </a:pPr>
-                      <a:r>
-                        <a:t>suppliers</a:t>
-                      </a:r>
-                    </a:p>
-                  </a:txBody>
-                  <a:tcPr>
-                    <a:solidFill>
-                      <a:srgbClr val="0F1626"/>
-                    </a:solidFill>
-                  </a:tcPr>
-                </a:tc>
-                <a:tc>
-                  <a:txBody>
-                    <a:bodyPr/>
-                    <a:lstStyle/>
-                    <a:p>
-                      <a:pPr>
-                        <a:defRPr sz="1000">
-                          <a:solidFill>
-                            <a:srgbClr val="F8FAFC"/>
-                          </a:solidFill>
-                        </a:defRPr>
-                      </a:pPr>
-                      <a:r>
-                        <a:t>SupplierID; Email</a:t>
-                      </a:r>
-                    </a:p>
-                  </a:txBody>
-                  <a:tcPr>
-                    <a:solidFill>
-                      <a:srgbClr val="0F1626"/>
-                    </a:solidFill>
-                  </a:tcPr>
-                </a:tc>
-                <a:tc>
-                  <a:txBody>
-                    <a:bodyPr/>
-                    <a:lstStyle/>
-                    <a:p>
-                      <a:pPr>
-                        <a:defRPr sz="1000" b="1">
-                          <a:solidFill>
-                            <a:srgbClr val="10B981"/>
-                          </a:solidFill>
-                        </a:defRPr>
-                      </a:pPr>
-                      <a:r>
-                        <a:t>BCNF</a:t>
-                      </a:r>
-                    </a:p>
-                  </a:txBody>
-                  <a:tcPr>
-                    <a:solidFill>
-                      <a:srgbClr val="0F1626"/>
-                    </a:solidFill>
-                  </a:tcPr>
-                </a:tc>
-                <a:tc>
-                  <a:txBody>
-                    <a:bodyPr/>
-                    <a:lstStyle/>
-                    <a:p>
-                      <a:pPr>
-                        <a:defRPr sz="1000">
-                          <a:solidFill>
-                            <a:srgbClr val="A0AFC8"/>
-                          </a:solidFill>
-                        </a:defRPr>
-                      </a:pPr>
-                      <a:r>
-                        <a:t>SupplierID → SupplierName, Phone, Email, Address; Email → SupplierID. All attributes are fully functionally dependent on candidate keys. No partial or transitive dependencies.</a:t>
-                      </a:r>
-                    </a:p>
-                  </a:txBody>
-                  <a:tcPr>
-                    <a:solidFill>
-                      <a:srgbClr val="0F1626"/>
-                    </a:solidFill>
-                  </a:tcPr>
-                </a:tc>
-              </a:tr>
-              <a:tr h="896112">
-                <a:tc>
-                  <a:txBody>
-                    <a:bodyPr/>
-                    <a:lstStyle/>
-                    <a:p>
-                      <a:pPr>
-                        <a:defRPr sz="1000" b="1">
-                          <a:solidFill>
-                            <a:srgbClr val="06B6D4"/>
-                          </a:solidFill>
-                        </a:defRPr>
-                      </a:pPr>
-                      <a:r>
-                        <a:t>products</a:t>
-                      </a:r>
-                    </a:p>
-                  </a:txBody>
-                  <a:tcPr>
-                    <a:solidFill>
-                      <a:srgbClr val="141C30"/>
-                    </a:solidFill>
-                  </a:tcPr>
-                </a:tc>
-                <a:tc>
-                  <a:txBody>
-                    <a:bodyPr/>
-                    <a:lstStyle/>
-                    <a:p>
-                      <a:pPr>
-                        <a:defRPr sz="1000">
-                          <a:solidFill>
-                            <a:srgbClr val="F8FAFC"/>
-                          </a:solidFill>
-                        </a:defRPr>
-                      </a:pPr>
-                      <a:r>
-                        <a:t>ProductID</a:t>
-                      </a:r>
-                    </a:p>
-                  </a:txBody>
-                  <a:tcPr>
-                    <a:solidFill>
-                      <a:srgbClr val="141C30"/>
-                    </a:solidFill>
-                  </a:tcPr>
-                </a:tc>
-                <a:tc>
-                  <a:txBody>
-                    <a:bodyPr/>
-                    <a:lstStyle/>
-                    <a:p>
-                      <a:pPr>
-                        <a:defRPr sz="1000" b="1">
-                          <a:solidFill>
-                            <a:srgbClr val="10B981"/>
-                          </a:solidFill>
-                        </a:defRPr>
-                      </a:pPr>
-                      <a:r>
-                        <a:t>BCNF</a:t>
-                      </a:r>
-                    </a:p>
-                  </a:txBody>
-                  <a:tcPr>
-                    <a:solidFill>
-                      <a:srgbClr val="141C30"/>
-                    </a:solidFill>
-                  </a:tcPr>
-                </a:tc>
-                <a:tc>
-                  <a:txBody>
-                    <a:bodyPr/>
-                    <a:lstStyle/>
-                    <a:p>
-                      <a:pPr>
-                        <a:defRPr sz="1000">
-                          <a:solidFill>
-                            <a:srgbClr val="A0AFC8"/>
-                          </a:solidFill>
-                        </a:defRPr>
-                      </a:pPr>
-                      <a:r>
-                        <a:t>ProductID → ProductName, Description, Category, UnitPrice, SupplierID. Supplier attributes are factored into suppliers table, preventing transitive dependency (ProductID ↛ SupplierName).</a:t>
-                      </a:r>
-                    </a:p>
-                  </a:txBody>
-                  <a:tcPr>
-                    <a:solidFill>
-                      <a:srgbClr val="141C30"/>
-                    </a:solidFill>
-                  </a:tcPr>
-                </a:tc>
-              </a:tr>
-              <a:tr h="896112">
-                <a:tc>
-                  <a:txBody>
-                    <a:bodyPr/>
-                    <a:lstStyle/>
-                    <a:p>
-                      <a:pPr>
-                        <a:defRPr sz="1000" b="1">
-                          <a:solidFill>
-                            <a:srgbClr val="06B6D4"/>
-                          </a:solidFill>
-                        </a:defRPr>
-                      </a:pPr>
-                      <a:r>
-                        <a:t>warehouses</a:t>
-                      </a:r>
-                    </a:p>
-                  </a:txBody>
-                  <a:tcPr>
-                    <a:solidFill>
-                      <a:srgbClr val="0F1626"/>
-                    </a:solidFill>
-                  </a:tcPr>
-                </a:tc>
-                <a:tc>
-                  <a:txBody>
-                    <a:bodyPr/>
-                    <a:lstStyle/>
-                    <a:p>
-                      <a:pPr>
-                        <a:defRPr sz="1000">
-                          <a:solidFill>
-                            <a:srgbClr val="F8FAFC"/>
-                          </a:solidFill>
-                        </a:defRPr>
-                      </a:pPr>
-                      <a:r>
-                        <a:t>WarehouseID</a:t>
-                      </a:r>
-                    </a:p>
-                  </a:txBody>
-                  <a:tcPr>
-                    <a:solidFill>
-                      <a:srgbClr val="0F1626"/>
-                    </a:solidFill>
-                  </a:tcPr>
-                </a:tc>
-                <a:tc>
-                  <a:txBody>
-                    <a:bodyPr/>
-                    <a:lstStyle/>
-                    <a:p>
-                      <a:pPr>
-                        <a:defRPr sz="1000" b="1">
-                          <a:solidFill>
-                            <a:srgbClr val="10B981"/>
-                          </a:solidFill>
-                        </a:defRPr>
-                      </a:pPr>
-                      <a:r>
-                        <a:t>BCNF</a:t>
-                      </a:r>
-                    </a:p>
-                  </a:txBody>
-                  <a:tcPr>
-                    <a:solidFill>
-                      <a:srgbClr val="0F1626"/>
-                    </a:solidFill>
-                  </a:tcPr>
-                </a:tc>
-                <a:tc>
-                  <a:txBody>
-                    <a:bodyPr/>
-                    <a:lstStyle/>
-                    <a:p>
-                      <a:pPr>
-                        <a:defRPr sz="1000">
-                          <a:solidFill>
-                            <a:srgbClr val="A0AFC8"/>
-                          </a:solidFill>
-                        </a:defRPr>
-                      </a:pPr>
-                      <a:r>
-                        <a:t>WarehouseID → WarehouseName, Location, Capacity. The determinant WarehouseID is a primary key. All non-key attributes are atomic and independently scalable.</a:t>
-                      </a:r>
-                    </a:p>
-                  </a:txBody>
-                  <a:tcPr>
-                    <a:solidFill>
-                      <a:srgbClr val="0F1626"/>
-                    </a:solidFill>
-                  </a:tcPr>
-                </a:tc>
-              </a:tr>
-            </a:tbl>
-          </a:graphicData>
-        </a:graphic>
-      </p:graphicFrame>
+              <a:t>11 normalized tables categorized into Master Data, Inventory/Orders, and Billing Pillars</a:t>
+            </a:r>
+          </a:p>
+        </p:txBody>
+      </p:sp>
+      <p:sp>
+        <p:nvSpPr>
+          <p:cNvPr id="7" name="Rounded Rectangle 6"/>
+          <p:cNvSpPr/>
+          <p:nvPr/>
+        </p:nvSpPr>
+        <p:spPr>
+          <a:xfrm>
+            <a:off x="731520" y="1508760"/>
+            <a:ext cx="3413455" cy="4846320"/>
+          </a:xfrm>
+          <a:prstGeom prst="roundRect">
+            <a:avLst/>
+          </a:prstGeom>
+          <a:solidFill>
+            <a:srgbClr val="141C30"/>
+          </a:solidFill>
+          <a:ln w="12700">
+            <a:solidFill>
+              <a:srgbClr val="2D3C5A"/>
+            </a:solidFill>
+          </a:ln>
+        </p:spPr>
+        <p:style>
+          <a:lnRef idx="1">
+            <a:schemeClr val="accent1"/>
+          </a:lnRef>
+          <a:fillRef idx="3">
+            <a:schemeClr val="accent1"/>
+          </a:fillRef>
+          <a:effectRef idx="2">
+            <a:schemeClr val="accent1"/>
+          </a:effectRef>
+          <a:fontRef idx="minor">
+            <a:schemeClr val="lt1"/>
+          </a:fontRef>
+        </p:style>
+        <p:txBody>
+          <a:bodyPr rtlCol="0" anchor="ctr"/>
+          <a:lstStyle/>
+          <a:p>
+            <a:pPr algn="ctr"/>
+          </a:p>
+        </p:txBody>
+      </p:sp>
+      <p:sp>
+        <p:nvSpPr>
+          <p:cNvPr id="8" name="TextBox 7"/>
+          <p:cNvSpPr txBox="1"/>
+          <p:nvPr/>
+        </p:nvSpPr>
+        <p:spPr>
+          <a:xfrm>
+            <a:off x="868680" y="1645920"/>
+            <a:ext cx="3139135" cy="4572000"/>
+          </a:xfrm>
+          <a:prstGeom prst="rect">
+            <a:avLst/>
+          </a:prstGeom>
+          <a:noFill/>
+        </p:spPr>
+        <p:txBody>
+          <a:bodyPr wrap="square">
+            <a:spAutoFit/>
+          </a:bodyPr>
+          <a:lstStyle/>
+          <a:p>
+            <a:pPr>
+              <a:spcAft>
+                <a:spcPts val="800"/>
+              </a:spcAft>
+              <a:defRPr sz="1200" b="1">
+                <a:solidFill>
+                  <a:srgbClr val="06B6D4"/>
+                </a:solidFill>
+              </a:defRPr>
+            </a:pPr>
+            <a:r>
+              <a:t>PILLAR 1: MASTER DATA</a:t>
+            </a:r>
+          </a:p>
+          <a:p>
+            <a:pPr>
+              <a:spcBef>
+                <a:spcPts val="600"/>
+              </a:spcBef>
+              <a:defRPr sz="1100" b="1">
+                <a:solidFill>
+                  <a:srgbClr val="F8FAFC"/>
+                </a:solidFill>
+              </a:defRPr>
+            </a:pPr>
+            <a:r>
+              <a:t>USERS</a:t>
+            </a:r>
+          </a:p>
+          <a:p>
+            <a:pPr>
+              <a:spcBef>
+                <a:spcPts val="200"/>
+              </a:spcBef>
+              <a:defRPr sz="950">
+                <a:solidFill>
+                  <a:srgbClr val="A0AFC8"/>
+                </a:solidFill>
+                <a:latin typeface="Consolas"/>
+              </a:defRPr>
+            </a:pPr>
+            <a:r>
+              <a:t>UserID [PK], Name, Email [UNIQUE], Password, Role</a:t>
+            </a:r>
+          </a:p>
+          <a:p>
+            <a:pPr>
+              <a:spcBef>
+                <a:spcPts val="600"/>
+              </a:spcBef>
+              <a:defRPr sz="1100" b="1">
+                <a:solidFill>
+                  <a:srgbClr val="F8FAFC"/>
+                </a:solidFill>
+              </a:defRPr>
+            </a:pPr>
+            <a:r>
+              <a:t>SUPPLIERS</a:t>
+            </a:r>
+          </a:p>
+          <a:p>
+            <a:pPr>
+              <a:spcBef>
+                <a:spcPts val="200"/>
+              </a:spcBef>
+              <a:defRPr sz="950">
+                <a:solidFill>
+                  <a:srgbClr val="A0AFC8"/>
+                </a:solidFill>
+                <a:latin typeface="Consolas"/>
+              </a:defRPr>
+            </a:pPr>
+            <a:r>
+              <a:t>SupplierID [PK], SupplierName, Phone, Email [UNIQUE], Address</a:t>
+            </a:r>
+          </a:p>
+          <a:p>
+            <a:pPr>
+              <a:spcBef>
+                <a:spcPts val="600"/>
+              </a:spcBef>
+              <a:defRPr sz="1100" b="1">
+                <a:solidFill>
+                  <a:srgbClr val="F8FAFC"/>
+                </a:solidFill>
+              </a:defRPr>
+            </a:pPr>
+            <a:r>
+              <a:t>PRODUCTS</a:t>
+            </a:r>
+          </a:p>
+          <a:p>
+            <a:pPr>
+              <a:spcBef>
+                <a:spcPts val="200"/>
+              </a:spcBef>
+              <a:defRPr sz="950">
+                <a:solidFill>
+                  <a:srgbClr val="A0AFC8"/>
+                </a:solidFill>
+                <a:latin typeface="Consolas"/>
+              </a:defRPr>
+            </a:pPr>
+            <a:r>
+              <a:t>ProductID [PK], ProductName, Description, Category, UnitPrice, SupplierID [FK]</a:t>
+            </a:r>
+          </a:p>
+          <a:p>
+            <a:pPr>
+              <a:spcBef>
+                <a:spcPts val="600"/>
+              </a:spcBef>
+              <a:defRPr sz="1100" b="1">
+                <a:solidFill>
+                  <a:srgbClr val="F8FAFC"/>
+                </a:solidFill>
+              </a:defRPr>
+            </a:pPr>
+            <a:r>
+              <a:t>WAREHOUSES</a:t>
+            </a:r>
+          </a:p>
+          <a:p>
+            <a:pPr>
+              <a:spcBef>
+                <a:spcPts val="200"/>
+              </a:spcBef>
+              <a:defRPr sz="950">
+                <a:solidFill>
+                  <a:srgbClr val="A0AFC8"/>
+                </a:solidFill>
+                <a:latin typeface="Consolas"/>
+              </a:defRPr>
+            </a:pPr>
+            <a:r>
+              <a:t>WarehouseID [PK], WarehouseName, Location, Capacity</a:t>
+            </a:r>
+          </a:p>
+        </p:txBody>
+      </p:sp>
+      <p:sp>
+        <p:nvSpPr>
+          <p:cNvPr id="9" name="Rounded Rectangle 8"/>
+          <p:cNvSpPr/>
+          <p:nvPr/>
+        </p:nvSpPr>
+        <p:spPr>
+          <a:xfrm>
+            <a:off x="4389120" y="1508760"/>
+            <a:ext cx="3413455" cy="4846320"/>
+          </a:xfrm>
+          <a:prstGeom prst="roundRect">
+            <a:avLst/>
+          </a:prstGeom>
+          <a:solidFill>
+            <a:srgbClr val="141C30"/>
+          </a:solidFill>
+          <a:ln w="12700">
+            <a:solidFill>
+              <a:srgbClr val="2D3C5A"/>
+            </a:solidFill>
+          </a:ln>
+        </p:spPr>
+        <p:style>
+          <a:lnRef idx="1">
+            <a:schemeClr val="accent1"/>
+          </a:lnRef>
+          <a:fillRef idx="3">
+            <a:schemeClr val="accent1"/>
+          </a:fillRef>
+          <a:effectRef idx="2">
+            <a:schemeClr val="accent1"/>
+          </a:effectRef>
+          <a:fontRef idx="minor">
+            <a:schemeClr val="lt1"/>
+          </a:fontRef>
+        </p:style>
+        <p:txBody>
+          <a:bodyPr rtlCol="0" anchor="ctr"/>
+          <a:lstStyle/>
+          <a:p>
+            <a:pPr algn="ctr"/>
+          </a:p>
+        </p:txBody>
+      </p:sp>
+      <p:sp>
+        <p:nvSpPr>
+          <p:cNvPr id="10" name="TextBox 9"/>
+          <p:cNvSpPr txBox="1"/>
+          <p:nvPr/>
+        </p:nvSpPr>
+        <p:spPr>
+          <a:xfrm>
+            <a:off x="4526280" y="1645920"/>
+            <a:ext cx="3139135" cy="4572000"/>
+          </a:xfrm>
+          <a:prstGeom prst="rect">
+            <a:avLst/>
+          </a:prstGeom>
+          <a:noFill/>
+        </p:spPr>
+        <p:txBody>
+          <a:bodyPr wrap="square">
+            <a:spAutoFit/>
+          </a:bodyPr>
+          <a:lstStyle/>
+          <a:p>
+            <a:pPr>
+              <a:spcAft>
+                <a:spcPts val="800"/>
+              </a:spcAft>
+              <a:defRPr sz="1200" b="1">
+                <a:solidFill>
+                  <a:srgbClr val="F59E0B"/>
+                </a:solidFill>
+              </a:defRPr>
+            </a:pPr>
+            <a:r>
+              <a:t>PILLAR 2: INVENTORY &amp; ORDERS</a:t>
+            </a:r>
+          </a:p>
+          <a:p>
+            <a:pPr>
+              <a:spcBef>
+                <a:spcPts val="600"/>
+              </a:spcBef>
+              <a:defRPr sz="1100" b="1">
+                <a:solidFill>
+                  <a:srgbClr val="F8FAFC"/>
+                </a:solidFill>
+              </a:defRPr>
+            </a:pPr>
+            <a:r>
+              <a:t>INVENTORY</a:t>
+            </a:r>
+          </a:p>
+          <a:p>
+            <a:pPr>
+              <a:spcBef>
+                <a:spcPts val="200"/>
+              </a:spcBef>
+              <a:defRPr sz="950">
+                <a:solidFill>
+                  <a:srgbClr val="A0AFC8"/>
+                </a:solidFill>
+                <a:latin typeface="Consolas"/>
+              </a:defRPr>
+            </a:pPr>
+            <a:r>
+              <a:t>InventoryID [PK], ProductID [FK], WarehouseID [FK], Quantity, MinimumStock</a:t>
+            </a:r>
+          </a:p>
+          <a:p>
+            <a:pPr>
+              <a:spcBef>
+                <a:spcPts val="600"/>
+              </a:spcBef>
+              <a:defRPr sz="1100" b="1">
+                <a:solidFill>
+                  <a:srgbClr val="F8FAFC"/>
+                </a:solidFill>
+              </a:defRPr>
+            </a:pPr>
+            <a:r>
+              <a:t>PURCHASE_ORDERS</a:t>
+            </a:r>
+          </a:p>
+          <a:p>
+            <a:pPr>
+              <a:spcBef>
+                <a:spcPts val="200"/>
+              </a:spcBef>
+              <a:defRPr sz="950">
+                <a:solidFill>
+                  <a:srgbClr val="A0AFC8"/>
+                </a:solidFill>
+                <a:latin typeface="Consolas"/>
+              </a:defRPr>
+            </a:pPr>
+            <a:r>
+              <a:t>PurchaseOrderID [PK], SupplierID [FK], WarehouseID [FK], OrderDate, Status, TotalAmount</a:t>
+            </a:r>
+          </a:p>
+          <a:p>
+            <a:pPr>
+              <a:spcBef>
+                <a:spcPts val="600"/>
+              </a:spcBef>
+              <a:defRPr sz="1100" b="1">
+                <a:solidFill>
+                  <a:srgbClr val="F8FAFC"/>
+                </a:solidFill>
+              </a:defRPr>
+            </a:pPr>
+            <a:r>
+              <a:t>PURCHASE_ORDER_ITEMS</a:t>
+            </a:r>
+          </a:p>
+          <a:p>
+            <a:pPr>
+              <a:spcBef>
+                <a:spcPts val="200"/>
+              </a:spcBef>
+              <a:defRPr sz="950">
+                <a:solidFill>
+                  <a:srgbClr val="A0AFC8"/>
+                </a:solidFill>
+                <a:latin typeface="Consolas"/>
+              </a:defRPr>
+            </a:pPr>
+            <a:r>
+              <a:t>ItemID [PK], PurchaseOrderID [FK], ProductID [FK], Quantity, UnitPrice</a:t>
+            </a:r>
+          </a:p>
+          <a:p>
+            <a:pPr>
+              <a:spcBef>
+                <a:spcPts val="600"/>
+              </a:spcBef>
+              <a:defRPr sz="1100" b="1">
+                <a:solidFill>
+                  <a:srgbClr val="F8FAFC"/>
+                </a:solidFill>
+              </a:defRPr>
+            </a:pPr>
+            <a:r>
+              <a:t>SALES_ORDERS</a:t>
+            </a:r>
+          </a:p>
+          <a:p>
+            <a:pPr>
+              <a:spcBef>
+                <a:spcPts val="200"/>
+              </a:spcBef>
+              <a:defRPr sz="950">
+                <a:solidFill>
+                  <a:srgbClr val="A0AFC8"/>
+                </a:solidFill>
+                <a:latin typeface="Consolas"/>
+              </a:defRPr>
+            </a:pPr>
+            <a:r>
+              <a:t>SalesOrderID [PK], CustomerName, WarehouseID [FK], OrderDate, Status, TotalAmount</a:t>
+            </a:r>
+          </a:p>
+        </p:txBody>
+      </p:sp>
+      <p:sp>
+        <p:nvSpPr>
+          <p:cNvPr id="11" name="Rounded Rectangle 10"/>
+          <p:cNvSpPr/>
+          <p:nvPr/>
+        </p:nvSpPr>
+        <p:spPr>
+          <a:xfrm>
+            <a:off x="8046720" y="1508760"/>
+            <a:ext cx="3413455" cy="4846320"/>
+          </a:xfrm>
+          <a:prstGeom prst="roundRect">
+            <a:avLst/>
+          </a:prstGeom>
+          <a:solidFill>
+            <a:srgbClr val="141C30"/>
+          </a:solidFill>
+          <a:ln w="12700">
+            <a:solidFill>
+              <a:srgbClr val="2D3C5A"/>
+            </a:solidFill>
+          </a:ln>
+        </p:spPr>
+        <p:style>
+          <a:lnRef idx="1">
+            <a:schemeClr val="accent1"/>
+          </a:lnRef>
+          <a:fillRef idx="3">
+            <a:schemeClr val="accent1"/>
+          </a:fillRef>
+          <a:effectRef idx="2">
+            <a:schemeClr val="accent1"/>
+          </a:effectRef>
+          <a:fontRef idx="minor">
+            <a:schemeClr val="lt1"/>
+          </a:fontRef>
+        </p:style>
+        <p:txBody>
+          <a:bodyPr rtlCol="0" anchor="ctr"/>
+          <a:lstStyle/>
+          <a:p>
+            <a:pPr algn="ctr"/>
+          </a:p>
+        </p:txBody>
+      </p:sp>
+      <p:sp>
+        <p:nvSpPr>
+          <p:cNvPr id="12" name="TextBox 11"/>
+          <p:cNvSpPr txBox="1"/>
+          <p:nvPr/>
+        </p:nvSpPr>
+        <p:spPr>
+          <a:xfrm>
+            <a:off x="8183880" y="1645920"/>
+            <a:ext cx="3139135" cy="4572000"/>
+          </a:xfrm>
+          <a:prstGeom prst="rect">
+            <a:avLst/>
+          </a:prstGeom>
+          <a:noFill/>
+        </p:spPr>
+        <p:txBody>
+          <a:bodyPr wrap="square">
+            <a:spAutoFit/>
+          </a:bodyPr>
+          <a:lstStyle/>
+          <a:p>
+            <a:pPr>
+              <a:spcAft>
+                <a:spcPts val="800"/>
+              </a:spcAft>
+              <a:defRPr sz="1200" b="1">
+                <a:solidFill>
+                  <a:srgbClr val="10B981"/>
+                </a:solidFill>
+              </a:defRPr>
+            </a:pPr>
+            <a:r>
+              <a:t>PILLAR 3: DISPATCH &amp; BILLING</a:t>
+            </a:r>
+          </a:p>
+          <a:p>
+            <a:pPr>
+              <a:spcBef>
+                <a:spcPts val="600"/>
+              </a:spcBef>
+              <a:defRPr sz="1100" b="1">
+                <a:solidFill>
+                  <a:srgbClr val="F8FAFC"/>
+                </a:solidFill>
+              </a:defRPr>
+            </a:pPr>
+            <a:r>
+              <a:t>SALES_ORDER_ITEMS</a:t>
+            </a:r>
+          </a:p>
+          <a:p>
+            <a:pPr>
+              <a:spcBef>
+                <a:spcPts val="200"/>
+              </a:spcBef>
+              <a:defRPr sz="950">
+                <a:solidFill>
+                  <a:srgbClr val="A0AFC8"/>
+                </a:solidFill>
+                <a:latin typeface="Consolas"/>
+              </a:defRPr>
+            </a:pPr>
+            <a:r>
+              <a:t>ItemID [PK], SalesOrderID [FK], ProductID [FK], Quantity, UnitPrice</a:t>
+            </a:r>
+          </a:p>
+          <a:p>
+            <a:pPr>
+              <a:spcBef>
+                <a:spcPts val="600"/>
+              </a:spcBef>
+              <a:defRPr sz="1100" b="1">
+                <a:solidFill>
+                  <a:srgbClr val="F8FAFC"/>
+                </a:solidFill>
+              </a:defRPr>
+            </a:pPr>
+            <a:r>
+              <a:t>SHIPMENTS</a:t>
+            </a:r>
+          </a:p>
+          <a:p>
+            <a:pPr>
+              <a:spcBef>
+                <a:spcPts val="200"/>
+              </a:spcBef>
+              <a:defRPr sz="950">
+                <a:solidFill>
+                  <a:srgbClr val="A0AFC8"/>
+                </a:solidFill>
+                <a:latin typeface="Consolas"/>
+              </a:defRPr>
+            </a:pPr>
+            <a:r>
+              <a:t>ShipmentID [PK], SalesOrderID [FK, UNIQUE], WarehouseID [FK], ShipmentDate, Status</a:t>
+            </a:r>
+          </a:p>
+          <a:p>
+            <a:pPr>
+              <a:spcBef>
+                <a:spcPts val="600"/>
+              </a:spcBef>
+              <a:defRPr sz="1100" b="1">
+                <a:solidFill>
+                  <a:srgbClr val="F8FAFC"/>
+                </a:solidFill>
+              </a:defRPr>
+            </a:pPr>
+            <a:r>
+              <a:t>BILLING</a:t>
+            </a:r>
+          </a:p>
+          <a:p>
+            <a:pPr>
+              <a:spcBef>
+                <a:spcPts val="200"/>
+              </a:spcBef>
+              <a:defRPr sz="950">
+                <a:solidFill>
+                  <a:srgbClr val="A0AFC8"/>
+                </a:solidFill>
+                <a:latin typeface="Consolas"/>
+              </a:defRPr>
+            </a:pPr>
+            <a:r>
+              <a:t>BillID [PK], SalesOrderID [FK, UNIQUE], Amount, PaymentMethod, PaymentStatus, PaymentDate</a:t>
+            </a:r>
+          </a:p>
+        </p:txBody>
+      </p:sp>
     </p:spTree>
   </p:cSld>
   <p:clrMapOvr>

--- a/StockMaster_Final_Review_Presentation.pptx
+++ b/StockMaster_Final_Review_Presentation.pptx
@@ -12965,59 +12965,14 @@
       </p:sp>
       <p:sp>
         <p:nvSpPr>
-          <p:cNvPr id="4" name="Rounded Rectangle 3"/>
-          <p:cNvSpPr/>
-          <p:nvPr/>
-        </p:nvSpPr>
-        <p:spPr>
-          <a:xfrm>
-            <a:off x="1371600" y="1280160"/>
-            <a:ext cx="9448495" cy="4297680"/>
-          </a:xfrm>
-          <a:prstGeom prst="roundRect">
-            <a:avLst/>
-          </a:prstGeom>
-          <a:solidFill>
-            <a:srgbClr val="FFFFFF"/>
-          </a:solidFill>
-          <a:ln w="12700">
-            <a:solidFill>
-              <a:srgbClr val="1E3A8A"/>
-            </a:solidFill>
-          </a:ln>
-        </p:spPr>
-        <p:style>
-          <a:lnRef idx="1">
-            <a:schemeClr val="accent1"/>
-          </a:lnRef>
-          <a:fillRef idx="3">
-            <a:schemeClr val="accent1"/>
-          </a:fillRef>
-          <a:effectRef idx="2">
-            <a:schemeClr val="accent1"/>
-          </a:effectRef>
-          <a:fontRef idx="minor">
-            <a:schemeClr val="lt1"/>
-          </a:fontRef>
-        </p:style>
-        <p:txBody>
-          <a:bodyPr rtlCol="0" anchor="ctr"/>
-          <a:lstStyle/>
-          <a:p>
-            <a:pPr algn="ctr"/>
-          </a:p>
-        </p:txBody>
-      </p:sp>
-      <p:sp>
-        <p:nvSpPr>
-          <p:cNvPr id="5" name="TextBox 4"/>
+          <p:cNvPr id="4" name="TextBox 3"/>
           <p:cNvSpPr txBox="1"/>
           <p:nvPr/>
         </p:nvSpPr>
         <p:spPr>
           <a:xfrm>
-            <a:off x="1645920" y="1554480"/>
-            <a:ext cx="8899855" cy="3749039"/>
+            <a:off x="914400" y="2560320"/>
+            <a:ext cx="10362895" cy="1645920"/>
           </a:xfrm>
           <a:prstGeom prst="rect">
             <a:avLst/>
@@ -13031,7 +12986,7 @@
           <a:lstStyle/>
           <a:p>
             <a:pPr algn="ctr">
-              <a:defRPr sz="3600" b="1">
+              <a:defRPr sz="5400" b="1">
                 <a:solidFill>
                   <a:srgbClr val="1E3A8A"/>
                 </a:solidFill>
@@ -13039,83 +12994,7 @@
               </a:defRPr>
             </a:pPr>
             <a:r>
-              <a:t>STOCK MASTER</a:t>
-            </a:r>
-          </a:p>
-          <a:p>
-            <a:pPr algn="ctr">
-              <a:spcBef>
-                <a:spcPts val="400"/>
-              </a:spcBef>
-              <a:defRPr sz="1500">
-                <a:solidFill>
-                  <a:srgbClr val="2563EB"/>
-                </a:solidFill>
-                <a:latin typeface="Calibri"/>
-              </a:defRPr>
-            </a:pPr>
-            <a:r>
-              <a:t>Enterprise Multi-Warehouse Inventory &amp; Supply Chain Management System</a:t>
-            </a:r>
-          </a:p>
-          <a:p>
-            <a:pPr algn="ctr">
-              <a:spcBef>
-                <a:spcPts val="1600"/>
-              </a:spcBef>
-              <a:defRPr sz="3200" b="1">
-                <a:solidFill>
-                  <a:srgbClr val="1E3A8A"/>
-                </a:solidFill>
-              </a:defRPr>
-            </a:pPr>
-            <a:r>
-              <a:t>THANK YOU!</a:t>
-            </a:r>
-          </a:p>
-          <a:p>
-            <a:pPr algn="ctr">
-              <a:spcBef>
-                <a:spcPts val="600"/>
-              </a:spcBef>
-              <a:defRPr sz="1400" b="1">
-                <a:solidFill>
-                  <a:srgbClr val="0F172A"/>
-                </a:solidFill>
-              </a:defRPr>
-            </a:pPr>
-            <a:r>
-              <a:t>Open for Questions, Evaluation &amp; System Defense</a:t>
-            </a:r>
-          </a:p>
-          <a:p>
-            <a:pPr algn="ctr">
-              <a:spcBef>
-                <a:spcPts val="1400"/>
-              </a:spcBef>
-              <a:defRPr sz="1100">
-                <a:solidFill>
-                  <a:srgbClr val="64748B"/>
-                </a:solidFill>
-              </a:defRPr>
-            </a:pPr>
-            <a:r>
-              <a:t>Tech Stack: SQLite3 Relational DBMS • Python Flask REST APIs • Vanilla ES6+ Web Client • Active Triggers &amp; Views</a:t>
-            </a:r>
-          </a:p>
-          <a:p>
-            <a:pPr algn="ctr">
-              <a:spcBef>
-                <a:spcPts val="800"/>
-              </a:spcBef>
-              <a:defRPr sz="1100" b="1">
-                <a:solidFill>
-                  <a:srgbClr val="2563EB"/>
-                </a:solidFill>
-              </a:defRPr>
-            </a:pPr>
-            <a:r>
-              <a:t>Department of Artificial Intelligence • Amrita Vishwa Vidyapeetham, Coimbatore, India • Batch B • Group 18</a:t>
+              <a:t>THANK YOU</a:t>
             </a:r>
           </a:p>
         </p:txBody>

--- a/StockMaster_Final_Review_Presentation.pptx
+++ b/StockMaster_Final_Review_Presentation.pptx
@@ -3830,7 +3830,7 @@
                         </a:defRPr>
                       </a:pPr>
                       <a:r>
-                        <a:t>Candidate Keys</a:t>
+                        <a:t>Candidate Keys (PK Underlined)</a:t>
                       </a:r>
                     </a:p>
                   </a:txBody>
@@ -3917,14 +3917,23 @@
                     <a:lstStyle/>
                     <a:p>
                       <a:pPr>
-                        <a:defRPr sz="1000" b="1">
+                        <a:defRPr sz="1000"/>
+                      </a:pPr>
+                      <a:r>
+                        <a:rPr b="1" u="sng">
+                          <a:solidFill>
+                            <a:srgbClr val="1E3A8A"/>
+                          </a:solidFill>
+                        </a:rPr>
+                        <a:t>UserID</a:t>
+                      </a:r>
+                      <a:r>
+                        <a:rPr b="0" u="none">
                           <a:solidFill>
                             <a:srgbClr val="0F172A"/>
                           </a:solidFill>
-                        </a:defRPr>
-                      </a:pPr>
-                      <a:r>
-                        <a:t>UserID; Email</a:t>
+                        </a:rPr>
+                        <a:t> ; Email</a:t>
                       </a:r>
                     </a:p>
                   </a:txBody>
@@ -4011,14 +4020,23 @@
                     <a:lstStyle/>
                     <a:p>
                       <a:pPr>
-                        <a:defRPr sz="1000" b="1">
+                        <a:defRPr sz="1000"/>
+                      </a:pPr>
+                      <a:r>
+                        <a:rPr b="1" u="sng">
+                          <a:solidFill>
+                            <a:srgbClr val="1E3A8A"/>
+                          </a:solidFill>
+                        </a:rPr>
+                        <a:t>SupplierID</a:t>
+                      </a:r>
+                      <a:r>
+                        <a:rPr b="0" u="none">
                           <a:solidFill>
                             <a:srgbClr val="0F172A"/>
                           </a:solidFill>
-                        </a:defRPr>
-                      </a:pPr>
-                      <a:r>
-                        <a:t>SupplierID; Email</a:t>
+                        </a:rPr>
+                        <a:t> ; Email</a:t>
                       </a:r>
                     </a:p>
                   </a:txBody>
@@ -4105,13 +4123,14 @@
                     <a:lstStyle/>
                     <a:p>
                       <a:pPr>
-                        <a:defRPr sz="1000" b="1">
-                          <a:solidFill>
-                            <a:srgbClr val="0F172A"/>
-                          </a:solidFill>
-                        </a:defRPr>
+                        <a:defRPr sz="1000"/>
                       </a:pPr>
                       <a:r>
+                        <a:rPr b="1" u="sng">
+                          <a:solidFill>
+                            <a:srgbClr val="1E3A8A"/>
+                          </a:solidFill>
+                        </a:rPr>
                         <a:t>ProductID</a:t>
                       </a:r>
                     </a:p>
@@ -4199,13 +4218,14 @@
                     <a:lstStyle/>
                     <a:p>
                       <a:pPr>
-                        <a:defRPr sz="1000" b="1">
-                          <a:solidFill>
-                            <a:srgbClr val="0F172A"/>
-                          </a:solidFill>
-                        </a:defRPr>
+                        <a:defRPr sz="1000"/>
                       </a:pPr>
                       <a:r>
+                        <a:rPr b="1" u="sng">
+                          <a:solidFill>
+                            <a:srgbClr val="1E3A8A"/>
+                          </a:solidFill>
+                        </a:rPr>
                         <a:t>WarehouseID</a:t>
                       </a:r>
                     </a:p>
@@ -4576,7 +4596,7 @@
                         </a:defRPr>
                       </a:pPr>
                       <a:r>
-                        <a:t>Candidate Keys</a:t>
+                        <a:t>Candidate Keys (PK Underlined)</a:t>
                       </a:r>
                     </a:p>
                   </a:txBody>
@@ -4663,14 +4683,23 @@
                     <a:lstStyle/>
                     <a:p>
                       <a:pPr>
-                        <a:defRPr sz="1000" b="1">
+                        <a:defRPr sz="1000"/>
+                      </a:pPr>
+                      <a:r>
+                        <a:rPr b="1" u="sng">
+                          <a:solidFill>
+                            <a:srgbClr val="1E3A8A"/>
+                          </a:solidFill>
+                        </a:rPr>
+                        <a:t>InventoryID</a:t>
+                      </a:r>
+                      <a:r>
+                        <a:rPr b="0" u="none">
                           <a:solidFill>
                             <a:srgbClr val="0F172A"/>
                           </a:solidFill>
-                        </a:defRPr>
-                      </a:pPr>
-                      <a:r>
-                        <a:t>InventoryID; (ProductID, WarehouseID)</a:t>
+                        </a:rPr>
+                        <a:t> ; (ProductID, WarehouseID)</a:t>
                       </a:r>
                     </a:p>
                   </a:txBody>
@@ -4757,13 +4786,14 @@
                     <a:lstStyle/>
                     <a:p>
                       <a:pPr>
-                        <a:defRPr sz="1000" b="1">
-                          <a:solidFill>
-                            <a:srgbClr val="0F172A"/>
-                          </a:solidFill>
-                        </a:defRPr>
+                        <a:defRPr sz="1000"/>
                       </a:pPr>
                       <a:r>
+                        <a:rPr b="1" u="sng">
+                          <a:solidFill>
+                            <a:srgbClr val="1E3A8A"/>
+                          </a:solidFill>
+                        </a:rPr>
                         <a:t>PurchaseOrderID</a:t>
                       </a:r>
                     </a:p>
@@ -4851,14 +4881,23 @@
                     <a:lstStyle/>
                     <a:p>
                       <a:pPr>
-                        <a:defRPr sz="1000" b="1">
+                        <a:defRPr sz="1000"/>
+                      </a:pPr>
+                      <a:r>
+                        <a:rPr b="1" u="sng">
+                          <a:solidFill>
+                            <a:srgbClr val="1E3A8A"/>
+                          </a:solidFill>
+                        </a:rPr>
+                        <a:t>ItemID</a:t>
+                      </a:r>
+                      <a:r>
+                        <a:rPr b="0" u="none">
                           <a:solidFill>
                             <a:srgbClr val="0F172A"/>
                           </a:solidFill>
-                        </a:defRPr>
-                      </a:pPr>
-                      <a:r>
-                        <a:t>ItemID; (PurchaseOrderID, ProductID)</a:t>
+                        </a:rPr>
+                        <a:t> ; (PurchaseOrderID, ProductID)</a:t>
                       </a:r>
                     </a:p>
                   </a:txBody>
@@ -4945,13 +4984,14 @@
                     <a:lstStyle/>
                     <a:p>
                       <a:pPr>
-                        <a:defRPr sz="1000" b="1">
-                          <a:solidFill>
-                            <a:srgbClr val="0F172A"/>
-                          </a:solidFill>
-                        </a:defRPr>
+                        <a:defRPr sz="1000"/>
                       </a:pPr>
                       <a:r>
+                        <a:rPr b="1" u="sng">
+                          <a:solidFill>
+                            <a:srgbClr val="1E3A8A"/>
+                          </a:solidFill>
+                        </a:rPr>
                         <a:t>SalesOrderID</a:t>
                       </a:r>
                     </a:p>
@@ -5322,7 +5362,7 @@
                         </a:defRPr>
                       </a:pPr>
                       <a:r>
-                        <a:t>Candidate Keys</a:t>
+                        <a:t>Candidate Keys (PK Underlined)</a:t>
                       </a:r>
                     </a:p>
                   </a:txBody>
@@ -5409,14 +5449,23 @@
                     <a:lstStyle/>
                     <a:p>
                       <a:pPr>
-                        <a:defRPr sz="1000" b="1">
+                        <a:defRPr sz="1000"/>
+                      </a:pPr>
+                      <a:r>
+                        <a:rPr b="1" u="sng">
+                          <a:solidFill>
+                            <a:srgbClr val="1E3A8A"/>
+                          </a:solidFill>
+                        </a:rPr>
+                        <a:t>ItemID</a:t>
+                      </a:r>
+                      <a:r>
+                        <a:rPr b="0" u="none">
                           <a:solidFill>
                             <a:srgbClr val="0F172A"/>
                           </a:solidFill>
-                        </a:defRPr>
-                      </a:pPr>
-                      <a:r>
-                        <a:t>ItemID; (SalesOrderID, ProductID)</a:t>
+                        </a:rPr>
+                        <a:t> ; (SalesOrderID, ProductID)</a:t>
                       </a:r>
                     </a:p>
                   </a:txBody>
@@ -5503,14 +5552,23 @@
                     <a:lstStyle/>
                     <a:p>
                       <a:pPr>
-                        <a:defRPr sz="1000" b="1">
+                        <a:defRPr sz="1000"/>
+                      </a:pPr>
+                      <a:r>
+                        <a:rPr b="1" u="sng">
+                          <a:solidFill>
+                            <a:srgbClr val="1E3A8A"/>
+                          </a:solidFill>
+                        </a:rPr>
+                        <a:t>ShipmentID</a:t>
+                      </a:r>
+                      <a:r>
+                        <a:rPr b="0" u="none">
                           <a:solidFill>
                             <a:srgbClr val="0F172A"/>
                           </a:solidFill>
-                        </a:defRPr>
-                      </a:pPr>
-                      <a:r>
-                        <a:t>ShipmentID; SalesOrderID</a:t>
+                        </a:rPr>
+                        <a:t> ; SalesOrderID</a:t>
                       </a:r>
                     </a:p>
                   </a:txBody>
@@ -5597,14 +5655,23 @@
                     <a:lstStyle/>
                     <a:p>
                       <a:pPr>
-                        <a:defRPr sz="1000" b="1">
+                        <a:defRPr sz="1000"/>
+                      </a:pPr>
+                      <a:r>
+                        <a:rPr b="1" u="sng">
+                          <a:solidFill>
+                            <a:srgbClr val="1E3A8A"/>
+                          </a:solidFill>
+                        </a:rPr>
+                        <a:t>BillID</a:t>
+                      </a:r>
+                      <a:r>
+                        <a:rPr b="0" u="none">
                           <a:solidFill>
                             <a:srgbClr val="0F172A"/>
                           </a:solidFill>
-                        </a:defRPr>
-                      </a:pPr>
-                      <a:r>
-                        <a:t>BillID; SalesOrderID</a:t>
+                        </a:rPr>
+                        <a:t> ; SalesOrderID</a:t>
                       </a:r>
                     </a:p>
                   </a:txBody>
@@ -17165,15 +17232,24 @@
               <a:spcBef>
                 <a:spcPts val="200"/>
               </a:spcBef>
-              <a:defRPr sz="950">
+            </a:pPr>
+            <a:r>
+              <a:rPr sz="950" b="1" u="sng">
+                <a:solidFill>
+                  <a:srgbClr val="1E3A8A"/>
+                </a:solidFill>
+                <a:latin typeface="Consolas"/>
+              </a:rPr>
+              <a:t>UserID</a:t>
+            </a:r>
+            <a:r>
+              <a:rPr sz="950" b="0" u="none">
                 <a:solidFill>
                   <a:srgbClr val="334155"/>
                 </a:solidFill>
                 <a:latin typeface="Consolas"/>
-              </a:defRPr>
-            </a:pPr>
-            <a:r>
-              <a:t>UserID [PK], Name, Email [UNIQUE], Password, Role</a:t>
+              </a:rPr>
+              <a:t> [PK], Name, Email [UNIQUE], Password, Role</a:t>
             </a:r>
           </a:p>
           <a:p>
@@ -17196,15 +17272,24 @@
               <a:spcBef>
                 <a:spcPts val="200"/>
               </a:spcBef>
-              <a:defRPr sz="950">
+            </a:pPr>
+            <a:r>
+              <a:rPr sz="950" b="1" u="sng">
+                <a:solidFill>
+                  <a:srgbClr val="1E3A8A"/>
+                </a:solidFill>
+                <a:latin typeface="Consolas"/>
+              </a:rPr>
+              <a:t>SupplierID</a:t>
+            </a:r>
+            <a:r>
+              <a:rPr sz="950" b="0" u="none">
                 <a:solidFill>
                   <a:srgbClr val="334155"/>
                 </a:solidFill>
                 <a:latin typeface="Consolas"/>
-              </a:defRPr>
-            </a:pPr>
-            <a:r>
-              <a:t>SupplierID [PK], SupplierName, Phone, Email [UNIQUE], Address</a:t>
+              </a:rPr>
+              <a:t> [PK], SupplierName, Phone, Email [UNIQUE], Address</a:t>
             </a:r>
           </a:p>
           <a:p>
@@ -17227,15 +17312,24 @@
               <a:spcBef>
                 <a:spcPts val="200"/>
               </a:spcBef>
-              <a:defRPr sz="950">
+            </a:pPr>
+            <a:r>
+              <a:rPr sz="950" b="1" u="sng">
+                <a:solidFill>
+                  <a:srgbClr val="1E3A8A"/>
+                </a:solidFill>
+                <a:latin typeface="Consolas"/>
+              </a:rPr>
+              <a:t>ProductID</a:t>
+            </a:r>
+            <a:r>
+              <a:rPr sz="950" b="0" u="none">
                 <a:solidFill>
                   <a:srgbClr val="334155"/>
                 </a:solidFill>
                 <a:latin typeface="Consolas"/>
-              </a:defRPr>
-            </a:pPr>
-            <a:r>
-              <a:t>ProductID [PK], ProductName, Description, Category, UnitPrice, SupplierID [FK]</a:t>
+              </a:rPr>
+              <a:t> [PK], ProductName, Description, Category, UnitPrice, SupplierID [FK]</a:t>
             </a:r>
           </a:p>
           <a:p>
@@ -17258,15 +17352,24 @@
               <a:spcBef>
                 <a:spcPts val="200"/>
               </a:spcBef>
-              <a:defRPr sz="950">
+            </a:pPr>
+            <a:r>
+              <a:rPr sz="950" b="1" u="sng">
+                <a:solidFill>
+                  <a:srgbClr val="1E3A8A"/>
+                </a:solidFill>
+                <a:latin typeface="Consolas"/>
+              </a:rPr>
+              <a:t>WarehouseID</a:t>
+            </a:r>
+            <a:r>
+              <a:rPr sz="950" b="0" u="none">
                 <a:solidFill>
                   <a:srgbClr val="334155"/>
                 </a:solidFill>
                 <a:latin typeface="Consolas"/>
-              </a:defRPr>
-            </a:pPr>
-            <a:r>
-              <a:t>WarehouseID [PK], WarehouseName, Location, Capacity</a:t>
+              </a:rPr>
+              <a:t> [PK], WarehouseName, Location, Capacity</a:t>
             </a:r>
           </a:p>
         </p:txBody>
@@ -17372,15 +17475,24 @@
               <a:spcBef>
                 <a:spcPts val="200"/>
               </a:spcBef>
-              <a:defRPr sz="950">
+            </a:pPr>
+            <a:r>
+              <a:rPr sz="950" b="1" u="sng">
+                <a:solidFill>
+                  <a:srgbClr val="1E3A8A"/>
+                </a:solidFill>
+                <a:latin typeface="Consolas"/>
+              </a:rPr>
+              <a:t>InventoryID</a:t>
+            </a:r>
+            <a:r>
+              <a:rPr sz="950" b="0" u="none">
                 <a:solidFill>
                   <a:srgbClr val="334155"/>
                 </a:solidFill>
                 <a:latin typeface="Consolas"/>
-              </a:defRPr>
-            </a:pPr>
-            <a:r>
-              <a:t>InventoryID [PK], ProductID [FK], WarehouseID [FK], Quantity, MinimumStock</a:t>
+              </a:rPr>
+              <a:t> [PK], ProductID [FK], WarehouseID [FK], Quantity, MinimumStock</a:t>
             </a:r>
           </a:p>
           <a:p>
@@ -17403,15 +17515,24 @@
               <a:spcBef>
                 <a:spcPts val="200"/>
               </a:spcBef>
-              <a:defRPr sz="950">
+            </a:pPr>
+            <a:r>
+              <a:rPr sz="950" b="1" u="sng">
+                <a:solidFill>
+                  <a:srgbClr val="1E3A8A"/>
+                </a:solidFill>
+                <a:latin typeface="Consolas"/>
+              </a:rPr>
+              <a:t>PurchaseOrderID</a:t>
+            </a:r>
+            <a:r>
+              <a:rPr sz="950" b="0" u="none">
                 <a:solidFill>
                   <a:srgbClr val="334155"/>
                 </a:solidFill>
                 <a:latin typeface="Consolas"/>
-              </a:defRPr>
-            </a:pPr>
-            <a:r>
-              <a:t>PurchaseOrderID [PK], SupplierID [FK], WarehouseID [FK], OrderDate, Status, TotalAmount</a:t>
+              </a:rPr>
+              <a:t> [PK], SupplierID [FK], WarehouseID [FK], OrderDate, Status, TotalAmount</a:t>
             </a:r>
           </a:p>
           <a:p>
@@ -17434,15 +17555,24 @@
               <a:spcBef>
                 <a:spcPts val="200"/>
               </a:spcBef>
-              <a:defRPr sz="950">
+            </a:pPr>
+            <a:r>
+              <a:rPr sz="950" b="1" u="sng">
+                <a:solidFill>
+                  <a:srgbClr val="1E3A8A"/>
+                </a:solidFill>
+                <a:latin typeface="Consolas"/>
+              </a:rPr>
+              <a:t>ItemID</a:t>
+            </a:r>
+            <a:r>
+              <a:rPr sz="950" b="0" u="none">
                 <a:solidFill>
                   <a:srgbClr val="334155"/>
                 </a:solidFill>
                 <a:latin typeface="Consolas"/>
-              </a:defRPr>
-            </a:pPr>
-            <a:r>
-              <a:t>ItemID [PK], PurchaseOrderID [FK], ProductID [FK], Quantity, UnitPrice</a:t>
+              </a:rPr>
+              <a:t> [PK], PurchaseOrderID [FK], ProductID [FK], Quantity, UnitPrice</a:t>
             </a:r>
           </a:p>
           <a:p>
@@ -17465,15 +17595,24 @@
               <a:spcBef>
                 <a:spcPts val="200"/>
               </a:spcBef>
-              <a:defRPr sz="950">
+            </a:pPr>
+            <a:r>
+              <a:rPr sz="950" b="1" u="sng">
+                <a:solidFill>
+                  <a:srgbClr val="1E3A8A"/>
+                </a:solidFill>
+                <a:latin typeface="Consolas"/>
+              </a:rPr>
+              <a:t>SalesOrderID</a:t>
+            </a:r>
+            <a:r>
+              <a:rPr sz="950" b="0" u="none">
                 <a:solidFill>
                   <a:srgbClr val="334155"/>
                 </a:solidFill>
                 <a:latin typeface="Consolas"/>
-              </a:defRPr>
-            </a:pPr>
-            <a:r>
-              <a:t>SalesOrderID [PK], CustomerName, WarehouseID [FK], OrderDate, Status, TotalAmount</a:t>
+              </a:rPr>
+              <a:t> [PK], CustomerName, WarehouseID [FK], OrderDate, Status, TotalAmount</a:t>
             </a:r>
           </a:p>
         </p:txBody>
@@ -17579,15 +17718,24 @@
               <a:spcBef>
                 <a:spcPts val="200"/>
               </a:spcBef>
-              <a:defRPr sz="950">
+            </a:pPr>
+            <a:r>
+              <a:rPr sz="950" b="1" u="sng">
+                <a:solidFill>
+                  <a:srgbClr val="1E3A8A"/>
+                </a:solidFill>
+                <a:latin typeface="Consolas"/>
+              </a:rPr>
+              <a:t>ItemID</a:t>
+            </a:r>
+            <a:r>
+              <a:rPr sz="950" b="0" u="none">
                 <a:solidFill>
                   <a:srgbClr val="334155"/>
                 </a:solidFill>
                 <a:latin typeface="Consolas"/>
-              </a:defRPr>
-            </a:pPr>
-            <a:r>
-              <a:t>ItemID [PK], SalesOrderID [FK], ProductID [FK], Quantity, UnitPrice</a:t>
+              </a:rPr>
+              <a:t> [PK], SalesOrderID [FK], ProductID [FK], Quantity, UnitPrice</a:t>
             </a:r>
           </a:p>
           <a:p>
@@ -17610,15 +17758,24 @@
               <a:spcBef>
                 <a:spcPts val="200"/>
               </a:spcBef>
-              <a:defRPr sz="950">
+            </a:pPr>
+            <a:r>
+              <a:rPr sz="950" b="1" u="sng">
+                <a:solidFill>
+                  <a:srgbClr val="1E3A8A"/>
+                </a:solidFill>
+                <a:latin typeface="Consolas"/>
+              </a:rPr>
+              <a:t>ShipmentID</a:t>
+            </a:r>
+            <a:r>
+              <a:rPr sz="950" b="0" u="none">
                 <a:solidFill>
                   <a:srgbClr val="334155"/>
                 </a:solidFill>
                 <a:latin typeface="Consolas"/>
-              </a:defRPr>
-            </a:pPr>
-            <a:r>
-              <a:t>ShipmentID [PK], SalesOrderID [FK, UNIQUE], WarehouseID [FK], ShipmentDate, Status</a:t>
+              </a:rPr>
+              <a:t> [PK], SalesOrderID [FK, UNIQUE], WarehouseID [FK], ShipmentDate, Status</a:t>
             </a:r>
           </a:p>
           <a:p>
@@ -17641,15 +17798,24 @@
               <a:spcBef>
                 <a:spcPts val="200"/>
               </a:spcBef>
-              <a:defRPr sz="950">
+            </a:pPr>
+            <a:r>
+              <a:rPr sz="950" b="1" u="sng">
+                <a:solidFill>
+                  <a:srgbClr val="1E3A8A"/>
+                </a:solidFill>
+                <a:latin typeface="Consolas"/>
+              </a:rPr>
+              <a:t>BillID</a:t>
+            </a:r>
+            <a:r>
+              <a:rPr sz="950" b="0" u="none">
                 <a:solidFill>
                   <a:srgbClr val="334155"/>
                 </a:solidFill>
                 <a:latin typeface="Consolas"/>
-              </a:defRPr>
-            </a:pPr>
-            <a:r>
-              <a:t>BillID [PK], SalesOrderID [FK, UNIQUE], Amount, PaymentMethod, PaymentStatus, PaymentDate</a:t>
+              </a:rPr>
+              <a:t> [PK], SalesOrderID [FK, UNIQUE], Amount, PaymentMethod, PaymentStatus, PaymentDate</a:t>
             </a:r>
           </a:p>
         </p:txBody>

--- a/StockMaster_Final_Review_Presentation.pptx
+++ b/StockMaster_Final_Review_Presentation.pptx
@@ -3254,7 +3254,7 @@
           <a:noFill/>
         </p:spPr>
         <p:txBody>
-          <a:bodyPr wrap="none">
+          <a:bodyPr wrap="square">
             <a:spAutoFit/>
           </a:bodyPr>
           <a:lstStyle/>
@@ -3383,7 +3383,7 @@
           <a:noFill/>
         </p:spPr>
         <p:txBody>
-          <a:bodyPr wrap="none">
+          <a:bodyPr wrap="square">
             <a:spAutoFit/>
           </a:bodyPr>
           <a:lstStyle/>
@@ -3419,7 +3419,7 @@
           <a:noFill/>
         </p:spPr>
         <p:txBody>
-          <a:bodyPr wrap="none">
+          <a:bodyPr wrap="square">
             <a:spAutoFit/>
           </a:bodyPr>
           <a:lstStyle/>
@@ -3728,7 +3728,7 @@
               </a:defRPr>
             </a:pPr>
             <a:r>
-              <a:t>Database Normalization Analysis (Part 1: Core Master Entities)</a:t>
+              <a:t>Database Normalization: Master Entities</a:t>
             </a:r>
           </a:p>
         </p:txBody>
@@ -4494,7 +4494,7 @@
               </a:defRPr>
             </a:pPr>
             <a:r>
-              <a:t>Database Normalization Analysis (Part 2: Inventory &amp; Orders)</a:t>
+              <a:t>Database Normalization: Inventory &amp; Orders</a:t>
             </a:r>
           </a:p>
         </p:txBody>
@@ -5260,7 +5260,7 @@
               </a:defRPr>
             </a:pPr>
             <a:r>
-              <a:t>Database Normalization Analysis (Part 3: Line Items, Shipments &amp; Billing)</a:t>
+              <a:t>Database Normalization: Line Items, Shipments &amp; Billing</a:t>
             </a:r>
           </a:p>
         </p:txBody>
@@ -5740,7 +5740,7 @@
         </p:nvSpPr>
         <p:spPr>
           <a:xfrm>
-            <a:off x="731520" y="5166360"/>
+            <a:off x="731520" y="5120640"/>
             <a:ext cx="10728655" cy="1234440"/>
           </a:xfrm>
           <a:prstGeom prst="roundRect">
@@ -5785,8 +5785,8 @@
         </p:nvSpPr>
         <p:spPr>
           <a:xfrm>
-            <a:off x="914400" y="5230368"/>
-            <a:ext cx="10362895" cy="1005840"/>
+            <a:off x="914400" y="5193792"/>
+            <a:ext cx="10362895" cy="1097280"/>
           </a:xfrm>
           <a:prstGeom prst="rect">
             <a:avLst/>
@@ -5794,7 +5794,7 @@
           <a:noFill/>
         </p:spPr>
         <p:txBody>
-          <a:bodyPr wrap="none">
+          <a:bodyPr wrap="square" lIns="137160" rIns="137160" tIns="73152" bIns="73152">
             <a:spAutoFit/>
           </a:bodyPr>
           <a:lstStyle/>
@@ -5815,7 +5815,7 @@
               <a:spcBef>
                 <a:spcPts val="300"/>
               </a:spcBef>
-              <a:defRPr sz="1050">
+              <a:defRPr sz="1000">
                 <a:solidFill>
                   <a:srgbClr val="0F172A"/>
                 </a:solidFill>
@@ -9556,7 +9556,7 @@
           <a:noFill/>
         </p:spPr>
         <p:txBody>
-          <a:bodyPr wrap="none">
+          <a:bodyPr wrap="square">
             <a:spAutoFit/>
           </a:bodyPr>
           <a:lstStyle/>
@@ -9836,7 +9836,7 @@
           <a:noFill/>
         </p:spPr>
         <p:txBody>
-          <a:bodyPr wrap="none">
+          <a:bodyPr wrap="square">
             <a:spAutoFit/>
           </a:bodyPr>
           <a:lstStyle/>
@@ -12564,7 +12564,7 @@
           <a:noFill/>
         </p:spPr>
         <p:txBody>
-          <a:bodyPr wrap="none">
+          <a:bodyPr wrap="square">
             <a:spAutoFit/>
           </a:bodyPr>
           <a:lstStyle/>
@@ -12776,7 +12776,7 @@
           <a:noFill/>
         </p:spPr>
         <p:txBody>
-          <a:bodyPr wrap="none">
+          <a:bodyPr wrap="square">
             <a:spAutoFit/>
           </a:bodyPr>
           <a:lstStyle/>
@@ -15026,7 +15026,7 @@
           <a:noFill/>
         </p:spPr>
         <p:txBody>
-          <a:bodyPr wrap="none">
+          <a:bodyPr wrap="square">
             <a:spAutoFit/>
           </a:bodyPr>
           <a:lstStyle/>
@@ -15597,7 +15597,7 @@
           <a:noFill/>
         </p:spPr>
         <p:txBody>
-          <a:bodyPr wrap="none">
+          <a:bodyPr wrap="square">
             <a:spAutoFit/>
           </a:bodyPr>
           <a:lstStyle/>
@@ -16138,7 +16138,7 @@
           <a:noFill/>
         </p:spPr>
         <p:txBody>
-          <a:bodyPr wrap="none">
+          <a:bodyPr wrap="square">
             <a:spAutoFit/>
           </a:bodyPr>
           <a:lstStyle/>
@@ -16721,7 +16721,7 @@
           <a:noFill/>
         </p:spPr>
         <p:txBody>
-          <a:bodyPr wrap="none">
+          <a:bodyPr wrap="square">
             <a:spAutoFit/>
           </a:bodyPr>
           <a:lstStyle/>
